--- a/sk-challenge-puzzle-bi-bot/presentation/Puzzle_BI_чат-бот.pptx
+++ b/sk-challenge-puzzle-bi-bot/presentation/Puzzle_BI_чат-бот.pptx
@@ -5779,21 +5779,45 @@
                 </a:solidFill>
                 <a:latin typeface="Intro"/>
               </a:rPr>
-              <a:t>Покрытие требований кейса</a:t>
-            </a:r>
-          </a:p>
-        </p:txBody>
-      </p:sp>
-      <p:sp>
-        <p:nvSpPr>
-          <p:cNvPr id="29" name="TextBox 28"/>
-          <p:cNvSpPr txBox="1"/>
-          <p:nvPr/>
-        </p:nvSpPr>
+              <a:t>Что сделано</a:t>
+            </a:r>
+          </a:p>
+        </p:txBody>
+      </p:sp>
+      <p:pic>
+        <p:nvPicPr>
+          <p:cNvPr id="29" name="Picture 28" descr="i_bot_b.png"/>
+          <p:cNvPicPr>
+            <a:picLocks noChangeAspect="1"/>
+          </p:cNvPicPr>
+          <p:nvPr/>
+        </p:nvPicPr>
+        <p:blipFill>
+          <a:blip r:embed="rId6"/>
+          <a:stretch>
+            <a:fillRect/>
+          </a:stretch>
+        </p:blipFill>
         <p:spPr>
           <a:xfrm>
             <a:off x="5724000" y="2196000"/>
-            <a:ext cx="3780000" cy="251999"/>
+            <a:ext cx="324000" cy="324000"/>
+          </a:xfrm>
+          <a:prstGeom prst="rect">
+            <a:avLst/>
+          </a:prstGeom>
+        </p:spPr>
+      </p:pic>
+      <p:sp>
+        <p:nvSpPr>
+          <p:cNvPr id="30" name="TextBox 29"/>
+          <p:cNvSpPr txBox="1"/>
+          <p:nvPr/>
+        </p:nvSpPr>
+        <p:spPr>
+          <a:xfrm>
+            <a:off x="6192000" y="2178000"/>
+            <a:ext cx="5544000" cy="251999"/>
           </a:xfrm>
           <a:prstGeom prst="rect">
             <a:avLst/>
@@ -5818,21 +5842,21 @@
                 </a:solidFill>
                 <a:latin typeface="Intro"/>
               </a:rPr>
-              <a:t>Минимальный результат (MVP)</a:t>
-            </a:r>
-          </a:p>
-        </p:txBody>
-      </p:sp>
-      <p:sp>
-        <p:nvSpPr>
-          <p:cNvPr id="30" name="TextBox 29"/>
-          <p:cNvSpPr txBox="1"/>
-          <p:nvPr/>
-        </p:nvSpPr>
-        <p:spPr>
-          <a:xfrm>
-            <a:off x="9792000" y="2070000"/>
-            <a:ext cx="1944000" cy="468000"/>
+              <a:t>Рабочий бот на данных кейса</a:t>
+            </a:r>
+          </a:p>
+        </p:txBody>
+      </p:sp>
+      <p:sp>
+        <p:nvSpPr>
+          <p:cNvPr id="31" name="TextBox 30"/>
+          <p:cNvSpPr txBox="1"/>
+          <p:nvPr/>
+        </p:nvSpPr>
+        <p:spPr>
+          <a:xfrm>
+            <a:off x="6192000" y="2448000"/>
+            <a:ext cx="5544000" cy="432000"/>
           </a:xfrm>
           <a:prstGeom prst="rect">
             <a:avLst/>
@@ -5845,33 +5869,57 @@
           </a:bodyPr>
           <a:lstStyle/>
           <a:p>
-            <a:pPr algn="r">
-              <a:lnSpc>
-                <a:spcPct val="100000"/>
-              </a:lnSpc>
-            </a:pPr>
-            <a:r>
-              <a:rPr sz="2600" b="0">
-                <a:solidFill>
-                  <a:srgbClr val="12A150"/>
-                </a:solidFill>
-                <a:latin typeface="Peace Sans"/>
-              </a:rPr>
-              <a:t>7 из 7</a:t>
-            </a:r>
-          </a:p>
-        </p:txBody>
-      </p:sp>
-      <p:sp>
-        <p:nvSpPr>
-          <p:cNvPr id="31" name="TextBox 30"/>
-          <p:cNvSpPr txBox="1"/>
-          <p:nvPr/>
-        </p:nvSpPr>
-        <p:spPr>
-          <a:xfrm>
-            <a:off x="5724000" y="2466000"/>
-            <a:ext cx="3960000" cy="576000"/>
+            <a:pPr algn="l">
+              <a:lnSpc>
+                <a:spcPct val="100000"/>
+              </a:lnSpc>
+            </a:pPr>
+            <a:r>
+              <a:rPr sz="1100" b="0">
+                <a:solidFill>
+                  <a:srgbClr val="141B34"/>
+                </a:solidFill>
+                <a:latin typeface="Evolventa"/>
+              </a:rPr>
+              <a:t>Python и встроенная база, запускается двумя командами</a:t>
+            </a:r>
+          </a:p>
+        </p:txBody>
+      </p:sp>
+      <p:pic>
+        <p:nvPicPr>
+          <p:cNvPr id="32" name="Picture 31" descr="i_layout-dashboard_b.png"/>
+          <p:cNvPicPr>
+            <a:picLocks noChangeAspect="1"/>
+          </p:cNvPicPr>
+          <p:nvPr/>
+        </p:nvPicPr>
+        <p:blipFill>
+          <a:blip r:embed="rId7"/>
+          <a:stretch>
+            <a:fillRect/>
+          </a:stretch>
+        </p:blipFill>
+        <p:spPr>
+          <a:xfrm>
+            <a:off x="5724000" y="2970000"/>
+            <a:ext cx="324000" cy="324000"/>
+          </a:xfrm>
+          <a:prstGeom prst="rect">
+            <a:avLst/>
+          </a:prstGeom>
+        </p:spPr>
+      </p:pic>
+      <p:sp>
+        <p:nvSpPr>
+          <p:cNvPr id="33" name="TextBox 32"/>
+          <p:cNvSpPr txBox="1"/>
+          <p:nvPr/>
+        </p:nvSpPr>
+        <p:spPr>
+          <a:xfrm>
+            <a:off x="6192000" y="2951999"/>
+            <a:ext cx="5544000" cy="251999"/>
           </a:xfrm>
           <a:prstGeom prst="rect">
             <a:avLst/>
@@ -5890,27 +5938,90 @@
               </a:lnSpc>
             </a:pPr>
             <a:r>
+              <a:rPr sz="1250" b="0">
+                <a:solidFill>
+                  <a:srgbClr val="141B34"/>
+                </a:solidFill>
+                <a:latin typeface="Intro"/>
+              </a:rPr>
+              <a:t>Дашборд по вопросу</a:t>
+            </a:r>
+          </a:p>
+        </p:txBody>
+      </p:sp>
+      <p:sp>
+        <p:nvSpPr>
+          <p:cNvPr id="34" name="TextBox 33"/>
+          <p:cNvSpPr txBox="1"/>
+          <p:nvPr/>
+        </p:nvSpPr>
+        <p:spPr>
+          <a:xfrm>
+            <a:off x="6192000" y="3221999"/>
+            <a:ext cx="5544000" cy="432000"/>
+          </a:xfrm>
+          <a:prstGeom prst="rect">
+            <a:avLst/>
+          </a:prstGeom>
+          <a:noFill/>
+        </p:spPr>
+        <p:txBody>
+          <a:bodyPr wrap="square" lIns="0" rIns="0" tIns="0" bIns="0" anchor="t">
+            <a:spAutoFit/>
+          </a:bodyPr>
+          <a:lstStyle/>
+          <a:p>
+            <a:pPr algn="l">
+              <a:lnSpc>
+                <a:spcPct val="100000"/>
+              </a:lnSpc>
+            </a:pPr>
+            <a:r>
               <a:rPr sz="1100" b="0">
                 <a:solidFill>
                   <a:srgbClr val="141B34"/>
                 </a:solidFill>
                 <a:latin typeface="Evolventa"/>
               </a:rPr>
-              <a:t>вопрос, уточнение, таблица, интерактивный график, сохранение</a:t>
-            </a:r>
-          </a:p>
-        </p:txBody>
-      </p:sp>
-      <p:sp>
-        <p:nvSpPr>
-          <p:cNvPr id="32" name="TextBox 31"/>
-          <p:cNvSpPr txBox="1"/>
-          <p:nvPr/>
-        </p:nvSpPr>
-        <p:spPr>
-          <a:xfrm>
-            <a:off x="5724000" y="3221999"/>
-            <a:ext cx="3780000" cy="251999"/>
+              <a:t>KPI, фильтры с поиском и каскадом, переключатели, 4 графика, резюме</a:t>
+            </a:r>
+          </a:p>
+        </p:txBody>
+      </p:sp>
+      <p:pic>
+        <p:nvPicPr>
+          <p:cNvPr id="35" name="Picture 34" descr="i_sigma_b.png"/>
+          <p:cNvPicPr>
+            <a:picLocks noChangeAspect="1"/>
+          </p:cNvPicPr>
+          <p:nvPr/>
+        </p:nvPicPr>
+        <p:blipFill>
+          <a:blip r:embed="rId3"/>
+          <a:stretch>
+            <a:fillRect/>
+          </a:stretch>
+        </p:blipFill>
+        <p:spPr>
+          <a:xfrm>
+            <a:off x="5724000" y="3744000"/>
+            <a:ext cx="324000" cy="324000"/>
+          </a:xfrm>
+          <a:prstGeom prst="rect">
+            <a:avLst/>
+          </a:prstGeom>
+        </p:spPr>
+      </p:pic>
+      <p:sp>
+        <p:nvSpPr>
+          <p:cNvPr id="36" name="TextBox 35"/>
+          <p:cNvSpPr txBox="1"/>
+          <p:nvPr/>
+        </p:nvSpPr>
+        <p:spPr>
+          <a:xfrm>
+            <a:off x="6192000" y="3726000"/>
+            <a:ext cx="5544000" cy="251999"/>
           </a:xfrm>
           <a:prstGeom prst="rect">
             <a:avLst/>
@@ -5935,21 +6046,21 @@
                 </a:solidFill>
                 <a:latin typeface="Intro"/>
               </a:rPr>
-              <a:t>Целевой результат</a:t>
-            </a:r>
-          </a:p>
-        </p:txBody>
-      </p:sp>
-      <p:sp>
-        <p:nvSpPr>
-          <p:cNvPr id="33" name="TextBox 32"/>
-          <p:cNvSpPr txBox="1"/>
-          <p:nvPr/>
-        </p:nvSpPr>
-        <p:spPr>
-          <a:xfrm>
-            <a:off x="9792000" y="3096000"/>
-            <a:ext cx="1944000" cy="468000"/>
+              <a:t>Работа диалогом</a:t>
+            </a:r>
+          </a:p>
+        </p:txBody>
+      </p:sp>
+      <p:sp>
+        <p:nvSpPr>
+          <p:cNvPr id="37" name="TextBox 36"/>
+          <p:cNvSpPr txBox="1"/>
+          <p:nvPr/>
+        </p:nvSpPr>
+        <p:spPr>
+          <a:xfrm>
+            <a:off x="6192000" y="3996000"/>
+            <a:ext cx="5544000" cy="432000"/>
           </a:xfrm>
           <a:prstGeom prst="rect">
             <a:avLst/>
@@ -5962,33 +6073,57 @@
           </a:bodyPr>
           <a:lstStyle/>
           <a:p>
-            <a:pPr algn="r">
-              <a:lnSpc>
-                <a:spcPct val="100000"/>
-              </a:lnSpc>
-            </a:pPr>
-            <a:r>
-              <a:rPr sz="2600" b="0">
-                <a:solidFill>
-                  <a:srgbClr val="12A150"/>
-                </a:solidFill>
-                <a:latin typeface="Peace Sans"/>
-              </a:rPr>
-              <a:t>9 из 9</a:t>
-            </a:r>
-          </a:p>
-        </p:txBody>
-      </p:sp>
-      <p:sp>
-        <p:nvSpPr>
-          <p:cNvPr id="34" name="TextBox 33"/>
-          <p:cNvSpPr txBox="1"/>
-          <p:nvPr/>
-        </p:nvSpPr>
-        <p:spPr>
-          <a:xfrm>
-            <a:off x="5724000" y="3491999"/>
-            <a:ext cx="3960000" cy="576000"/>
+            <a:pPr algn="l">
+              <a:lnSpc>
+                <a:spcPct val="100000"/>
+              </a:lnSpc>
+            </a:pPr>
+            <a:r>
+              <a:rPr sz="1100" b="0">
+                <a:solidFill>
+                  <a:srgbClr val="141B34"/>
+                </a:solidFill>
+                <a:latin typeface="Evolventa"/>
+              </a:rPr>
+              <a:t>колонки, правка графиков, сохранение, версии, экспорт в HTML и Excel</a:t>
+            </a:r>
+          </a:p>
+        </p:txBody>
+      </p:sp>
+      <p:pic>
+        <p:nvPicPr>
+          <p:cNvPr id="38" name="Picture 37" descr="qr_github.png"/>
+          <p:cNvPicPr>
+            <a:picLocks noChangeAspect="1"/>
+          </p:cNvPicPr>
+          <p:nvPr/>
+        </p:nvPicPr>
+        <p:blipFill>
+          <a:blip r:embed="rId8"/>
+          <a:stretch>
+            <a:fillRect/>
+          </a:stretch>
+        </p:blipFill>
+        <p:spPr>
+          <a:xfrm>
+            <a:off x="5724000" y="4590000"/>
+            <a:ext cx="1404000" cy="1404000"/>
+          </a:xfrm>
+          <a:prstGeom prst="rect">
+            <a:avLst/>
+          </a:prstGeom>
+        </p:spPr>
+      </p:pic>
+      <p:sp>
+        <p:nvSpPr>
+          <p:cNvPr id="39" name="TextBox 38"/>
+          <p:cNvSpPr txBox="1"/>
+          <p:nvPr/>
+        </p:nvSpPr>
+        <p:spPr>
+          <a:xfrm>
+            <a:off x="7236000" y="4752000"/>
+            <a:ext cx="1440000" cy="288000"/>
           </a:xfrm>
           <a:prstGeom prst="rect">
             <a:avLst/>
@@ -6007,27 +6142,90 @@
               </a:lnSpc>
             </a:pPr>
             <a:r>
-              <a:rPr sz="1100" b="0">
+              <a:rPr sz="1200" b="0">
                 <a:solidFill>
                   <a:srgbClr val="141B34"/>
                 </a:solidFill>
+                <a:latin typeface="Intro"/>
+              </a:rPr>
+              <a:t>Код на GitHub</a:t>
+            </a:r>
+          </a:p>
+        </p:txBody>
+      </p:sp>
+      <p:sp>
+        <p:nvSpPr>
+          <p:cNvPr id="40" name="TextBox 39"/>
+          <p:cNvSpPr txBox="1"/>
+          <p:nvPr/>
+        </p:nvSpPr>
+        <p:spPr>
+          <a:xfrm>
+            <a:off x="7236000" y="5058000"/>
+            <a:ext cx="1404000" cy="576000"/>
+          </a:xfrm>
+          <a:prstGeom prst="rect">
+            <a:avLst/>
+          </a:prstGeom>
+          <a:noFill/>
+        </p:spPr>
+        <p:txBody>
+          <a:bodyPr wrap="square" lIns="0" rIns="0" tIns="0" bIns="0" anchor="t">
+            <a:spAutoFit/>
+          </a:bodyPr>
+          <a:lstStyle/>
+          <a:p>
+            <a:pPr algn="l">
+              <a:lnSpc>
+                <a:spcPct val="100000"/>
+              </a:lnSpc>
+            </a:pPr>
+            <a:r>
+              <a:rPr sz="1050" b="0">
+                <a:solidFill>
+                  <a:srgbClr val="141B34"/>
+                </a:solidFill>
                 <a:latin typeface="Evolventa"/>
               </a:rPr>
-              <a:t>4 графика, KPI, фильтры с поиском, переключатели, вычисления, резюме, список дашбордов</a:t>
-            </a:r>
-          </a:p>
-        </p:txBody>
-      </p:sp>
-      <p:sp>
-        <p:nvSpPr>
-          <p:cNvPr id="35" name="TextBox 34"/>
-          <p:cNvSpPr txBox="1"/>
-          <p:nvPr/>
-        </p:nvSpPr>
-        <p:spPr>
-          <a:xfrm>
-            <a:off x="5724000" y="4248000"/>
-            <a:ext cx="3780000" cy="251999"/>
+              <a:t>данные, тесты и инструкция по запуску</a:t>
+            </a:r>
+          </a:p>
+        </p:txBody>
+      </p:sp>
+      <p:pic>
+        <p:nvPicPr>
+          <p:cNvPr id="41" name="Picture 40" descr="qr_demo.png"/>
+          <p:cNvPicPr>
+            <a:picLocks noChangeAspect="1"/>
+          </p:cNvPicPr>
+          <p:nvPr/>
+        </p:nvPicPr>
+        <p:blipFill>
+          <a:blip r:embed="rId9"/>
+          <a:stretch>
+            <a:fillRect/>
+          </a:stretch>
+        </p:blipFill>
+        <p:spPr>
+          <a:xfrm>
+            <a:off x="8784000" y="4590000"/>
+            <a:ext cx="1404000" cy="1404000"/>
+          </a:xfrm>
+          <a:prstGeom prst="rect">
+            <a:avLst/>
+          </a:prstGeom>
+        </p:spPr>
+      </p:pic>
+      <p:sp>
+        <p:nvSpPr>
+          <p:cNvPr id="42" name="TextBox 41"/>
+          <p:cNvSpPr txBox="1"/>
+          <p:nvPr/>
+        </p:nvSpPr>
+        <p:spPr>
+          <a:xfrm>
+            <a:off x="10296000" y="4752000"/>
+            <a:ext cx="1440000" cy="288000"/>
           </a:xfrm>
           <a:prstGeom prst="rect">
             <a:avLst/>
@@ -6046,27 +6244,27 @@
               </a:lnSpc>
             </a:pPr>
             <a:r>
-              <a:rPr sz="1250" b="0">
+              <a:rPr sz="1200" b="0">
                 <a:solidFill>
                   <a:srgbClr val="141B34"/>
                 </a:solidFill>
                 <a:latin typeface="Intro"/>
               </a:rPr>
-              <a:t>Сверх MVP</a:t>
-            </a:r>
-          </a:p>
-        </p:txBody>
-      </p:sp>
-      <p:sp>
-        <p:nvSpPr>
-          <p:cNvPr id="36" name="TextBox 35"/>
-          <p:cNvSpPr txBox="1"/>
-          <p:nvPr/>
-        </p:nvSpPr>
-        <p:spPr>
-          <a:xfrm>
-            <a:off x="9792000" y="4121999"/>
-            <a:ext cx="1944000" cy="468000"/>
+              <a:t>Живой дашборд</a:t>
+            </a:r>
+          </a:p>
+        </p:txBody>
+      </p:sp>
+      <p:sp>
+        <p:nvSpPr>
+          <p:cNvPr id="43" name="TextBox 42"/>
+          <p:cNvSpPr txBox="1"/>
+          <p:nvPr/>
+        </p:nvSpPr>
+        <p:spPr>
+          <a:xfrm>
+            <a:off x="10296000" y="5058000"/>
+            <a:ext cx="1404000" cy="576000"/>
           </a:xfrm>
           <a:prstGeom prst="rect">
             <a:avLst/>
@@ -6079,182 +6277,26 @@
           </a:bodyPr>
           <a:lstStyle/>
           <a:p>
-            <a:pPr algn="r">
-              <a:lnSpc>
-                <a:spcPct val="100000"/>
-              </a:lnSpc>
-            </a:pPr>
-            <a:r>
-              <a:rPr sz="2600" b="0">
-                <a:solidFill>
-                  <a:srgbClr val="3D5AFE"/>
-                </a:solidFill>
-                <a:latin typeface="Peace Sans"/>
-              </a:rPr>
-              <a:t>7 из 10</a:t>
-            </a:r>
-          </a:p>
-        </p:txBody>
-      </p:sp>
-      <p:sp>
-        <p:nvSpPr>
-          <p:cNvPr id="37" name="TextBox 36"/>
-          <p:cNvSpPr txBox="1"/>
-          <p:nvPr/>
-        </p:nvSpPr>
-        <p:spPr>
-          <a:xfrm>
-            <a:off x="5724000" y="4518000"/>
-            <a:ext cx="3960000" cy="576000"/>
-          </a:xfrm>
-          <a:prstGeom prst="rect">
-            <a:avLst/>
-          </a:prstGeom>
-          <a:noFill/>
-        </p:spPr>
-        <p:txBody>
-          <a:bodyPr wrap="square" lIns="0" rIns="0" tIns="0" bIns="0" anchor="t">
-            <a:spAutoFit/>
-          </a:bodyPr>
-          <a:lstStyle/>
-          <a:p>
             <a:pPr algn="l">
               <a:lnSpc>
                 <a:spcPct val="100000"/>
               </a:lnSpc>
             </a:pPr>
             <a:r>
-              <a:rPr sz="1100" b="0">
+              <a:rPr sz="1050" b="0">
                 <a:solidFill>
                   <a:srgbClr val="141B34"/>
                 </a:solidFill>
                 <a:latin typeface="Evolventa"/>
               </a:rPr>
-              <a:t>уточнения, резюме, HTML, Excel, история версий, каскад, синхронный зум</a:t>
-            </a:r>
-          </a:p>
-        </p:txBody>
-      </p:sp>
-      <p:sp>
-        <p:nvSpPr>
-          <p:cNvPr id="38" name="TextBox 37"/>
-          <p:cNvSpPr txBox="1"/>
-          <p:nvPr/>
-        </p:nvSpPr>
-        <p:spPr>
-          <a:xfrm>
-            <a:off x="5724000" y="5273999"/>
-            <a:ext cx="3780000" cy="251999"/>
-          </a:xfrm>
-          <a:prstGeom prst="rect">
-            <a:avLst/>
-          </a:prstGeom>
-          <a:noFill/>
-        </p:spPr>
-        <p:txBody>
-          <a:bodyPr wrap="square" lIns="0" rIns="0" tIns="0" bIns="0" anchor="t">
-            <a:spAutoFit/>
-          </a:bodyPr>
-          <a:lstStyle/>
-          <a:p>
-            <a:pPr algn="l">
-              <a:lnSpc>
-                <a:spcPct val="100000"/>
-              </a:lnSpc>
-            </a:pPr>
-            <a:r>
-              <a:rPr sz="1250" b="0">
-                <a:solidFill>
-                  <a:srgbClr val="141B34"/>
-                </a:solidFill>
-                <a:latin typeface="Intro"/>
-              </a:rPr>
-              <a:t>Не сделано</a:t>
-            </a:r>
-          </a:p>
-        </p:txBody>
-      </p:sp>
-      <p:sp>
-        <p:nvSpPr>
-          <p:cNvPr id="39" name="TextBox 38"/>
-          <p:cNvSpPr txBox="1"/>
-          <p:nvPr/>
-        </p:nvSpPr>
-        <p:spPr>
-          <a:xfrm>
-            <a:off x="9792000" y="5148000"/>
-            <a:ext cx="1944000" cy="468000"/>
-          </a:xfrm>
-          <a:prstGeom prst="rect">
-            <a:avLst/>
-          </a:prstGeom>
-          <a:noFill/>
-        </p:spPr>
-        <p:txBody>
-          <a:bodyPr wrap="square" lIns="0" rIns="0" tIns="0" bIns="0" anchor="t">
-            <a:spAutoFit/>
-          </a:bodyPr>
-          <a:lstStyle/>
-          <a:p>
-            <a:pPr algn="r">
-              <a:lnSpc>
-                <a:spcPct val="100000"/>
-              </a:lnSpc>
-            </a:pPr>
-            <a:r>
-              <a:rPr sz="2600" b="0">
-                <a:solidFill>
-                  <a:srgbClr val="FF8A3D"/>
-                </a:solidFill>
-                <a:latin typeface="Peace Sans"/>
-              </a:rPr>
-              <a:t>3</a:t>
-            </a:r>
-          </a:p>
-        </p:txBody>
-      </p:sp>
-      <p:sp>
-        <p:nvSpPr>
-          <p:cNvPr id="40" name="TextBox 39"/>
-          <p:cNvSpPr txBox="1"/>
-          <p:nvPr/>
-        </p:nvSpPr>
-        <p:spPr>
-          <a:xfrm>
-            <a:off x="5724000" y="5543999"/>
-            <a:ext cx="3960000" cy="576000"/>
-          </a:xfrm>
-          <a:prstGeom prst="rect">
-            <a:avLst/>
-          </a:prstGeom>
-          <a:noFill/>
-        </p:spPr>
-        <p:txBody>
-          <a:bodyPr wrap="square" lIns="0" rIns="0" tIns="0" bIns="0" anchor="t">
-            <a:spAutoFit/>
-          </a:bodyPr>
-          <a:lstStyle/>
-          <a:p>
-            <a:pPr algn="l">
-              <a:lnSpc>
-                <a:spcPct val="100000"/>
-              </a:lnSpc>
-            </a:pPr>
-            <a:r>
-              <a:rPr sz="1100" b="0">
-                <a:solidFill>
-                  <a:srgbClr val="141B34"/>
-                </a:solidFill>
-                <a:latin typeface="Evolventa"/>
-              </a:rPr>
-              <a:t>автосохранение черновика, публикация ссылкой, шаблоны частых запросов</a:t>
-            </a:r>
-          </a:p>
-        </p:txBody>
-      </p:sp>
-      <p:sp>
-        <p:nvSpPr>
-          <p:cNvPr id="41" name="TextBox 40"/>
+              <a:t>можно покликать в браузере</a:t>
+            </a:r>
+          </a:p>
+        </p:txBody>
+      </p:sp>
+      <p:sp>
+        <p:nvSpPr>
+          <p:cNvPr id="44" name="TextBox 43"/>
           <p:cNvSpPr txBox="1"/>
           <p:nvPr/>
         </p:nvSpPr>
@@ -6293,7 +6335,7 @@
       </p:sp>
       <p:sp>
         <p:nvSpPr>
-          <p:cNvPr id="42" name="TextBox 41"/>
+          <p:cNvPr id="45" name="TextBox 44"/>
           <p:cNvSpPr txBox="1"/>
           <p:nvPr/>
         </p:nvSpPr>
@@ -7058,45 +7100,30 @@
           </a:p>
         </p:txBody>
       </p:sp>
-      <p:sp>
-        <p:nvSpPr>
-          <p:cNvPr id="18" name="TextBox 17"/>
-          <p:cNvSpPr txBox="1"/>
-          <p:nvPr/>
-        </p:nvSpPr>
-        <p:spPr>
-          <a:xfrm>
-            <a:off x="1764000" y="1962000"/>
-            <a:ext cx="468000" cy="432000"/>
-          </a:xfrm>
-          <a:prstGeom prst="rect">
-            <a:avLst/>
-          </a:prstGeom>
-          <a:noFill/>
-        </p:spPr>
-        <p:txBody>
-          <a:bodyPr wrap="square" lIns="0" rIns="0" tIns="0" bIns="0" anchor="t">
-            <a:spAutoFit/>
-          </a:bodyPr>
-          <a:lstStyle/>
-          <a:p>
-            <a:pPr algn="ctr">
-              <a:lnSpc>
-                <a:spcPct val="100000"/>
-              </a:lnSpc>
-            </a:pPr>
-            <a:r>
-              <a:rPr sz="2600" b="0">
-                <a:solidFill>
-                  <a:srgbClr val="FF8A3D"/>
-                </a:solidFill>
-                <a:latin typeface="Peace Sans"/>
-              </a:rPr>
-              <a:t>→</a:t>
-            </a:r>
-          </a:p>
-        </p:txBody>
-      </p:sp>
+      <p:pic>
+        <p:nvPicPr>
+          <p:cNvPr id="18" name="Picture 17" descr="i_arrow-right_o.png"/>
+          <p:cNvPicPr>
+            <a:picLocks noChangeAspect="1"/>
+          </p:cNvPicPr>
+          <p:nvPr/>
+        </p:nvPicPr>
+        <p:blipFill>
+          <a:blip r:embed="rId3"/>
+          <a:stretch>
+            <a:fillRect/>
+          </a:stretch>
+        </p:blipFill>
+        <p:spPr>
+          <a:xfrm>
+            <a:off x="1565999" y="2023200"/>
+            <a:ext cx="306000" cy="306000"/>
+          </a:xfrm>
+          <a:prstGeom prst="rect">
+            <a:avLst/>
+          </a:prstGeom>
+        </p:spPr>
+      </p:pic>
       <p:sp>
         <p:nvSpPr>
           <p:cNvPr id="19" name="Rounded Rectangle 18"/>
@@ -7152,6 +7179,108 @@
           <p:nvPr/>
         </p:nvPicPr>
         <p:blipFill>
+          <a:blip r:embed="rId4"/>
+          <a:stretch>
+            <a:fillRect/>
+          </a:stretch>
+        </p:blipFill>
+        <p:spPr>
+          <a:xfrm>
+            <a:off x="2494800" y="2008800"/>
+            <a:ext cx="342000" cy="342000"/>
+          </a:xfrm>
+          <a:prstGeom prst="rect">
+            <a:avLst/>
+          </a:prstGeom>
+        </p:spPr>
+      </p:pic>
+      <p:sp>
+        <p:nvSpPr>
+          <p:cNvPr id="21" name="TextBox 20"/>
+          <p:cNvSpPr txBox="1"/>
+          <p:nvPr/>
+        </p:nvSpPr>
+        <p:spPr>
+          <a:xfrm>
+            <a:off x="2358000" y="2610000"/>
+            <a:ext cx="1655999" cy="251999"/>
+          </a:xfrm>
+          <a:prstGeom prst="rect">
+            <a:avLst/>
+          </a:prstGeom>
+          <a:noFill/>
+        </p:spPr>
+        <p:txBody>
+          <a:bodyPr wrap="square" lIns="0" rIns="0" tIns="0" bIns="0" anchor="t">
+            <a:spAutoFit/>
+          </a:bodyPr>
+          <a:lstStyle/>
+          <a:p>
+            <a:pPr algn="l">
+              <a:lnSpc>
+                <a:spcPct val="100000"/>
+              </a:lnSpc>
+            </a:pPr>
+            <a:r>
+              <a:rPr sz="1250" b="0">
+                <a:solidFill>
+                  <a:srgbClr val="141B34"/>
+                </a:solidFill>
+                <a:latin typeface="Intro"/>
+              </a:rPr>
+              <a:t>2  Команда</a:t>
+            </a:r>
+          </a:p>
+        </p:txBody>
+      </p:sp>
+      <p:sp>
+        <p:nvSpPr>
+          <p:cNvPr id="22" name="TextBox 21"/>
+          <p:cNvSpPr txBox="1"/>
+          <p:nvPr/>
+        </p:nvSpPr>
+        <p:spPr>
+          <a:xfrm>
+            <a:off x="2358000" y="2898000"/>
+            <a:ext cx="1655999" cy="1260000"/>
+          </a:xfrm>
+          <a:prstGeom prst="rect">
+            <a:avLst/>
+          </a:prstGeom>
+          <a:noFill/>
+        </p:spPr>
+        <p:txBody>
+          <a:bodyPr wrap="square" lIns="0" rIns="0" tIns="0" bIns="0" anchor="t">
+            <a:spAutoFit/>
+          </a:bodyPr>
+          <a:lstStyle/>
+          <a:p>
+            <a:pPr algn="l">
+              <a:lnSpc>
+                <a:spcPct val="100000"/>
+              </a:lnSpc>
+            </a:pPr>
+            <a:r>
+              <a:rPr sz="1050" b="0">
+                <a:solidFill>
+                  <a:srgbClr val="141B34"/>
+                </a:solidFill>
+                <a:latin typeface="Evolventa"/>
+              </a:rPr>
+              <a:t>дашборд, разрез регион, окт 2025 – сен 2026</a:t>
+            </a:r>
+          </a:p>
+        </p:txBody>
+      </p:sp>
+      <p:pic>
+        <p:nvPicPr>
+          <p:cNvPr id="23" name="Picture 22" descr="i_arrow-right_o.png"/>
+          <p:cNvPicPr>
+            <a:picLocks noChangeAspect="1"/>
+          </p:cNvPicPr>
+          <p:nvPr/>
+        </p:nvPicPr>
+        <p:blipFill>
           <a:blip r:embed="rId3"/>
           <a:stretch>
             <a:fillRect/>
@@ -7159,131 +7288,14 @@
         </p:blipFill>
         <p:spPr>
           <a:xfrm>
-            <a:off x="2494800" y="2008800"/>
-            <a:ext cx="342000" cy="342000"/>
+            <a:off x="3456000" y="2023200"/>
+            <a:ext cx="306000" cy="306000"/>
           </a:xfrm>
           <a:prstGeom prst="rect">
             <a:avLst/>
           </a:prstGeom>
         </p:spPr>
       </p:pic>
-      <p:sp>
-        <p:nvSpPr>
-          <p:cNvPr id="21" name="TextBox 20"/>
-          <p:cNvSpPr txBox="1"/>
-          <p:nvPr/>
-        </p:nvSpPr>
-        <p:spPr>
-          <a:xfrm>
-            <a:off x="2358000" y="2610000"/>
-            <a:ext cx="1655999" cy="251999"/>
-          </a:xfrm>
-          <a:prstGeom prst="rect">
-            <a:avLst/>
-          </a:prstGeom>
-          <a:noFill/>
-        </p:spPr>
-        <p:txBody>
-          <a:bodyPr wrap="square" lIns="0" rIns="0" tIns="0" bIns="0" anchor="t">
-            <a:spAutoFit/>
-          </a:bodyPr>
-          <a:lstStyle/>
-          <a:p>
-            <a:pPr algn="l">
-              <a:lnSpc>
-                <a:spcPct val="100000"/>
-              </a:lnSpc>
-            </a:pPr>
-            <a:r>
-              <a:rPr sz="1250" b="0">
-                <a:solidFill>
-                  <a:srgbClr val="141B34"/>
-                </a:solidFill>
-                <a:latin typeface="Intro"/>
-              </a:rPr>
-              <a:t>2  Команда</a:t>
-            </a:r>
-          </a:p>
-        </p:txBody>
-      </p:sp>
-      <p:sp>
-        <p:nvSpPr>
-          <p:cNvPr id="22" name="TextBox 21"/>
-          <p:cNvSpPr txBox="1"/>
-          <p:nvPr/>
-        </p:nvSpPr>
-        <p:spPr>
-          <a:xfrm>
-            <a:off x="2358000" y="2898000"/>
-            <a:ext cx="1655999" cy="1260000"/>
-          </a:xfrm>
-          <a:prstGeom prst="rect">
-            <a:avLst/>
-          </a:prstGeom>
-          <a:noFill/>
-        </p:spPr>
-        <p:txBody>
-          <a:bodyPr wrap="square" lIns="0" rIns="0" tIns="0" bIns="0" anchor="t">
-            <a:spAutoFit/>
-          </a:bodyPr>
-          <a:lstStyle/>
-          <a:p>
-            <a:pPr algn="l">
-              <a:lnSpc>
-                <a:spcPct val="100000"/>
-              </a:lnSpc>
-            </a:pPr>
-            <a:r>
-              <a:rPr sz="1050" b="0">
-                <a:solidFill>
-                  <a:srgbClr val="141B34"/>
-                </a:solidFill>
-                <a:latin typeface="Evolventa"/>
-              </a:rPr>
-              <a:t>дашборд, разрез регион, окт 2025 – сен 2026</a:t>
-            </a:r>
-          </a:p>
-        </p:txBody>
-      </p:sp>
-      <p:sp>
-        <p:nvSpPr>
-          <p:cNvPr id="23" name="TextBox 22"/>
-          <p:cNvSpPr txBox="1"/>
-          <p:nvPr/>
-        </p:nvSpPr>
-        <p:spPr>
-          <a:xfrm>
-            <a:off x="3654000" y="1962000"/>
-            <a:ext cx="468000" cy="432000"/>
-          </a:xfrm>
-          <a:prstGeom prst="rect">
-            <a:avLst/>
-          </a:prstGeom>
-          <a:noFill/>
-        </p:spPr>
-        <p:txBody>
-          <a:bodyPr wrap="square" lIns="0" rIns="0" tIns="0" bIns="0" anchor="t">
-            <a:spAutoFit/>
-          </a:bodyPr>
-          <a:lstStyle/>
-          <a:p>
-            <a:pPr algn="ctr">
-              <a:lnSpc>
-                <a:spcPct val="100000"/>
-              </a:lnSpc>
-            </a:pPr>
-            <a:r>
-              <a:rPr sz="2600" b="0">
-                <a:solidFill>
-                  <a:srgbClr val="FF8A3D"/>
-                </a:solidFill>
-                <a:latin typeface="Peace Sans"/>
-              </a:rPr>
-              <a:t>→</a:t>
-            </a:r>
-          </a:p>
-        </p:txBody>
-      </p:sp>
       <p:sp>
         <p:nvSpPr>
           <p:cNvPr id="24" name="Rounded Rectangle 23"/>
@@ -7339,7 +7351,7 @@
           <p:nvPr/>
         </p:nvPicPr>
         <p:blipFill>
-          <a:blip r:embed="rId4"/>
+          <a:blip r:embed="rId5"/>
           <a:stretch>
             <a:fillRect/>
           </a:stretch>
@@ -7432,45 +7444,30 @@
           </a:p>
         </p:txBody>
       </p:sp>
-      <p:sp>
-        <p:nvSpPr>
-          <p:cNvPr id="28" name="TextBox 27"/>
-          <p:cNvSpPr txBox="1"/>
-          <p:nvPr/>
-        </p:nvSpPr>
-        <p:spPr>
-          <a:xfrm>
-            <a:off x="5544000" y="1962000"/>
-            <a:ext cx="468000" cy="432000"/>
-          </a:xfrm>
-          <a:prstGeom prst="rect">
-            <a:avLst/>
-          </a:prstGeom>
-          <a:noFill/>
-        </p:spPr>
-        <p:txBody>
-          <a:bodyPr wrap="square" lIns="0" rIns="0" tIns="0" bIns="0" anchor="t">
-            <a:spAutoFit/>
-          </a:bodyPr>
-          <a:lstStyle/>
-          <a:p>
-            <a:pPr algn="ctr">
-              <a:lnSpc>
-                <a:spcPct val="100000"/>
-              </a:lnSpc>
-            </a:pPr>
-            <a:r>
-              <a:rPr sz="2600" b="0">
-                <a:solidFill>
-                  <a:srgbClr val="FF8A3D"/>
-                </a:solidFill>
-                <a:latin typeface="Peace Sans"/>
-              </a:rPr>
-              <a:t>→</a:t>
-            </a:r>
-          </a:p>
-        </p:txBody>
-      </p:sp>
+      <p:pic>
+        <p:nvPicPr>
+          <p:cNvPr id="28" name="Picture 27" descr="i_arrow-right_o.png"/>
+          <p:cNvPicPr>
+            <a:picLocks noChangeAspect="1"/>
+          </p:cNvPicPr>
+          <p:nvPr/>
+        </p:nvPicPr>
+        <p:blipFill>
+          <a:blip r:embed="rId3"/>
+          <a:stretch>
+            <a:fillRect/>
+          </a:stretch>
+        </p:blipFill>
+        <p:spPr>
+          <a:xfrm>
+            <a:off x="5346000" y="2023200"/>
+            <a:ext cx="306000" cy="306000"/>
+          </a:xfrm>
+          <a:prstGeom prst="rect">
+            <a:avLst/>
+          </a:prstGeom>
+        </p:spPr>
+      </p:pic>
       <p:sp>
         <p:nvSpPr>
           <p:cNvPr id="29" name="Rounded Rectangle 28"/>
@@ -7526,7 +7523,7 @@
           <p:nvPr/>
         </p:nvPicPr>
         <p:blipFill>
-          <a:blip r:embed="rId5"/>
+          <a:blip r:embed="rId6"/>
           <a:stretch>
             <a:fillRect/>
           </a:stretch>
@@ -7619,45 +7616,30 @@
           </a:p>
         </p:txBody>
       </p:sp>
-      <p:sp>
-        <p:nvSpPr>
-          <p:cNvPr id="33" name="TextBox 32"/>
-          <p:cNvSpPr txBox="1"/>
-          <p:nvPr/>
-        </p:nvSpPr>
-        <p:spPr>
-          <a:xfrm>
-            <a:off x="7434000" y="1962000"/>
-            <a:ext cx="468000" cy="432000"/>
-          </a:xfrm>
-          <a:prstGeom prst="rect">
-            <a:avLst/>
-          </a:prstGeom>
-          <a:noFill/>
-        </p:spPr>
-        <p:txBody>
-          <a:bodyPr wrap="square" lIns="0" rIns="0" tIns="0" bIns="0" anchor="t">
-            <a:spAutoFit/>
-          </a:bodyPr>
-          <a:lstStyle/>
-          <a:p>
-            <a:pPr algn="ctr">
-              <a:lnSpc>
-                <a:spcPct val="100000"/>
-              </a:lnSpc>
-            </a:pPr>
-            <a:r>
-              <a:rPr sz="2600" b="0">
-                <a:solidFill>
-                  <a:srgbClr val="FF8A3D"/>
-                </a:solidFill>
-                <a:latin typeface="Peace Sans"/>
-              </a:rPr>
-              <a:t>→</a:t>
-            </a:r>
-          </a:p>
-        </p:txBody>
-      </p:sp>
+      <p:pic>
+        <p:nvPicPr>
+          <p:cNvPr id="33" name="Picture 32" descr="i_arrow-right_o.png"/>
+          <p:cNvPicPr>
+            <a:picLocks noChangeAspect="1"/>
+          </p:cNvPicPr>
+          <p:nvPr/>
+        </p:nvPicPr>
+        <p:blipFill>
+          <a:blip r:embed="rId3"/>
+          <a:stretch>
+            <a:fillRect/>
+          </a:stretch>
+        </p:blipFill>
+        <p:spPr>
+          <a:xfrm>
+            <a:off x="7236000" y="2023200"/>
+            <a:ext cx="306000" cy="306000"/>
+          </a:xfrm>
+          <a:prstGeom prst="rect">
+            <a:avLst/>
+          </a:prstGeom>
+        </p:spPr>
+      </p:pic>
       <p:sp>
         <p:nvSpPr>
           <p:cNvPr id="34" name="Rounded Rectangle 33"/>
@@ -7713,7 +7695,7 @@
           <p:nvPr/>
         </p:nvPicPr>
         <p:blipFill>
-          <a:blip r:embed="rId6"/>
+          <a:blip r:embed="rId7"/>
           <a:stretch>
             <a:fillRect/>
           </a:stretch>
@@ -7806,45 +7788,30 @@
           </a:p>
         </p:txBody>
       </p:sp>
-      <p:sp>
-        <p:nvSpPr>
-          <p:cNvPr id="38" name="TextBox 37"/>
-          <p:cNvSpPr txBox="1"/>
-          <p:nvPr/>
-        </p:nvSpPr>
-        <p:spPr>
-          <a:xfrm>
-            <a:off x="9324000" y="1962000"/>
-            <a:ext cx="468000" cy="432000"/>
-          </a:xfrm>
-          <a:prstGeom prst="rect">
-            <a:avLst/>
-          </a:prstGeom>
-          <a:noFill/>
-        </p:spPr>
-        <p:txBody>
-          <a:bodyPr wrap="square" lIns="0" rIns="0" tIns="0" bIns="0" anchor="t">
-            <a:spAutoFit/>
-          </a:bodyPr>
-          <a:lstStyle/>
-          <a:p>
-            <a:pPr algn="ctr">
-              <a:lnSpc>
-                <a:spcPct val="100000"/>
-              </a:lnSpc>
-            </a:pPr>
-            <a:r>
-              <a:rPr sz="2600" b="0">
-                <a:solidFill>
-                  <a:srgbClr val="FF8A3D"/>
-                </a:solidFill>
-                <a:latin typeface="Peace Sans"/>
-              </a:rPr>
-              <a:t>→</a:t>
-            </a:r>
-          </a:p>
-        </p:txBody>
-      </p:sp>
+      <p:pic>
+        <p:nvPicPr>
+          <p:cNvPr id="38" name="Picture 37" descr="i_arrow-right_o.png"/>
+          <p:cNvPicPr>
+            <a:picLocks noChangeAspect="1"/>
+          </p:cNvPicPr>
+          <p:nvPr/>
+        </p:nvPicPr>
+        <p:blipFill>
+          <a:blip r:embed="rId3"/>
+          <a:stretch>
+            <a:fillRect/>
+          </a:stretch>
+        </p:blipFill>
+        <p:spPr>
+          <a:xfrm>
+            <a:off x="9126000" y="2023200"/>
+            <a:ext cx="306000" cy="306000"/>
+          </a:xfrm>
+          <a:prstGeom prst="rect">
+            <a:avLst/>
+          </a:prstGeom>
+        </p:spPr>
+      </p:pic>
       <p:sp>
         <p:nvSpPr>
           <p:cNvPr id="39" name="Rounded Rectangle 38"/>
@@ -7900,7 +7867,7 @@
           <p:nvPr/>
         </p:nvPicPr>
         <p:blipFill>
-          <a:blip r:embed="rId7"/>
+          <a:blip r:embed="rId8"/>
           <a:stretch>
             <a:fillRect/>
           </a:stretch>
@@ -12972,7 +12939,7 @@
         </p:nvSpPr>
         <p:spPr>
           <a:xfrm>
-            <a:off x="8388000" y="2934000"/>
+            <a:off x="8388000" y="2718000"/>
             <a:ext cx="306000" cy="306000"/>
           </a:xfrm>
           <a:prstGeom prst="roundRect">
@@ -13027,7 +12994,7 @@
         </p:nvSpPr>
         <p:spPr>
           <a:xfrm>
-            <a:off x="8802000" y="2926800"/>
+            <a:off x="8802000" y="2710800"/>
             <a:ext cx="2988000" cy="288000"/>
           </a:xfrm>
           <a:prstGeom prst="rect">
@@ -13066,7 +13033,7 @@
         </p:nvSpPr>
         <p:spPr>
           <a:xfrm>
-            <a:off x="8802000" y="3222000"/>
+            <a:off x="8802000" y="3006000"/>
             <a:ext cx="2988000" cy="792000"/>
           </a:xfrm>
           <a:prstGeom prst="rect">
@@ -13105,7 +13072,7 @@
         </p:nvSpPr>
         <p:spPr>
           <a:xfrm>
-            <a:off x="8388000" y="4068000"/>
+            <a:off x="8388000" y="3636000"/>
             <a:ext cx="306000" cy="306000"/>
           </a:xfrm>
           <a:prstGeom prst="roundRect">
@@ -13160,7 +13127,7 @@
         </p:nvSpPr>
         <p:spPr>
           <a:xfrm>
-            <a:off x="8802000" y="4060800"/>
+            <a:off x="8802000" y="3628800"/>
             <a:ext cx="2988000" cy="288000"/>
           </a:xfrm>
           <a:prstGeom prst="rect">
@@ -13199,7 +13166,7 @@
         </p:nvSpPr>
         <p:spPr>
           <a:xfrm>
-            <a:off x="8802000" y="4356000"/>
+            <a:off x="8802000" y="3924000"/>
             <a:ext cx="2988000" cy="792000"/>
           </a:xfrm>
           <a:prstGeom prst="rect">
@@ -13238,7 +13205,7 @@
         </p:nvSpPr>
         <p:spPr>
           <a:xfrm>
-            <a:off x="8388000" y="5202000"/>
+            <a:off x="8388000" y="4553999"/>
             <a:ext cx="306000" cy="306000"/>
           </a:xfrm>
           <a:prstGeom prst="roundRect">
@@ -13293,7 +13260,7 @@
         </p:nvSpPr>
         <p:spPr>
           <a:xfrm>
-            <a:off x="8802000" y="5194800"/>
+            <a:off x="8802000" y="4546800"/>
             <a:ext cx="2988000" cy="288000"/>
           </a:xfrm>
           <a:prstGeom prst="rect">
@@ -13332,7 +13299,7 @@
         </p:nvSpPr>
         <p:spPr>
           <a:xfrm>
-            <a:off x="8802000" y="5490000"/>
+            <a:off x="8802000" y="4842000"/>
             <a:ext cx="2988000" cy="792000"/>
           </a:xfrm>
           <a:prstGeom prst="rect">
@@ -13363,9 +13330,88 @@
           </a:p>
         </p:txBody>
       </p:sp>
-      <p:sp>
-        <p:nvSpPr>
-          <p:cNvPr id="28" name="TextBox 27"/>
+      <p:pic>
+        <p:nvPicPr>
+          <p:cNvPr id="28" name="Picture 27" descr="qr_demo.png"/>
+          <p:cNvPicPr>
+            <a:picLocks noChangeAspect="1"/>
+          </p:cNvPicPr>
+          <p:nvPr/>
+        </p:nvPicPr>
+        <p:blipFill>
+          <a:blip r:embed="rId3"/>
+          <a:stretch>
+            <a:fillRect/>
+          </a:stretch>
+        </p:blipFill>
+        <p:spPr>
+          <a:xfrm>
+            <a:off x="8388000" y="5472000"/>
+            <a:ext cx="827999" cy="827999"/>
+          </a:xfrm>
+          <a:prstGeom prst="rect">
+            <a:avLst/>
+          </a:prstGeom>
+        </p:spPr>
+      </p:pic>
+      <p:sp>
+        <p:nvSpPr>
+          <p:cNvPr id="29" name="TextBox 28"/>
+          <p:cNvSpPr txBox="1"/>
+          <p:nvPr/>
+        </p:nvSpPr>
+        <p:spPr>
+          <a:xfrm>
+            <a:off x="9324000" y="5562000"/>
+            <a:ext cx="2448000" cy="720000"/>
+          </a:xfrm>
+          <a:prstGeom prst="rect">
+            <a:avLst/>
+          </a:prstGeom>
+          <a:noFill/>
+        </p:spPr>
+        <p:txBody>
+          <a:bodyPr wrap="square" lIns="0" rIns="0" tIns="0" bIns="0" anchor="t">
+            <a:spAutoFit/>
+          </a:bodyPr>
+          <a:lstStyle/>
+          <a:p>
+            <a:pPr algn="l">
+              <a:lnSpc>
+                <a:spcPct val="110000"/>
+              </a:lnSpc>
+            </a:pPr>
+            <a:r>
+              <a:rPr sz="1200" b="0">
+                <a:solidFill>
+                  <a:srgbClr val="141B34"/>
+                </a:solidFill>
+                <a:latin typeface="Intro"/>
+              </a:rPr>
+              <a:t>Покликать самому</a:t>
+            </a:r>
+          </a:p>
+          <a:p>
+            <a:pPr algn="l">
+              <a:lnSpc>
+                <a:spcPct val="110000"/>
+              </a:lnSpc>
+            </a:pPr>
+            <a:r>
+              <a:rPr sz="1050" b="0">
+                <a:solidFill>
+                  <a:srgbClr val="141B34"/>
+                </a:solidFill>
+                <a:latin typeface="Evolventa"/>
+              </a:rPr>
+              <a:t>живая версия дашборда в браузере</a:t>
+            </a:r>
+          </a:p>
+        </p:txBody>
+      </p:sp>
+      <p:sp>
+        <p:nvSpPr>
+          <p:cNvPr id="30" name="TextBox 29"/>
           <p:cNvSpPr txBox="1"/>
           <p:nvPr/>
         </p:nvSpPr>
@@ -13404,7 +13450,7 @@
       </p:sp>
       <p:sp>
         <p:nvSpPr>
-          <p:cNvPr id="29" name="TextBox 28"/>
+          <p:cNvPr id="31" name="TextBox 30"/>
           <p:cNvSpPr txBox="1"/>
           <p:nvPr/>
         </p:nvSpPr>

--- a/sk-challenge-puzzle-bi-bot/presentation/Puzzle_BI_чат-бот.pptx
+++ b/sk-challenge-puzzle-bi-bot/presentation/Puzzle_BI_чат-бот.pptx
@@ -122,7 +122,7 @@
     <c:autoTitleDeleted val="1"/>
     <c:plotArea>
       <c:barChart>
-        <c:barDir val="col"/>
+        <c:barDir val="bar"/>
         <c:grouping val="clustered"/>
         <c:ser>
           <c:idx val="0"/>
@@ -142,7 +142,7 @@
             <c:idx val="0"/>
             <c:spPr>
               <a:solidFill>
-                <a:srgbClr val="12A150"/>
+                <a:srgbClr val="E5383B"/>
               </a:solidFill>
             </c:spPr>
           </c:dPt>
@@ -150,7 +150,7 @@
             <c:idx val="1"/>
             <c:spPr>
               <a:solidFill>
-                <a:srgbClr val="3D5AFE"/>
+                <a:srgbClr val="FF8A3D"/>
               </a:solidFill>
             </c:spPr>
           </c:dPt>
@@ -159,6 +159,30 @@
             <c:spPr>
               <a:solidFill>
                 <a:srgbClr val="FF8A3D"/>
+              </a:solidFill>
+            </c:spPr>
+          </c:dPt>
+          <c:dPt>
+            <c:idx val="3"/>
+            <c:spPr>
+              <a:solidFill>
+                <a:srgbClr val="3D5AFE"/>
+              </a:solidFill>
+            </c:spPr>
+          </c:dPt>
+          <c:dPt>
+            <c:idx val="4"/>
+            <c:spPr>
+              <a:solidFill>
+                <a:srgbClr val="12A150"/>
+              </a:solidFill>
+            </c:spPr>
+          </c:dPt>
+          <c:dPt>
+            <c:idx val="5"/>
+            <c:spPr>
+              <a:solidFill>
+                <a:srgbClr val="12A150"/>
               </a:solidFill>
             </c:spPr>
           </c:dPt>
@@ -171,7 +195,7 @@
                   <a:lstStyle/>
                   <a:p>
                     <a:r>
-                      <a:t>100%</a:t>
+                      <a:t>0%</a:t>
                     </a:r>
                   </a:p>
                 </c:rich>
@@ -181,11 +205,10 @@
                 <a:lstStyle/>
                 <a:p>
                   <a:pPr>
-                    <a:defRPr sz="1800">
+                    <a:defRPr sz="1200">
                       <a:solidFill>
-                        <a:srgbClr val="12A150"/>
+                        <a:srgbClr val="E5383B"/>
                       </a:solidFill>
-                      <a:latin typeface="Peace Sans"/>
                     </a:defRPr>
                   </a:pPr>
                 </a:p>
@@ -206,7 +229,7 @@
                   <a:lstStyle/>
                   <a:p>
                     <a:r>
-                      <a:t>75%</a:t>
+                      <a:t>58%</a:t>
                     </a:r>
                   </a:p>
                 </c:rich>
@@ -216,11 +239,10 @@
                 <a:lstStyle/>
                 <a:p>
                   <a:pPr>
-                    <a:defRPr sz="1800">
+                    <a:defRPr sz="1200">
                       <a:solidFill>
-                        <a:srgbClr val="3D5AFE"/>
+                        <a:srgbClr val="FF8A3D"/>
                       </a:solidFill>
-                      <a:latin typeface="Peace Sans"/>
                     </a:defRPr>
                   </a:pPr>
                 </a:p>
@@ -251,11 +273,112 @@
                 <a:lstStyle/>
                 <a:p>
                   <a:pPr>
-                    <a:defRPr sz="1800">
+                    <a:defRPr sz="1200">
                       <a:solidFill>
                         <a:srgbClr val="FF8A3D"/>
                       </a:solidFill>
-                      <a:latin typeface="Peace Sans"/>
+                    </a:defRPr>
+                  </a:pPr>
+                </a:p>
+              </c:txPr>
+              <c:dLblPos val="outEnd"/>
+              <c:showLegendKey val="0"/>
+              <c:showVal val="1"/>
+              <c:showCatName val="0"/>
+              <c:showSerName val="0"/>
+              <c:showPercent val="0"/>
+              <c:showBubbleSize val="0"/>
+            </c:dLbl>
+            <c:dLbl>
+              <c:idx val="3"/>
+              <c:tx>
+                <c:rich>
+                  <a:bodyPr/>
+                  <a:lstStyle/>
+                  <a:p>
+                    <a:r>
+                      <a:t>80%</a:t>
+                    </a:r>
+                  </a:p>
+                </c:rich>
+              </c:tx>
+              <c:txPr>
+                <a:bodyPr/>
+                <a:lstStyle/>
+                <a:p>
+                  <a:pPr>
+                    <a:defRPr sz="1200">
+                      <a:solidFill>
+                        <a:srgbClr val="3D5AFE"/>
+                      </a:solidFill>
+                    </a:defRPr>
+                  </a:pPr>
+                </a:p>
+              </c:txPr>
+              <c:dLblPos val="outEnd"/>
+              <c:showLegendKey val="0"/>
+              <c:showVal val="1"/>
+              <c:showCatName val="0"/>
+              <c:showSerName val="0"/>
+              <c:showPercent val="0"/>
+              <c:showBubbleSize val="0"/>
+            </c:dLbl>
+            <c:dLbl>
+              <c:idx val="4"/>
+              <c:tx>
+                <c:rich>
+                  <a:bodyPr/>
+                  <a:lstStyle/>
+                  <a:p>
+                    <a:r>
+                      <a:t>100%</a:t>
+                    </a:r>
+                  </a:p>
+                </c:rich>
+              </c:tx>
+              <c:txPr>
+                <a:bodyPr/>
+                <a:lstStyle/>
+                <a:p>
+                  <a:pPr>
+                    <a:defRPr sz="1200">
+                      <a:solidFill>
+                        <a:srgbClr val="12A150"/>
+                      </a:solidFill>
+                    </a:defRPr>
+                  </a:pPr>
+                </a:p>
+              </c:txPr>
+              <c:dLblPos val="outEnd"/>
+              <c:showLegendKey val="0"/>
+              <c:showVal val="1"/>
+              <c:showCatName val="0"/>
+              <c:showSerName val="0"/>
+              <c:showPercent val="0"/>
+              <c:showBubbleSize val="0"/>
+            </c:dLbl>
+            <c:dLbl>
+              <c:idx val="5"/>
+              <c:tx>
+                <c:rich>
+                  <a:bodyPr/>
+                  <a:lstStyle/>
+                  <a:p>
+                    <a:r>
+                      <a:t>100%</a:t>
+                    </a:r>
+                  </a:p>
+                </c:rich>
+              </c:tx>
+              <c:txPr>
+                <a:bodyPr/>
+                <a:lstStyle/>
+                <a:p>
+                  <a:pPr>
+                    <a:defRPr sz="1200">
+                      <a:solidFill>
+                        <a:srgbClr val="12A150"/>
+                      </a:solidFill>
                     </a:defRPr>
                   </a:pPr>
                 </a:p>
@@ -278,44 +401,59 @@
           </c:dLbls>
           <c:cat>
             <c:strRef>
-              <c:f>Sheet1!$A$2:$A$4</c:f>
+              <c:f>Sheet1!$A$2:$A$7</c:f>
               <c:strCache>
-                <c:ptCount val="3"/>
+                <c:ptCount val="6"/>
                 <c:pt idx="0">
-                  <c:v>Запросы из кейса
-38</c:v>
+                  <c:v>Резюме и таблица (2 фразы)</c:v>
                 </c:pt>
                 <c:pt idx="1">
-                  <c:v>Перефразировки
-20</c:v>
+                  <c:v>Построение дашборда (12 фраз)</c:v>
                 </c:pt>
                 <c:pt idx="2">
-                  <c:v>Слепая выборка
-15</c:v>
+                  <c:v>Сохранение и история (6 фраз)</c:v>
+                </c:pt>
+                <c:pt idx="3">
+                  <c:v>Вычисления (5 фраз)</c:v>
+                </c:pt>
+                <c:pt idx="4">
+                  <c:v>Правка графиков (3 фразы)</c:v>
+                </c:pt>
+                <c:pt idx="5">
+                  <c:v>Фильтры и переключатели (7 фраз)</c:v>
                 </c:pt>
               </c:strCache>
             </c:strRef>
           </c:cat>
           <c:val>
             <c:numRef>
-              <c:f>Sheet1!$B$2:$B$4</c:f>
+              <c:f>Sheet1!$B$2:$B$7</c:f>
               <c:numCache>
                 <c:formatCode>General</c:formatCode>
-                <c:ptCount val="3"/>
+                <c:ptCount val="6"/>
                 <c:pt idx="0">
-                  <c:v>1.0</c:v>
+                  <c:v>0.004</c:v>
                 </c:pt>
                 <c:pt idx="1">
-                  <c:v>0.75</c:v>
+                  <c:v>0.58</c:v>
                 </c:pt>
                 <c:pt idx="2">
                   <c:v>0.67</c:v>
+                </c:pt>
+                <c:pt idx="3">
+                  <c:v>0.8</c:v>
+                </c:pt>
+                <c:pt idx="4">
+                  <c:v>1.0</c:v>
+                </c:pt>
+                <c:pt idx="5">
+                  <c:v>1.0</c:v>
                 </c:pt>
               </c:numCache>
             </c:numRef>
           </c:val>
         </c:ser>
-        <c:gapWidth val="70"/>
+        <c:gapWidth val="55"/>
         <c:axId val="-2068027336"/>
         <c:axId val="-2113994440"/>
       </c:barChart>
@@ -325,7 +463,7 @@
           <c:orientation val="minMax"/>
         </c:scaling>
         <c:delete val="0"/>
-        <c:axPos val="b"/>
+        <c:axPos val="l"/>
         <c:majorTickMark val="out"/>
         <c:minorTickMark val="none"/>
         <c:tickLblPos val="nextTo"/>
@@ -346,11 +484,11 @@
       <c:valAx>
         <c:axId val="-2113994440"/>
         <c:scaling>
-          <c:max val="1.15"/>
+          <c:max val="1.25"/>
           <c:min val="0.0"/>
         </c:scaling>
         <c:delete/>
-        <c:axPos val="l"/>
+        <c:axPos val="b"/>
         <c:majorTickMark val="out"/>
         <c:minorTickMark val="none"/>
         <c:tickLblPos val="nextTo"/>
@@ -365,7 +503,7 @@
     <a:lstStyle/>
     <a:p>
       <a:pPr>
-        <a:defRPr sz="1100">
+        <a:defRPr sz="1050">
           <a:solidFill>
             <a:srgbClr val="141B34"/>
           </a:solidFill>
@@ -846,7 +984,7 @@
           <a:lstStyle/>
           <a:p>
             <a:r>
-              <a:t>Тайминг 50 секунд. Заказчик хочет, чтобы руководитель получал ответ здесь и сейчас прямо в чате. Я закрыл весь минимальный и весь целевой результат, и 7 из 10 пунктов сверх MVP. Не сделаны автосохранение черновика, публикация ссылкой и шаблоны запросов, они в плане внедрения.</a:t>
+              <a:t>Тайминг 50 секунд. Сейчас нестандартный вопрос руководителя уходит аналитику или упирается в отсутствие отчета в BI. Бот дает ответ за секунды и позволяет продолжить анализ фразами. Важно для крупной компании, что все цифры считает код, а модель только выбирает команду. QR-коды ведут на код и на живой дашборд.</a:t>
             </a:r>
           </a:p>
         </p:txBody>
@@ -916,7 +1054,7 @@
           <a:lstStyle/>
           <a:p>
             <a:r>
-              <a:t>Тайминг 1 минута. Ключевая идея. Вопрос превращается в команду из каталога, каталог проверяет каждый разрез и метрику, SQL собирает код. Вычисления тоже без кода: «факт минус план, делить на план, умножить на сто» превращается в дерево из четырех действий. Для Puzzle это важно: у клиента Oracle, и подключение новой базы сводится к описанию каталога.</a:t>
+              <a:t>Тайминг 1 минута. Решение устроено в три слоя. Первый понимает вопрос, это правила и бесплатная LLM, и он может ошибаться. Второй слой, каталог, это контракт с данными: в нем описаны разрезы и метрики, все остальное отбрасывается. Это граница доверия. Третий слой собирает SQL и считает цифры обычным кодом. Поэтому бот безопасен, не выдумывает числа и переносится на Oracle клиента через каталог.</a:t>
             </a:r>
           </a:p>
         </p:txBody>
@@ -1266,7 +1404,7 @@
           <a:lstStyle/>
           <a:p>
             <a:r>
-              <a:t>Тайминг 50 секунд. Я проверил разбор на трех наборах. Все запросы из кейса проходят. Перефразировки и слепая выборка в первом прогоне дали 75 и 67%. Ошибки я исправил, но честно говорю, что на новых словах правила ошибаются примерно в каждой третьей фразе. Поэтому LLM подключается именно для таких фраз.</a:t>
+              <a:t>Тайминг 1 минута. Все 38 запросов из кейса бот понимает. На 35 новых фразах первый прогон дал 25 верных. Хуже всего первый запрос на дашборд, 58%: люди начинают разговор самыми разными словами. Поэтому бесплатная LLM подключается именно там, где правила не узнали фразу. Ошибки трех типов: незнакомое слово, перепутанный смысл и ложное совпадение имени. Все исправлены, а бот всегда показывает, как понял запрос.</a:t>
             </a:r>
           </a:p>
         </p:txBody>
@@ -5162,7 +5300,7 @@
                 </a:solidFill>
                 <a:latin typeface="Peace Sans"/>
               </a:rPr>
-              <a:t>Задача и что сделано</a:t>
+              <a:t>Задача и ценность</a:t>
             </a:r>
           </a:p>
         </p:txBody>
@@ -5201,7 +5339,7 @@
                 </a:solidFill>
                 <a:latin typeface="Intro"/>
               </a:rPr>
-              <a:t>Руководитель спрашивает в чате и сразу получает живой дашборд, без похода в BI и без ожидания аналитика</a:t>
+              <a:t>Руководитель получает ответ на вопрос о продажах за секунды, без заявки аналитику и без поиска отчета в BI</a:t>
             </a:r>
           </a:p>
         </p:txBody>
@@ -5215,7 +5353,7 @@
         <p:spPr>
           <a:xfrm>
             <a:off x="270000" y="1638000"/>
-            <a:ext cx="5112000" cy="4734000"/>
+            <a:ext cx="5742000" cy="4734000"/>
           </a:xfrm>
           <a:prstGeom prst="roundRect">
             <a:avLst>
@@ -5261,7 +5399,7 @@
         <p:spPr>
           <a:xfrm>
             <a:off x="468000" y="1782000"/>
-            <a:ext cx="4680000" cy="288000"/>
+            <a:ext cx="5400000" cy="288000"/>
           </a:xfrm>
           <a:prstGeom prst="rect">
             <a:avLst/>
@@ -5286,14 +5424,14 @@
                 </a:solidFill>
                 <a:latin typeface="Intro"/>
               </a:rPr>
-              <a:t>Что просит заказчик</a:t>
+              <a:t>Что мешает сейчас</a:t>
             </a:r>
           </a:p>
         </p:txBody>
       </p:sp>
       <p:pic>
         <p:nvPicPr>
-          <p:cNvPr id="15" name="Picture 14" descr="i_message-square_b.png"/>
+          <p:cNvPr id="15" name="Picture 14" descr="i_clock_b.png"/>
           <p:cNvPicPr>
             <a:picLocks noChangeAspect="1"/>
           </p:cNvPicPr>
@@ -5307,7 +5445,7 @@
         </p:blipFill>
         <p:spPr>
           <a:xfrm>
-            <a:off x="468000" y="2196000"/>
+            <a:off x="468000" y="2232000"/>
             <a:ext cx="342000" cy="342000"/>
           </a:xfrm>
           <a:prstGeom prst="rect">
@@ -5323,8 +5461,8 @@
         </p:nvSpPr>
         <p:spPr>
           <a:xfrm>
-            <a:off x="972000" y="2178000"/>
-            <a:ext cx="4248000" cy="251999"/>
+            <a:off x="972000" y="2214000"/>
+            <a:ext cx="4896000" cy="251999"/>
           </a:xfrm>
           <a:prstGeom prst="rect">
             <a:avLst/>
@@ -5343,13 +5481,13 @@
               </a:lnSpc>
             </a:pPr>
             <a:r>
-              <a:rPr sz="1250" b="0">
+              <a:rPr sz="1300" b="0">
                 <a:solidFill>
                   <a:srgbClr val="141B34"/>
                 </a:solidFill>
                 <a:latin typeface="Intro"/>
               </a:rPr>
-              <a:t>Вопрос словами, ответ дашбордом</a:t>
+              <a:t>Ответ ждут от аналитика</a:t>
             </a:r>
           </a:p>
         </p:txBody>
@@ -5362,8 +5500,8 @@
         </p:nvSpPr>
         <p:spPr>
           <a:xfrm>
-            <a:off x="972000" y="2448000"/>
-            <a:ext cx="4248000" cy="576000"/>
+            <a:off x="972000" y="2502000"/>
+            <a:ext cx="4896000" cy="720000"/>
           </a:xfrm>
           <a:prstGeom prst="rect">
             <a:avLst/>
@@ -5378,24 +5516,24 @@
           <a:p>
             <a:pPr algn="l">
               <a:lnSpc>
-                <a:spcPct val="100000"/>
-              </a:lnSpc>
-            </a:pPr>
-            <a:r>
-              <a:rPr sz="1100" b="0">
+                <a:spcPct val="105000"/>
+              </a:lnSpc>
+            </a:pPr>
+            <a:r>
+              <a:rPr sz="1150" b="0">
                 <a:solidFill>
                   <a:srgbClr val="141B34"/>
                 </a:solidFill>
                 <a:latin typeface="Evolventa"/>
               </a:rPr>
-              <a:t>«План-факт по регионам за год» превращается в KPI, фильтры и 4 графика</a:t>
+              <a:t>Нестандартный вопрос уходит в очередь, и решение принимают без цифр</a:t>
             </a:r>
           </a:p>
         </p:txBody>
       </p:sp>
       <p:pic>
         <p:nvPicPr>
-          <p:cNvPr id="18" name="Picture 17" descr="i_sigma_b.png"/>
+          <p:cNvPr id="18" name="Picture 17" descr="i_file-question_b.png"/>
           <p:cNvPicPr>
             <a:picLocks noChangeAspect="1"/>
           </p:cNvPicPr>
@@ -5409,7 +5547,7 @@
         </p:blipFill>
         <p:spPr>
           <a:xfrm>
-            <a:off x="468000" y="3221999"/>
+            <a:off x="468000" y="3564000"/>
             <a:ext cx="342000" cy="342000"/>
           </a:xfrm>
           <a:prstGeom prst="rect">
@@ -5425,8 +5563,8 @@
         </p:nvSpPr>
         <p:spPr>
           <a:xfrm>
-            <a:off x="972000" y="3203999"/>
-            <a:ext cx="4248000" cy="251999"/>
+            <a:off x="972000" y="3546000"/>
+            <a:ext cx="4896000" cy="251999"/>
           </a:xfrm>
           <a:prstGeom prst="rect">
             <a:avLst/>
@@ -5445,13 +5583,13 @@
               </a:lnSpc>
             </a:pPr>
             <a:r>
-              <a:rPr sz="1250" b="0">
+              <a:rPr sz="1300" b="0">
                 <a:solidFill>
                   <a:srgbClr val="141B34"/>
                 </a:solidFill>
                 <a:latin typeface="Intro"/>
               </a:rPr>
-              <a:t>Работа с данными диалогом</a:t>
+              <a:t>Нужного отчета нет в BI</a:t>
             </a:r>
           </a:p>
         </p:txBody>
@@ -5464,8 +5602,8 @@
         </p:nvSpPr>
         <p:spPr>
           <a:xfrm>
-            <a:off x="972000" y="3473999"/>
-            <a:ext cx="4248000" cy="576000"/>
+            <a:off x="972000" y="3834000"/>
+            <a:ext cx="4896000" cy="720000"/>
           </a:xfrm>
           <a:prstGeom prst="rect">
             <a:avLst/>
@@ -5480,24 +5618,24 @@
           <a:p>
             <a:pPr algn="l">
               <a:lnSpc>
-                <a:spcPct val="100000"/>
-              </a:lnSpc>
-            </a:pPr>
-            <a:r>
-              <a:rPr sz="1100" b="0">
+                <a:spcPct val="105000"/>
+              </a:lnSpc>
+            </a:pPr>
+            <a:r>
+              <a:rPr sz="1150" b="0">
                 <a:solidFill>
                   <a:srgbClr val="141B34"/>
                 </a:solidFill>
                 <a:latin typeface="Evolventa"/>
               </a:rPr>
-              <a:t>Добавить колонку, поменять формулу, перестроить график, все без кода</a:t>
+              <a:t>Готовые отчеты покрывают стандартные метрики, а разрез «отстающие точки Урала» в них не заложен</a:t>
             </a:r>
           </a:p>
         </p:txBody>
       </p:sp>
       <p:pic>
         <p:nvPicPr>
-          <p:cNvPr id="21" name="Picture 20" descr="i_save_b.png"/>
+          <p:cNvPr id="21" name="Picture 20" descr="i_triangle-alert_b.png"/>
           <p:cNvPicPr>
             <a:picLocks noChangeAspect="1"/>
           </p:cNvPicPr>
@@ -5511,7 +5649,7 @@
         </p:blipFill>
         <p:spPr>
           <a:xfrm>
-            <a:off x="468000" y="4248000"/>
+            <a:off x="468000" y="4896000"/>
             <a:ext cx="342000" cy="342000"/>
           </a:xfrm>
           <a:prstGeom prst="rect">
@@ -5527,8 +5665,8 @@
         </p:nvSpPr>
         <p:spPr>
           <a:xfrm>
-            <a:off x="972000" y="4229999"/>
-            <a:ext cx="4248000" cy="251999"/>
+            <a:off x="972000" y="4878000"/>
+            <a:ext cx="4896000" cy="251999"/>
           </a:xfrm>
           <a:prstGeom prst="rect">
             <a:avLst/>
@@ -5547,13 +5685,13 @@
               </a:lnSpc>
             </a:pPr>
             <a:r>
-              <a:rPr sz="1250" b="0">
+              <a:rPr sz="1300" b="0">
                 <a:solidFill>
                   <a:srgbClr val="141B34"/>
                 </a:solidFill>
                 <a:latin typeface="Intro"/>
               </a:rPr>
-              <a:t>Дашборд как результат работы</a:t>
+              <a:t>Код от LLM рискует данными</a:t>
             </a:r>
           </a:p>
         </p:txBody>
@@ -5566,8 +5704,8 @@
         </p:nvSpPr>
         <p:spPr>
           <a:xfrm>
-            <a:off x="972000" y="4499999"/>
-            <a:ext cx="4248000" cy="576000"/>
+            <a:off x="972000" y="5166000"/>
+            <a:ext cx="4896000" cy="720000"/>
           </a:xfrm>
           <a:prstGeom prst="rect">
             <a:avLst/>
@@ -5582,133 +5720,31 @@
           <a:p>
             <a:pPr algn="l">
               <a:lnSpc>
-                <a:spcPct val="100000"/>
-              </a:lnSpc>
-            </a:pPr>
-            <a:r>
-              <a:rPr sz="1100" b="0">
+                <a:spcPct val="105000"/>
+              </a:lnSpc>
+            </a:pPr>
+            <a:r>
+              <a:rPr sz="1150" b="0">
                 <a:solidFill>
                   <a:srgbClr val="141B34"/>
                 </a:solidFill>
                 <a:latin typeface="Evolventa"/>
               </a:rPr>
-              <a:t>Сохранить, найти, открыть в том же виде, сделать копию</a:t>
-            </a:r>
-          </a:p>
-        </p:txBody>
-      </p:sp>
-      <p:pic>
-        <p:nvPicPr>
-          <p:cNvPr id="24" name="Picture 23" descr="i_shield-check_b.png"/>
-          <p:cNvPicPr>
-            <a:picLocks noChangeAspect="1"/>
-          </p:cNvPicPr>
-          <p:nvPr/>
-        </p:nvPicPr>
-        <p:blipFill>
-          <a:blip r:embed="rId5"/>
-          <a:stretch>
-            <a:fillRect/>
-          </a:stretch>
-        </p:blipFill>
-        <p:spPr>
-          <a:xfrm>
-            <a:off x="468000" y="5273999"/>
-            <a:ext cx="342000" cy="342000"/>
-          </a:xfrm>
-          <a:prstGeom prst="rect">
-            <a:avLst/>
-          </a:prstGeom>
-        </p:spPr>
-      </p:pic>
-      <p:sp>
-        <p:nvSpPr>
-          <p:cNvPr id="25" name="TextBox 24"/>
-          <p:cNvSpPr txBox="1"/>
-          <p:nvPr/>
-        </p:nvSpPr>
-        <p:spPr>
-          <a:xfrm>
-            <a:off x="972000" y="5255999"/>
-            <a:ext cx="4248000" cy="251999"/>
-          </a:xfrm>
-          <a:prstGeom prst="rect">
-            <a:avLst/>
-          </a:prstGeom>
-          <a:noFill/>
-        </p:spPr>
-        <p:txBody>
-          <a:bodyPr wrap="square" lIns="0" rIns="0" tIns="0" bIns="0" anchor="t">
-            <a:spAutoFit/>
-          </a:bodyPr>
-          <a:lstStyle/>
-          <a:p>
-            <a:pPr algn="l">
-              <a:lnSpc>
-                <a:spcPct val="100000"/>
-              </a:lnSpc>
-            </a:pPr>
-            <a:r>
-              <a:rPr sz="1250" b="0">
-                <a:solidFill>
-                  <a:srgbClr val="141B34"/>
-                </a:solidFill>
-                <a:latin typeface="Intro"/>
-              </a:rPr>
-              <a:t>Безопасно для крупной компании</a:t>
-            </a:r>
-          </a:p>
-        </p:txBody>
-      </p:sp>
-      <p:sp>
-        <p:nvSpPr>
-          <p:cNvPr id="26" name="TextBox 25"/>
-          <p:cNvSpPr txBox="1"/>
-          <p:nvPr/>
-        </p:nvSpPr>
-        <p:spPr>
-          <a:xfrm>
-            <a:off x="972000" y="5525999"/>
-            <a:ext cx="4248000" cy="576000"/>
-          </a:xfrm>
-          <a:prstGeom prst="rect">
-            <a:avLst/>
-          </a:prstGeom>
-          <a:noFill/>
-        </p:spPr>
-        <p:txBody>
-          <a:bodyPr wrap="square" lIns="0" rIns="0" tIns="0" bIns="0" anchor="t">
-            <a:spAutoFit/>
-          </a:bodyPr>
-          <a:lstStyle/>
-          <a:p>
-            <a:pPr algn="l">
-              <a:lnSpc>
-                <a:spcPct val="100000"/>
-              </a:lnSpc>
-            </a:pPr>
-            <a:r>
-              <a:rPr sz="1100" b="0">
-                <a:solidFill>
-                  <a:srgbClr val="141B34"/>
-                </a:solidFill>
-                <a:latin typeface="Evolventa"/>
-              </a:rPr>
-              <a:t>Код не удаляет и не меняет данные, не ходит в сеть, не зависает</a:t>
-            </a:r>
-          </a:p>
-        </p:txBody>
-      </p:sp>
-      <p:sp>
-        <p:nvSpPr>
-          <p:cNvPr id="27" name="Rounded Rectangle 26"/>
+              <a:t>Модель, которая сама пишет SQL, может ошибиться в цифре или в запросе к рабочей базе</a:t>
+            </a:r>
+          </a:p>
+        </p:txBody>
+      </p:sp>
+      <p:sp>
+        <p:nvSpPr>
+          <p:cNvPr id="24" name="Rounded Rectangle 23"/>
           <p:cNvSpPr/>
           <p:nvPr/>
         </p:nvSpPr>
         <p:spPr>
           <a:xfrm>
-            <a:off x="5526000" y="1638000"/>
-            <a:ext cx="6390000" cy="4734000"/>
+            <a:off x="6173999" y="1638000"/>
+            <a:ext cx="5742000" cy="4734000"/>
           </a:xfrm>
           <a:prstGeom prst="roundRect">
             <a:avLst>
@@ -5747,14 +5783,14 @@
       </p:sp>
       <p:sp>
         <p:nvSpPr>
-          <p:cNvPr id="28" name="TextBox 27"/>
-          <p:cNvSpPr txBox="1"/>
-          <p:nvPr/>
-        </p:nvSpPr>
-        <p:spPr>
-          <a:xfrm>
-            <a:off x="5724000" y="1782000"/>
-            <a:ext cx="5760000" cy="288000"/>
+          <p:cNvPr id="25" name="TextBox 24"/>
+          <p:cNvSpPr txBox="1"/>
+          <p:nvPr/>
+        </p:nvSpPr>
+        <p:spPr>
+          <a:xfrm>
+            <a:off x="6372000" y="1782000"/>
+            <a:ext cx="5400000" cy="288000"/>
           </a:xfrm>
           <a:prstGeom prst="rect">
             <a:avLst/>
@@ -5779,14 +5815,116 @@
                 </a:solidFill>
                 <a:latin typeface="Intro"/>
               </a:rPr>
-              <a:t>Что сделано</a:t>
+              <a:t>Что дает бот</a:t>
             </a:r>
           </a:p>
         </p:txBody>
       </p:sp>
       <p:pic>
         <p:nvPicPr>
-          <p:cNvPr id="29" name="Picture 28" descr="i_bot_b.png"/>
+          <p:cNvPr id="26" name="Picture 25" descr="i_zap_b.png"/>
+          <p:cNvPicPr>
+            <a:picLocks noChangeAspect="1"/>
+          </p:cNvPicPr>
+          <p:nvPr/>
+        </p:nvPicPr>
+        <p:blipFill>
+          <a:blip r:embed="rId5"/>
+          <a:stretch>
+            <a:fillRect/>
+          </a:stretch>
+        </p:blipFill>
+        <p:spPr>
+          <a:xfrm>
+            <a:off x="6372000" y="2232000"/>
+            <a:ext cx="342000" cy="342000"/>
+          </a:xfrm>
+          <a:prstGeom prst="rect">
+            <a:avLst/>
+          </a:prstGeom>
+        </p:spPr>
+      </p:pic>
+      <p:sp>
+        <p:nvSpPr>
+          <p:cNvPr id="27" name="TextBox 26"/>
+          <p:cNvSpPr txBox="1"/>
+          <p:nvPr/>
+        </p:nvSpPr>
+        <p:spPr>
+          <a:xfrm>
+            <a:off x="6876000" y="2214000"/>
+            <a:ext cx="4896000" cy="251999"/>
+          </a:xfrm>
+          <a:prstGeom prst="rect">
+            <a:avLst/>
+          </a:prstGeom>
+          <a:noFill/>
+        </p:spPr>
+        <p:txBody>
+          <a:bodyPr wrap="square" lIns="0" rIns="0" tIns="0" bIns="0" anchor="t">
+            <a:spAutoFit/>
+          </a:bodyPr>
+          <a:lstStyle/>
+          <a:p>
+            <a:pPr algn="l">
+              <a:lnSpc>
+                <a:spcPct val="100000"/>
+              </a:lnSpc>
+            </a:pPr>
+            <a:r>
+              <a:rPr sz="1300" b="0">
+                <a:solidFill>
+                  <a:srgbClr val="141B34"/>
+                </a:solidFill>
+                <a:latin typeface="Intro"/>
+              </a:rPr>
+              <a:t>Ответ за секунды</a:t>
+            </a:r>
+          </a:p>
+        </p:txBody>
+      </p:sp>
+      <p:sp>
+        <p:nvSpPr>
+          <p:cNvPr id="28" name="TextBox 27"/>
+          <p:cNvSpPr txBox="1"/>
+          <p:nvPr/>
+        </p:nvSpPr>
+        <p:spPr>
+          <a:xfrm>
+            <a:off x="6876000" y="2502000"/>
+            <a:ext cx="4896000" cy="576000"/>
+          </a:xfrm>
+          <a:prstGeom prst="rect">
+            <a:avLst/>
+          </a:prstGeom>
+          <a:noFill/>
+        </p:spPr>
+        <p:txBody>
+          <a:bodyPr wrap="square" lIns="0" rIns="0" tIns="0" bIns="0" anchor="t">
+            <a:spAutoFit/>
+          </a:bodyPr>
+          <a:lstStyle/>
+          <a:p>
+            <a:pPr algn="l">
+              <a:lnSpc>
+                <a:spcPct val="105000"/>
+              </a:lnSpc>
+            </a:pPr>
+            <a:r>
+              <a:rPr sz="1150" b="0">
+                <a:solidFill>
+                  <a:srgbClr val="141B34"/>
+                </a:solidFill>
+                <a:latin typeface="Evolventa"/>
+              </a:rPr>
+              <a:t>Вопрос словами превращается в KPI, фильтры и 4 графика, выгрузка данных занимает меньше секунды</a:t>
+            </a:r>
+          </a:p>
+        </p:txBody>
+      </p:sp>
+      <p:pic>
+        <p:nvPicPr>
+          <p:cNvPr id="29" name="Picture 28" descr="i_refresh-cw_b.png"/>
           <p:cNvPicPr>
             <a:picLocks noChangeAspect="1"/>
           </p:cNvPicPr>
@@ -5800,8 +5938,8 @@
         </p:blipFill>
         <p:spPr>
           <a:xfrm>
-            <a:off x="5724000" y="2196000"/>
-            <a:ext cx="324000" cy="324000"/>
+            <a:off x="6372000" y="3114000"/>
+            <a:ext cx="342000" cy="342000"/>
           </a:xfrm>
           <a:prstGeom prst="rect">
             <a:avLst/>
@@ -5816,8 +5954,8 @@
         </p:nvSpPr>
         <p:spPr>
           <a:xfrm>
-            <a:off x="6192000" y="2178000"/>
-            <a:ext cx="5544000" cy="251999"/>
+            <a:off x="6876000" y="3096000"/>
+            <a:ext cx="4896000" cy="251999"/>
           </a:xfrm>
           <a:prstGeom prst="rect">
             <a:avLst/>
@@ -5836,13 +5974,13 @@
               </a:lnSpc>
             </a:pPr>
             <a:r>
-              <a:rPr sz="1250" b="0">
+              <a:rPr sz="1300" b="0">
                 <a:solidFill>
                   <a:srgbClr val="141B34"/>
                 </a:solidFill>
                 <a:latin typeface="Intro"/>
               </a:rPr>
-              <a:t>Рабочий бот на данных кейса</a:t>
+              <a:t>Анализ продолжается диалогом</a:t>
             </a:r>
           </a:p>
         </p:txBody>
@@ -5855,8 +5993,8 @@
         </p:nvSpPr>
         <p:spPr>
           <a:xfrm>
-            <a:off x="6192000" y="2448000"/>
-            <a:ext cx="5544000" cy="432000"/>
+            <a:off x="6876000" y="3384000"/>
+            <a:ext cx="4896000" cy="576000"/>
           </a:xfrm>
           <a:prstGeom prst="rect">
             <a:avLst/>
@@ -5871,24 +6009,24 @@
           <a:p>
             <a:pPr algn="l">
               <a:lnSpc>
-                <a:spcPct val="100000"/>
-              </a:lnSpc>
-            </a:pPr>
-            <a:r>
-              <a:rPr sz="1100" b="0">
+                <a:spcPct val="105000"/>
+              </a:lnSpc>
+            </a:pPr>
+            <a:r>
+              <a:rPr sz="1150" b="0">
                 <a:solidFill>
                   <a:srgbClr val="141B34"/>
                 </a:solidFill>
                 <a:latin typeface="Evolventa"/>
               </a:rPr>
-              <a:t>Python и встроенная база, запускается двумя командами</a:t>
+              <a:t>Новая колонка, другой разрез или фильтр одной фразой, без разработчика и нового отчета</a:t>
             </a:r>
           </a:p>
         </p:txBody>
       </p:sp>
       <p:pic>
         <p:nvPicPr>
-          <p:cNvPr id="32" name="Picture 31" descr="i_layout-dashboard_b.png"/>
+          <p:cNvPr id="32" name="Picture 31" descr="i_shield-check_b.png"/>
           <p:cNvPicPr>
             <a:picLocks noChangeAspect="1"/>
           </p:cNvPicPr>
@@ -5902,8 +6040,8 @@
         </p:blipFill>
         <p:spPr>
           <a:xfrm>
-            <a:off x="5724000" y="2970000"/>
-            <a:ext cx="324000" cy="324000"/>
+            <a:off x="6372000" y="3996000"/>
+            <a:ext cx="342000" cy="342000"/>
           </a:xfrm>
           <a:prstGeom prst="rect">
             <a:avLst/>
@@ -5918,8 +6056,8 @@
         </p:nvSpPr>
         <p:spPr>
           <a:xfrm>
-            <a:off x="6192000" y="2951999"/>
-            <a:ext cx="5544000" cy="251999"/>
+            <a:off x="6876000" y="3978000"/>
+            <a:ext cx="4896000" cy="251999"/>
           </a:xfrm>
           <a:prstGeom prst="rect">
             <a:avLst/>
@@ -5938,13 +6076,13 @@
               </a:lnSpc>
             </a:pPr>
             <a:r>
-              <a:rPr sz="1250" b="0">
+              <a:rPr sz="1300" b="0">
                 <a:solidFill>
                   <a:srgbClr val="141B34"/>
                 </a:solidFill>
                 <a:latin typeface="Intro"/>
               </a:rPr>
-              <a:t>Дашборд по вопросу</a:t>
+              <a:t>Цифрам можно доверять</a:t>
             </a:r>
           </a:p>
         </p:txBody>
@@ -5957,8 +6095,8 @@
         </p:nvSpPr>
         <p:spPr>
           <a:xfrm>
-            <a:off x="6192000" y="3221999"/>
-            <a:ext cx="5544000" cy="432000"/>
+            <a:off x="6876000" y="4266000"/>
+            <a:ext cx="4896000" cy="576000"/>
           </a:xfrm>
           <a:prstGeom prst="rect">
             <a:avLst/>
@@ -5973,126 +6111,24 @@
           <a:p>
             <a:pPr algn="l">
               <a:lnSpc>
-                <a:spcPct val="100000"/>
-              </a:lnSpc>
-            </a:pPr>
-            <a:r>
-              <a:rPr sz="1100" b="0">
+                <a:spcPct val="105000"/>
+              </a:lnSpc>
+            </a:pPr>
+            <a:r>
+              <a:rPr sz="1150" b="0">
                 <a:solidFill>
                   <a:srgbClr val="141B34"/>
                 </a:solidFill>
                 <a:latin typeface="Evolventa"/>
               </a:rPr>
-              <a:t>KPI, фильтры с поиском и каскадом, переключатели, 4 графика, резюме</a:t>
+              <a:t>Считает код, модель только выбирает команду, поэтому бот не выдумывает числа и не меняет базу</a:t>
             </a:r>
           </a:p>
         </p:txBody>
       </p:sp>
       <p:pic>
         <p:nvPicPr>
-          <p:cNvPr id="35" name="Picture 34" descr="i_sigma_b.png"/>
-          <p:cNvPicPr>
-            <a:picLocks noChangeAspect="1"/>
-          </p:cNvPicPr>
-          <p:nvPr/>
-        </p:nvPicPr>
-        <p:blipFill>
-          <a:blip r:embed="rId3"/>
-          <a:stretch>
-            <a:fillRect/>
-          </a:stretch>
-        </p:blipFill>
-        <p:spPr>
-          <a:xfrm>
-            <a:off x="5724000" y="3744000"/>
-            <a:ext cx="324000" cy="324000"/>
-          </a:xfrm>
-          <a:prstGeom prst="rect">
-            <a:avLst/>
-          </a:prstGeom>
-        </p:spPr>
-      </p:pic>
-      <p:sp>
-        <p:nvSpPr>
-          <p:cNvPr id="36" name="TextBox 35"/>
-          <p:cNvSpPr txBox="1"/>
-          <p:nvPr/>
-        </p:nvSpPr>
-        <p:spPr>
-          <a:xfrm>
-            <a:off x="6192000" y="3726000"/>
-            <a:ext cx="5544000" cy="251999"/>
-          </a:xfrm>
-          <a:prstGeom prst="rect">
-            <a:avLst/>
-          </a:prstGeom>
-          <a:noFill/>
-        </p:spPr>
-        <p:txBody>
-          <a:bodyPr wrap="square" lIns="0" rIns="0" tIns="0" bIns="0" anchor="t">
-            <a:spAutoFit/>
-          </a:bodyPr>
-          <a:lstStyle/>
-          <a:p>
-            <a:pPr algn="l">
-              <a:lnSpc>
-                <a:spcPct val="100000"/>
-              </a:lnSpc>
-            </a:pPr>
-            <a:r>
-              <a:rPr sz="1250" b="0">
-                <a:solidFill>
-                  <a:srgbClr val="141B34"/>
-                </a:solidFill>
-                <a:latin typeface="Intro"/>
-              </a:rPr>
-              <a:t>Работа диалогом</a:t>
-            </a:r>
-          </a:p>
-        </p:txBody>
-      </p:sp>
-      <p:sp>
-        <p:nvSpPr>
-          <p:cNvPr id="37" name="TextBox 36"/>
-          <p:cNvSpPr txBox="1"/>
-          <p:nvPr/>
-        </p:nvSpPr>
-        <p:spPr>
-          <a:xfrm>
-            <a:off x="6192000" y="3996000"/>
-            <a:ext cx="5544000" cy="432000"/>
-          </a:xfrm>
-          <a:prstGeom prst="rect">
-            <a:avLst/>
-          </a:prstGeom>
-          <a:noFill/>
-        </p:spPr>
-        <p:txBody>
-          <a:bodyPr wrap="square" lIns="0" rIns="0" tIns="0" bIns="0" anchor="t">
-            <a:spAutoFit/>
-          </a:bodyPr>
-          <a:lstStyle/>
-          <a:p>
-            <a:pPr algn="l">
-              <a:lnSpc>
-                <a:spcPct val="100000"/>
-              </a:lnSpc>
-            </a:pPr>
-            <a:r>
-              <a:rPr sz="1100" b="0">
-                <a:solidFill>
-                  <a:srgbClr val="141B34"/>
-                </a:solidFill>
-                <a:latin typeface="Evolventa"/>
-              </a:rPr>
-              <a:t>колонки, правка графиков, сохранение, версии, экспорт в HTML и Excel</a:t>
-            </a:r>
-          </a:p>
-        </p:txBody>
-      </p:sp>
-      <p:pic>
-        <p:nvPicPr>
-          <p:cNvPr id="38" name="Picture 37" descr="qr_github.png"/>
+          <p:cNvPr id="35" name="Picture 34" descr="qr_github.png"/>
           <p:cNvPicPr>
             <a:picLocks noChangeAspect="1"/>
           </p:cNvPicPr>
@@ -6106,8 +6142,8 @@
         </p:blipFill>
         <p:spPr>
           <a:xfrm>
-            <a:off x="5724000" y="4590000"/>
-            <a:ext cx="1404000" cy="1404000"/>
+            <a:off x="6372000" y="4896000"/>
+            <a:ext cx="1296000" cy="1296000"/>
           </a:xfrm>
           <a:prstGeom prst="rect">
             <a:avLst/>
@@ -6116,22 +6152,22 @@
       </p:pic>
       <p:sp>
         <p:nvSpPr>
-          <p:cNvPr id="39" name="TextBox 38"/>
-          <p:cNvSpPr txBox="1"/>
-          <p:nvPr/>
-        </p:nvSpPr>
-        <p:spPr>
-          <a:xfrm>
-            <a:off x="7236000" y="4752000"/>
-            <a:ext cx="1440000" cy="288000"/>
-          </a:xfrm>
-          <a:prstGeom prst="rect">
-            <a:avLst/>
-          </a:prstGeom>
-          <a:noFill/>
-        </p:spPr>
-        <p:txBody>
-          <a:bodyPr wrap="square" lIns="0" rIns="0" tIns="0" bIns="0" anchor="t">
+          <p:cNvPr id="36" name="TextBox 35"/>
+          <p:cNvSpPr txBox="1"/>
+          <p:nvPr/>
+        </p:nvSpPr>
+        <p:spPr>
+          <a:xfrm>
+            <a:off x="7775999" y="4896000"/>
+            <a:ext cx="1224000" cy="1296000"/>
+          </a:xfrm>
+          <a:prstGeom prst="rect">
+            <a:avLst/>
+          </a:prstGeom>
+          <a:noFill/>
+        </p:spPr>
+        <p:txBody>
+          <a:bodyPr wrap="square" lIns="0" rIns="0" tIns="0" bIns="0" anchor="ctr">
             <a:spAutoFit/>
           </a:bodyPr>
           <a:lstStyle/>
@@ -6142,59 +6178,20 @@
               </a:lnSpc>
             </a:pPr>
             <a:r>
-              <a:rPr sz="1200" b="0">
+              <a:rPr sz="1250" b="0">
                 <a:solidFill>
                   <a:srgbClr val="141B34"/>
                 </a:solidFill>
                 <a:latin typeface="Intro"/>
               </a:rPr>
               <a:t>Код на GitHub</a:t>
-            </a:r>
-          </a:p>
-        </p:txBody>
-      </p:sp>
-      <p:sp>
-        <p:nvSpPr>
-          <p:cNvPr id="40" name="TextBox 39"/>
-          <p:cNvSpPr txBox="1"/>
-          <p:nvPr/>
-        </p:nvSpPr>
-        <p:spPr>
-          <a:xfrm>
-            <a:off x="7236000" y="5058000"/>
-            <a:ext cx="1404000" cy="576000"/>
-          </a:xfrm>
-          <a:prstGeom prst="rect">
-            <a:avLst/>
-          </a:prstGeom>
-          <a:noFill/>
-        </p:spPr>
-        <p:txBody>
-          <a:bodyPr wrap="square" lIns="0" rIns="0" tIns="0" bIns="0" anchor="t">
-            <a:spAutoFit/>
-          </a:bodyPr>
-          <a:lstStyle/>
-          <a:p>
-            <a:pPr algn="l">
-              <a:lnSpc>
-                <a:spcPct val="100000"/>
-              </a:lnSpc>
-            </a:pPr>
-            <a:r>
-              <a:rPr sz="1050" b="0">
-                <a:solidFill>
-                  <a:srgbClr val="141B34"/>
-                </a:solidFill>
-                <a:latin typeface="Evolventa"/>
-              </a:rPr>
-              <a:t>данные, тесты и инструкция по запуску</a:t>
             </a:r>
           </a:p>
         </p:txBody>
       </p:sp>
       <p:pic>
         <p:nvPicPr>
-          <p:cNvPr id="41" name="Picture 40" descr="qr_demo.png"/>
+          <p:cNvPr id="37" name="Picture 36" descr="qr_demo.png"/>
           <p:cNvPicPr>
             <a:picLocks noChangeAspect="1"/>
           </p:cNvPicPr>
@@ -6208,8 +6205,8 @@
         </p:blipFill>
         <p:spPr>
           <a:xfrm>
-            <a:off x="8784000" y="4590000"/>
-            <a:ext cx="1404000" cy="1404000"/>
+            <a:off x="9107999" y="4896000"/>
+            <a:ext cx="1296000" cy="1296000"/>
           </a:xfrm>
           <a:prstGeom prst="rect">
             <a:avLst/>
@@ -6218,22 +6215,22 @@
       </p:pic>
       <p:sp>
         <p:nvSpPr>
-          <p:cNvPr id="42" name="TextBox 41"/>
-          <p:cNvSpPr txBox="1"/>
-          <p:nvPr/>
-        </p:nvSpPr>
-        <p:spPr>
-          <a:xfrm>
-            <a:off x="10296000" y="4752000"/>
-            <a:ext cx="1440000" cy="288000"/>
-          </a:xfrm>
-          <a:prstGeom prst="rect">
-            <a:avLst/>
-          </a:prstGeom>
-          <a:noFill/>
-        </p:spPr>
-        <p:txBody>
-          <a:bodyPr wrap="square" lIns="0" rIns="0" tIns="0" bIns="0" anchor="t">
+          <p:cNvPr id="38" name="TextBox 37"/>
+          <p:cNvSpPr txBox="1"/>
+          <p:nvPr/>
+        </p:nvSpPr>
+        <p:spPr>
+          <a:xfrm>
+            <a:off x="10511999" y="4896000"/>
+            <a:ext cx="1224000" cy="1296000"/>
+          </a:xfrm>
+          <a:prstGeom prst="rect">
+            <a:avLst/>
+          </a:prstGeom>
+          <a:noFill/>
+        </p:spPr>
+        <p:txBody>
+          <a:bodyPr wrap="square" lIns="0" rIns="0" tIns="0" bIns="0" anchor="ctr">
             <a:spAutoFit/>
           </a:bodyPr>
           <a:lstStyle/>
@@ -6244,7 +6241,7 @@
               </a:lnSpc>
             </a:pPr>
             <a:r>
-              <a:rPr sz="1200" b="0">
+              <a:rPr sz="1250" b="0">
                 <a:solidFill>
                   <a:srgbClr val="141B34"/>
                 </a:solidFill>
@@ -6257,46 +6254,7 @@
       </p:sp>
       <p:sp>
         <p:nvSpPr>
-          <p:cNvPr id="43" name="TextBox 42"/>
-          <p:cNvSpPr txBox="1"/>
-          <p:nvPr/>
-        </p:nvSpPr>
-        <p:spPr>
-          <a:xfrm>
-            <a:off x="10296000" y="5058000"/>
-            <a:ext cx="1404000" cy="576000"/>
-          </a:xfrm>
-          <a:prstGeom prst="rect">
-            <a:avLst/>
-          </a:prstGeom>
-          <a:noFill/>
-        </p:spPr>
-        <p:txBody>
-          <a:bodyPr wrap="square" lIns="0" rIns="0" tIns="0" bIns="0" anchor="t">
-            <a:spAutoFit/>
-          </a:bodyPr>
-          <a:lstStyle/>
-          <a:p>
-            <a:pPr algn="l">
-              <a:lnSpc>
-                <a:spcPct val="100000"/>
-              </a:lnSpc>
-            </a:pPr>
-            <a:r>
-              <a:rPr sz="1050" b="0">
-                <a:solidFill>
-                  <a:srgbClr val="141B34"/>
-                </a:solidFill>
-                <a:latin typeface="Evolventa"/>
-              </a:rPr>
-              <a:t>можно покликать в браузере</a:t>
-            </a:r>
-          </a:p>
-        </p:txBody>
-      </p:sp>
-      <p:sp>
-        <p:nvSpPr>
-          <p:cNvPr id="44" name="TextBox 43"/>
+          <p:cNvPr id="39" name="TextBox 38"/>
           <p:cNvSpPr txBox="1"/>
           <p:nvPr/>
         </p:nvSpPr>
@@ -6328,14 +6286,14 @@
                 </a:solidFill>
                 <a:latin typeface="Evolventa"/>
               </a:rPr>
-              <a:t>Источники  [1] кейс Puzzle RPA «Чат-бот с интерактивной визуализацией данных», SK Challenge 2026; [2] мои проверки по списку требований</a:t>
-            </a:r>
-          </a:p>
-        </p:txBody>
-      </p:sp>
-      <p:sp>
-        <p:nvSpPr>
-          <p:cNvPr id="45" name="TextBox 44"/>
+              <a:t>Источники  [1] кейс Puzzle RPA «Чат-бот с интерактивной визуализацией данных», SK Challenge 2026; [2] замер времени выгрузки на данных кейса</a:t>
+            </a:r>
+          </a:p>
+        </p:txBody>
+      </p:sp>
+      <p:sp>
+        <p:nvSpPr>
+          <p:cNvPr id="40" name="TextBox 39"/>
           <p:cNvSpPr txBox="1"/>
           <p:nvPr/>
         </p:nvSpPr>
@@ -6862,7 +6820,7 @@
                 </a:solidFill>
                 <a:latin typeface="Peace Sans"/>
               </a:rPr>
-              <a:t>Бот не пишет код</a:t>
+              <a:t>Три слоя решения</a:t>
             </a:r>
           </a:p>
         </p:txBody>
@@ -6901,7 +6859,7 @@
                 </a:solidFill>
                 <a:latin typeface="Intro"/>
               </a:rPr>
-              <a:t>LLM только выбирает команду из каталога, SQL и формулы собирает обычный код, поэтому чужой код нечему выполнять</a:t>
+              <a:t>Модель понимает вопрос, каталог задает границу, код считает цифры. Дальше границы модель не проходит</a:t>
             </a:r>
           </a:p>
         </p:txBody>
@@ -6915,11 +6873,11 @@
         <p:spPr>
           <a:xfrm>
             <a:off x="270000" y="1638000"/>
-            <a:ext cx="11646000" cy="2736000"/>
+            <a:ext cx="3690000" cy="3311999"/>
           </a:xfrm>
           <a:prstGeom prst="roundRect">
             <a:avLst>
-              <a:gd name="adj" fmla="val 6578"/>
+              <a:gd name="adj" fmla="val 5434"/>
             </a:avLst>
           </a:prstGeom>
           <a:solidFill>
@@ -6960,8 +6918,8 @@
         </p:nvSpPr>
         <p:spPr>
           <a:xfrm>
-            <a:off x="468000" y="1872000"/>
-            <a:ext cx="612000" cy="612000"/>
+            <a:off x="468000" y="1800000"/>
+            <a:ext cx="540000" cy="342000"/>
           </a:xfrm>
           <a:prstGeom prst="roundRect">
             <a:avLst>
@@ -6969,7 +6927,7 @@
             </a:avLst>
           </a:prstGeom>
           <a:solidFill>
-            <a:srgbClr val="E8ECFF"/>
+            <a:srgbClr val="3D5AFE"/>
           </a:solidFill>
           <a:ln>
             <a:noFill/>
@@ -6991,37 +6949,61 @@
           </a:fontRef>
         </p:style>
         <p:txBody>
-          <a:bodyPr rtlCol="0" anchor="ctr"/>
+          <a:bodyPr rtlCol="0" anchor="ctr" lIns="36000" rIns="36000" tIns="0" bIns="0"/>
           <a:lstStyle/>
           <a:p>
             <a:pPr algn="ctr"/>
-          </a:p>
-        </p:txBody>
-      </p:sp>
-      <p:pic>
-        <p:nvPicPr>
-          <p:cNvPr id="15" name="Picture 14" descr="i_message-square_b.png"/>
-          <p:cNvPicPr>
-            <a:picLocks noChangeAspect="1"/>
-          </p:cNvPicPr>
-          <p:nvPr/>
-        </p:nvPicPr>
-        <p:blipFill>
-          <a:blip r:embed="rId2"/>
-          <a:stretch>
-            <a:fillRect/>
-          </a:stretch>
-        </p:blipFill>
-        <p:spPr>
-          <a:xfrm>
-            <a:off x="604800" y="2008800"/>
-            <a:ext cx="342000" cy="342000"/>
-          </a:xfrm>
-          <a:prstGeom prst="rect">
-            <a:avLst/>
-          </a:prstGeom>
-        </p:spPr>
-      </p:pic>
+            <a:r>
+              <a:rPr sz="1300">
+                <a:solidFill>
+                  <a:srgbClr val="FFFFFF"/>
+                </a:solidFill>
+                <a:latin typeface="Peace Sans"/>
+              </a:rPr>
+              <a:t>01</a:t>
+            </a:r>
+          </a:p>
+        </p:txBody>
+      </p:sp>
+      <p:sp>
+        <p:nvSpPr>
+          <p:cNvPr id="15" name="TextBox 14"/>
+          <p:cNvSpPr txBox="1"/>
+          <p:nvPr/>
+        </p:nvSpPr>
+        <p:spPr>
+          <a:xfrm>
+            <a:off x="1098000" y="1782000"/>
+            <a:ext cx="2736000" cy="360000"/>
+          </a:xfrm>
+          <a:prstGeom prst="rect">
+            <a:avLst/>
+          </a:prstGeom>
+          <a:noFill/>
+        </p:spPr>
+        <p:txBody>
+          <a:bodyPr wrap="square" lIns="0" rIns="0" tIns="0" bIns="0" anchor="ctr">
+            <a:spAutoFit/>
+          </a:bodyPr>
+          <a:lstStyle/>
+          <a:p>
+            <a:pPr algn="l">
+              <a:lnSpc>
+                <a:spcPct val="100000"/>
+              </a:lnSpc>
+            </a:pPr>
+            <a:r>
+              <a:rPr sz="1700" b="0">
+                <a:solidFill>
+                  <a:srgbClr val="141B34"/>
+                </a:solidFill>
+                <a:latin typeface="Peace Sans"/>
+              </a:rPr>
+              <a:t>Понимание</a:t>
+            </a:r>
+          </a:p>
+        </p:txBody>
+      </p:sp>
       <p:sp>
         <p:nvSpPr>
           <p:cNvPr id="16" name="TextBox 15"/>
@@ -7030,8 +7012,8 @@
         </p:nvSpPr>
         <p:spPr>
           <a:xfrm>
-            <a:off x="468000" y="2610000"/>
-            <a:ext cx="1655999" cy="251999"/>
+            <a:off x="468000" y="2250000"/>
+            <a:ext cx="3311999" cy="251999"/>
           </a:xfrm>
           <a:prstGeom prst="rect">
             <a:avLst/>
@@ -7050,98 +7032,35 @@
               </a:lnSpc>
             </a:pPr>
             <a:r>
-              <a:rPr sz="1250" b="0">
-                <a:solidFill>
-                  <a:srgbClr val="141B34"/>
+              <a:rPr sz="1200" b="0">
+                <a:solidFill>
+                  <a:srgbClr val="3D5AFE"/>
                 </a:solidFill>
                 <a:latin typeface="Intro"/>
               </a:rPr>
-              <a:t>1  Вопрос</a:t>
-            </a:r>
-          </a:p>
-        </p:txBody>
-      </p:sp>
-      <p:sp>
-        <p:nvSpPr>
-          <p:cNvPr id="17" name="TextBox 16"/>
-          <p:cNvSpPr txBox="1"/>
-          <p:nvPr/>
-        </p:nvSpPr>
-        <p:spPr>
-          <a:xfrm>
-            <a:off x="468000" y="2898000"/>
-            <a:ext cx="1655999" cy="1260000"/>
-          </a:xfrm>
-          <a:prstGeom prst="rect">
-            <a:avLst/>
-          </a:prstGeom>
-          <a:noFill/>
-        </p:spPr>
-        <p:txBody>
-          <a:bodyPr wrap="square" lIns="0" rIns="0" tIns="0" bIns="0" anchor="t">
-            <a:spAutoFit/>
-          </a:bodyPr>
-          <a:lstStyle/>
-          <a:p>
-            <a:pPr algn="l">
-              <a:lnSpc>
-                <a:spcPct val="100000"/>
-              </a:lnSpc>
-            </a:pPr>
-            <a:r>
-              <a:rPr sz="1050" b="0">
-                <a:solidFill>
-                  <a:srgbClr val="141B34"/>
-                </a:solidFill>
-                <a:latin typeface="Evolventa"/>
-              </a:rPr>
-              <a:t>«План-факт по регионам за последний год»</a:t>
-            </a:r>
-          </a:p>
-        </p:txBody>
-      </p:sp>
-      <p:pic>
-        <p:nvPicPr>
-          <p:cNvPr id="18" name="Picture 17" descr="i_arrow-right_o.png"/>
-          <p:cNvPicPr>
-            <a:picLocks noChangeAspect="1"/>
-          </p:cNvPicPr>
-          <p:nvPr/>
-        </p:nvPicPr>
-        <p:blipFill>
-          <a:blip r:embed="rId3"/>
-          <a:stretch>
-            <a:fillRect/>
-          </a:stretch>
-        </p:blipFill>
-        <p:spPr>
-          <a:xfrm>
-            <a:off x="1565999" y="2023200"/>
-            <a:ext cx="306000" cy="306000"/>
-          </a:xfrm>
-          <a:prstGeom prst="rect">
-            <a:avLst/>
-          </a:prstGeom>
-        </p:spPr>
-      </p:pic>
-      <p:sp>
-        <p:nvSpPr>
-          <p:cNvPr id="19" name="Rounded Rectangle 18"/>
+              <a:t>правила и бесплатная LLM</a:t>
+            </a:r>
+          </a:p>
+        </p:txBody>
+      </p:sp>
+      <p:sp>
+        <p:nvSpPr>
+          <p:cNvPr id="17" name="Rounded Rectangle 16"/>
           <p:cNvSpPr/>
           <p:nvPr/>
         </p:nvSpPr>
         <p:spPr>
           <a:xfrm>
-            <a:off x="2358000" y="1872000"/>
-            <a:ext cx="612000" cy="612000"/>
+            <a:off x="468000" y="2556000"/>
+            <a:ext cx="3294000" cy="1296000"/>
           </a:xfrm>
           <a:prstGeom prst="roundRect">
             <a:avLst>
-              <a:gd name="adj" fmla="val 50000"/>
+              <a:gd name="adj" fmla="val 9722"/>
             </a:avLst>
           </a:prstGeom>
           <a:solidFill>
-            <a:srgbClr val="E8ECFF"/>
+            <a:srgbClr val="0F1530"/>
           </a:solidFill>
           <a:ln>
             <a:noFill/>
@@ -7170,24 +7089,157 @@
           </a:p>
         </p:txBody>
       </p:sp>
+      <p:sp>
+        <p:nvSpPr>
+          <p:cNvPr id="18" name="TextBox 17"/>
+          <p:cNvSpPr txBox="1"/>
+          <p:nvPr/>
+        </p:nvSpPr>
+        <p:spPr>
+          <a:xfrm>
+            <a:off x="612000" y="2664000"/>
+            <a:ext cx="3024000" cy="1116000"/>
+          </a:xfrm>
+          <a:prstGeom prst="rect">
+            <a:avLst/>
+          </a:prstGeom>
+          <a:noFill/>
+        </p:spPr>
+        <p:txBody>
+          <a:bodyPr wrap="square" lIns="0" rIns="0" tIns="0" bIns="0" anchor="t">
+            <a:spAutoFit/>
+          </a:bodyPr>
+          <a:lstStyle/>
+          <a:p>
+            <a:pPr algn="l">
+              <a:lnSpc>
+                <a:spcPct val="115000"/>
+              </a:lnSpc>
+            </a:pPr>
+            <a:r>
+              <a:rPr sz="1050" b="0">
+                <a:solidFill>
+                  <a:srgbClr val="FFFFFF"/>
+                </a:solidFill>
+                <a:latin typeface="Menlo"/>
+              </a:rPr>
+              <a:t>«План-факт по регионам</a:t>
+            </a:r>
+          </a:p>
+          <a:p>
+            <a:pPr algn="l">
+              <a:lnSpc>
+                <a:spcPct val="115000"/>
+              </a:lnSpc>
+            </a:pPr>
+            <a:r>
+              <a:rPr sz="1050" b="0">
+                <a:solidFill>
+                  <a:srgbClr val="FFFFFF"/>
+                </a:solidFill>
+                <a:latin typeface="Menlo"/>
+              </a:rPr>
+              <a:t>за последний год»</a:t>
+            </a:r>
+          </a:p>
+        </p:txBody>
+      </p:sp>
+      <p:sp>
+        <p:nvSpPr>
+          <p:cNvPr id="19" name="TextBox 18"/>
+          <p:cNvSpPr txBox="1"/>
+          <p:nvPr/>
+        </p:nvSpPr>
+        <p:spPr>
+          <a:xfrm>
+            <a:off x="468000" y="4014000"/>
+            <a:ext cx="3311999" cy="251999"/>
+          </a:xfrm>
+          <a:prstGeom prst="rect">
+            <a:avLst/>
+          </a:prstGeom>
+          <a:noFill/>
+        </p:spPr>
+        <p:txBody>
+          <a:bodyPr wrap="square" lIns="0" rIns="0" tIns="0" bIns="0" anchor="t">
+            <a:spAutoFit/>
+          </a:bodyPr>
+          <a:lstStyle/>
+          <a:p>
+            <a:pPr algn="l">
+              <a:lnSpc>
+                <a:spcPct val="100000"/>
+              </a:lnSpc>
+            </a:pPr>
+            <a:r>
+              <a:rPr sz="1300" b="0">
+                <a:solidFill>
+                  <a:srgbClr val="FF8A3D"/>
+                </a:solidFill>
+                <a:latin typeface="Intro"/>
+              </a:rPr>
+              <a:t>Может ошибиться</a:t>
+            </a:r>
+          </a:p>
+        </p:txBody>
+      </p:sp>
+      <p:sp>
+        <p:nvSpPr>
+          <p:cNvPr id="20" name="TextBox 19"/>
+          <p:cNvSpPr txBox="1"/>
+          <p:nvPr/>
+        </p:nvSpPr>
+        <p:spPr>
+          <a:xfrm>
+            <a:off x="468000" y="4284000"/>
+            <a:ext cx="3311999" cy="503999"/>
+          </a:xfrm>
+          <a:prstGeom prst="rect">
+            <a:avLst/>
+          </a:prstGeom>
+          <a:noFill/>
+        </p:spPr>
+        <p:txBody>
+          <a:bodyPr wrap="square" lIns="0" rIns="0" tIns="0" bIns="0" anchor="t">
+            <a:spAutoFit/>
+          </a:bodyPr>
+          <a:lstStyle/>
+          <a:p>
+            <a:pPr algn="l">
+              <a:lnSpc>
+                <a:spcPct val="100000"/>
+              </a:lnSpc>
+            </a:pPr>
+            <a:r>
+              <a:rPr sz="1100" b="0">
+                <a:solidFill>
+                  <a:srgbClr val="141B34"/>
+                </a:solidFill>
+                <a:latin typeface="Evolventa"/>
+              </a:rPr>
+              <a:t>поэтому ее ответ дальше проверяется</a:t>
+            </a:r>
+          </a:p>
+        </p:txBody>
+      </p:sp>
       <p:pic>
         <p:nvPicPr>
-          <p:cNvPr id="20" name="Picture 19" descr="i_braces_b.png"/>
+          <p:cNvPr id="21" name="Picture 20" descr="i_arrow-right_o.png"/>
           <p:cNvPicPr>
             <a:picLocks noChangeAspect="1"/>
           </p:cNvPicPr>
           <p:nvPr/>
         </p:nvPicPr>
         <p:blipFill>
-          <a:blip r:embed="rId4"/>
+          <a:blip r:embed="rId2"/>
           <a:stretch>
             <a:fillRect/>
           </a:stretch>
         </p:blipFill>
         <p:spPr>
           <a:xfrm>
-            <a:off x="2494800" y="2008800"/>
-            <a:ext cx="342000" cy="342000"/>
+            <a:off x="3978000" y="3024000"/>
+            <a:ext cx="270000" cy="270000"/>
           </a:xfrm>
           <a:prstGeom prst="rect">
             <a:avLst/>
@@ -7196,124 +7248,22 @@
       </p:pic>
       <p:sp>
         <p:nvSpPr>
-          <p:cNvPr id="21" name="TextBox 20"/>
-          <p:cNvSpPr txBox="1"/>
-          <p:nvPr/>
-        </p:nvSpPr>
-        <p:spPr>
-          <a:xfrm>
-            <a:off x="2358000" y="2610000"/>
-            <a:ext cx="1655999" cy="251999"/>
-          </a:xfrm>
-          <a:prstGeom prst="rect">
-            <a:avLst/>
-          </a:prstGeom>
-          <a:noFill/>
-        </p:spPr>
-        <p:txBody>
-          <a:bodyPr wrap="square" lIns="0" rIns="0" tIns="0" bIns="0" anchor="t">
-            <a:spAutoFit/>
-          </a:bodyPr>
-          <a:lstStyle/>
-          <a:p>
-            <a:pPr algn="l">
-              <a:lnSpc>
-                <a:spcPct val="100000"/>
-              </a:lnSpc>
-            </a:pPr>
-            <a:r>
-              <a:rPr sz="1250" b="0">
-                <a:solidFill>
-                  <a:srgbClr val="141B34"/>
-                </a:solidFill>
-                <a:latin typeface="Intro"/>
-              </a:rPr>
-              <a:t>2  Команда</a:t>
-            </a:r>
-          </a:p>
-        </p:txBody>
-      </p:sp>
-      <p:sp>
-        <p:nvSpPr>
-          <p:cNvPr id="22" name="TextBox 21"/>
-          <p:cNvSpPr txBox="1"/>
-          <p:nvPr/>
-        </p:nvSpPr>
-        <p:spPr>
-          <a:xfrm>
-            <a:off x="2358000" y="2898000"/>
-            <a:ext cx="1655999" cy="1260000"/>
-          </a:xfrm>
-          <a:prstGeom prst="rect">
-            <a:avLst/>
-          </a:prstGeom>
-          <a:noFill/>
-        </p:spPr>
-        <p:txBody>
-          <a:bodyPr wrap="square" lIns="0" rIns="0" tIns="0" bIns="0" anchor="t">
-            <a:spAutoFit/>
-          </a:bodyPr>
-          <a:lstStyle/>
-          <a:p>
-            <a:pPr algn="l">
-              <a:lnSpc>
-                <a:spcPct val="100000"/>
-              </a:lnSpc>
-            </a:pPr>
-            <a:r>
-              <a:rPr sz="1050" b="0">
-                <a:solidFill>
-                  <a:srgbClr val="141B34"/>
-                </a:solidFill>
-                <a:latin typeface="Evolventa"/>
-              </a:rPr>
-              <a:t>дашборд, разрез регион, окт 2025 – сен 2026</a:t>
-            </a:r>
-          </a:p>
-        </p:txBody>
-      </p:sp>
-      <p:pic>
-        <p:nvPicPr>
-          <p:cNvPr id="23" name="Picture 22" descr="i_arrow-right_o.png"/>
-          <p:cNvPicPr>
-            <a:picLocks noChangeAspect="1"/>
-          </p:cNvPicPr>
-          <p:nvPr/>
-        </p:nvPicPr>
-        <p:blipFill>
-          <a:blip r:embed="rId3"/>
-          <a:stretch>
-            <a:fillRect/>
-          </a:stretch>
-        </p:blipFill>
-        <p:spPr>
-          <a:xfrm>
-            <a:off x="3456000" y="2023200"/>
-            <a:ext cx="306000" cy="306000"/>
-          </a:xfrm>
-          <a:prstGeom prst="rect">
-            <a:avLst/>
-          </a:prstGeom>
-        </p:spPr>
-      </p:pic>
-      <p:sp>
-        <p:nvSpPr>
-          <p:cNvPr id="24" name="Rounded Rectangle 23"/>
+          <p:cNvPr id="22" name="Rounded Rectangle 21"/>
           <p:cNvSpPr/>
           <p:nvPr/>
         </p:nvSpPr>
         <p:spPr>
           <a:xfrm>
-            <a:off x="4248000" y="1872000"/>
-            <a:ext cx="612000" cy="612000"/>
+            <a:off x="4248000" y="1638000"/>
+            <a:ext cx="3690000" cy="3311999"/>
           </a:xfrm>
           <a:prstGeom prst="roundRect">
             <a:avLst>
-              <a:gd name="adj" fmla="val 50000"/>
+              <a:gd name="adj" fmla="val 5434"/>
             </a:avLst>
           </a:prstGeom>
           <a:solidFill>
-            <a:srgbClr val="E8ECFF"/>
+            <a:srgbClr val="FFFFFF"/>
           </a:solidFill>
           <a:ln>
             <a:noFill/>
@@ -7342,142 +7292,16 @@
           </a:p>
         </p:txBody>
       </p:sp>
-      <p:pic>
-        <p:nvPicPr>
-          <p:cNvPr id="25" name="Picture 24" descr="i_book-open_b.png"/>
-          <p:cNvPicPr>
-            <a:picLocks noChangeAspect="1"/>
-          </p:cNvPicPr>
-          <p:nvPr/>
-        </p:nvPicPr>
-        <p:blipFill>
-          <a:blip r:embed="rId5"/>
-          <a:stretch>
-            <a:fillRect/>
-          </a:stretch>
-        </p:blipFill>
-        <p:spPr>
-          <a:xfrm>
-            <a:off x="4384800" y="2008800"/>
-            <a:ext cx="342000" cy="342000"/>
-          </a:xfrm>
-          <a:prstGeom prst="rect">
-            <a:avLst/>
-          </a:prstGeom>
-        </p:spPr>
-      </p:pic>
-      <p:sp>
-        <p:nvSpPr>
-          <p:cNvPr id="26" name="TextBox 25"/>
-          <p:cNvSpPr txBox="1"/>
-          <p:nvPr/>
-        </p:nvSpPr>
-        <p:spPr>
-          <a:xfrm>
-            <a:off x="4248000" y="2610000"/>
-            <a:ext cx="1655999" cy="251999"/>
-          </a:xfrm>
-          <a:prstGeom prst="rect">
-            <a:avLst/>
-          </a:prstGeom>
-          <a:noFill/>
-        </p:spPr>
-        <p:txBody>
-          <a:bodyPr wrap="square" lIns="0" rIns="0" tIns="0" bIns="0" anchor="t">
-            <a:spAutoFit/>
-          </a:bodyPr>
-          <a:lstStyle/>
-          <a:p>
-            <a:pPr algn="l">
-              <a:lnSpc>
-                <a:spcPct val="100000"/>
-              </a:lnSpc>
-            </a:pPr>
-            <a:r>
-              <a:rPr sz="1250" b="0">
-                <a:solidFill>
-                  <a:srgbClr val="141B34"/>
-                </a:solidFill>
-                <a:latin typeface="Intro"/>
-              </a:rPr>
-              <a:t>3  Каталог</a:t>
-            </a:r>
-          </a:p>
-        </p:txBody>
-      </p:sp>
-      <p:sp>
-        <p:nvSpPr>
-          <p:cNvPr id="27" name="TextBox 26"/>
-          <p:cNvSpPr txBox="1"/>
-          <p:nvPr/>
-        </p:nvSpPr>
-        <p:spPr>
-          <a:xfrm>
-            <a:off x="4248000" y="2898000"/>
-            <a:ext cx="1655999" cy="1260000"/>
-          </a:xfrm>
-          <a:prstGeom prst="rect">
-            <a:avLst/>
-          </a:prstGeom>
-          <a:noFill/>
-        </p:spPr>
-        <p:txBody>
-          <a:bodyPr wrap="square" lIns="0" rIns="0" tIns="0" bIns="0" anchor="t">
-            <a:spAutoFit/>
-          </a:bodyPr>
-          <a:lstStyle/>
-          <a:p>
-            <a:pPr algn="l">
-              <a:lnSpc>
-                <a:spcPct val="100000"/>
-              </a:lnSpc>
-            </a:pPr>
-            <a:r>
-              <a:rPr sz="1050" b="0">
-                <a:solidFill>
-                  <a:srgbClr val="141B34"/>
-                </a:solidFill>
-                <a:latin typeface="Evolventa"/>
-              </a:rPr>
-              <a:t>план, факт, регион есть в каталоге, остальное отброшено</a:t>
-            </a:r>
-          </a:p>
-        </p:txBody>
-      </p:sp>
-      <p:pic>
-        <p:nvPicPr>
-          <p:cNvPr id="28" name="Picture 27" descr="i_arrow-right_o.png"/>
-          <p:cNvPicPr>
-            <a:picLocks noChangeAspect="1"/>
-          </p:cNvPicPr>
-          <p:nvPr/>
-        </p:nvPicPr>
-        <p:blipFill>
-          <a:blip r:embed="rId3"/>
-          <a:stretch>
-            <a:fillRect/>
-          </a:stretch>
-        </p:blipFill>
-        <p:spPr>
-          <a:xfrm>
-            <a:off x="5346000" y="2023200"/>
-            <a:ext cx="306000" cy="306000"/>
-          </a:xfrm>
-          <a:prstGeom prst="rect">
-            <a:avLst/>
-          </a:prstGeom>
-        </p:spPr>
-      </p:pic>
-      <p:sp>
-        <p:nvSpPr>
-          <p:cNvPr id="29" name="Rounded Rectangle 28"/>
+      <p:sp>
+        <p:nvSpPr>
+          <p:cNvPr id="23" name="Rounded Rectangle 22"/>
           <p:cNvSpPr/>
           <p:nvPr/>
         </p:nvSpPr>
         <p:spPr>
           <a:xfrm>
-            <a:off x="6138000" y="1872000"/>
-            <a:ext cx="612000" cy="612000"/>
+            <a:off x="4446000" y="1800000"/>
+            <a:ext cx="540000" cy="342000"/>
           </a:xfrm>
           <a:prstGeom prst="roundRect">
             <a:avLst>
@@ -7485,7 +7309,7 @@
             </a:avLst>
           </a:prstGeom>
           <a:solidFill>
-            <a:srgbClr val="E8ECFF"/>
+            <a:srgbClr val="3D5AFE"/>
           </a:solidFill>
           <a:ln>
             <a:noFill/>
@@ -7507,47 +7331,71 @@
           </a:fontRef>
         </p:style>
         <p:txBody>
-          <a:bodyPr rtlCol="0" anchor="ctr"/>
+          <a:bodyPr rtlCol="0" anchor="ctr" lIns="36000" rIns="36000" tIns="0" bIns="0"/>
           <a:lstStyle/>
           <a:p>
             <a:pPr algn="ctr"/>
-          </a:p>
-        </p:txBody>
-      </p:sp>
-      <p:pic>
-        <p:nvPicPr>
-          <p:cNvPr id="30" name="Picture 29" descr="i_database_b.png"/>
-          <p:cNvPicPr>
-            <a:picLocks noChangeAspect="1"/>
-          </p:cNvPicPr>
-          <p:nvPr/>
-        </p:nvPicPr>
-        <p:blipFill>
-          <a:blip r:embed="rId6"/>
-          <a:stretch>
-            <a:fillRect/>
-          </a:stretch>
-        </p:blipFill>
-        <p:spPr>
-          <a:xfrm>
-            <a:off x="6274800" y="2008800"/>
-            <a:ext cx="342000" cy="342000"/>
-          </a:xfrm>
-          <a:prstGeom prst="rect">
-            <a:avLst/>
-          </a:prstGeom>
-        </p:spPr>
-      </p:pic>
-      <p:sp>
-        <p:nvSpPr>
-          <p:cNvPr id="31" name="TextBox 30"/>
-          <p:cNvSpPr txBox="1"/>
-          <p:nvPr/>
-        </p:nvSpPr>
-        <p:spPr>
-          <a:xfrm>
-            <a:off x="6138000" y="2610000"/>
-            <a:ext cx="1655999" cy="251999"/>
+            <a:r>
+              <a:rPr sz="1300">
+                <a:solidFill>
+                  <a:srgbClr val="FFFFFF"/>
+                </a:solidFill>
+                <a:latin typeface="Peace Sans"/>
+              </a:rPr>
+              <a:t>02</a:t>
+            </a:r>
+          </a:p>
+        </p:txBody>
+      </p:sp>
+      <p:sp>
+        <p:nvSpPr>
+          <p:cNvPr id="24" name="TextBox 23"/>
+          <p:cNvSpPr txBox="1"/>
+          <p:nvPr/>
+        </p:nvSpPr>
+        <p:spPr>
+          <a:xfrm>
+            <a:off x="5076000" y="1782000"/>
+            <a:ext cx="2736000" cy="360000"/>
+          </a:xfrm>
+          <a:prstGeom prst="rect">
+            <a:avLst/>
+          </a:prstGeom>
+          <a:noFill/>
+        </p:spPr>
+        <p:txBody>
+          <a:bodyPr wrap="square" lIns="0" rIns="0" tIns="0" bIns="0" anchor="ctr">
+            <a:spAutoFit/>
+          </a:bodyPr>
+          <a:lstStyle/>
+          <a:p>
+            <a:pPr algn="l">
+              <a:lnSpc>
+                <a:spcPct val="100000"/>
+              </a:lnSpc>
+            </a:pPr>
+            <a:r>
+              <a:rPr sz="1700" b="0">
+                <a:solidFill>
+                  <a:srgbClr val="141B34"/>
+                </a:solidFill>
+                <a:latin typeface="Peace Sans"/>
+              </a:rPr>
+              <a:t>Каталог</a:t>
+            </a:r>
+          </a:p>
+        </p:txBody>
+      </p:sp>
+      <p:sp>
+        <p:nvSpPr>
+          <p:cNvPr id="25" name="TextBox 24"/>
+          <p:cNvSpPr txBox="1"/>
+          <p:nvPr/>
+        </p:nvSpPr>
+        <p:spPr>
+          <a:xfrm>
+            <a:off x="4446000" y="2250000"/>
+            <a:ext cx="3311999" cy="251999"/>
           </a:xfrm>
           <a:prstGeom prst="rect">
             <a:avLst/>
@@ -7566,98 +7414,35 @@
               </a:lnSpc>
             </a:pPr>
             <a:r>
-              <a:rPr sz="1250" b="0">
-                <a:solidFill>
-                  <a:srgbClr val="141B34"/>
+              <a:rPr sz="1200" b="0">
+                <a:solidFill>
+                  <a:srgbClr val="3D5AFE"/>
                 </a:solidFill>
                 <a:latin typeface="Intro"/>
               </a:rPr>
-              <a:t>4  SQL кодом</a:t>
-            </a:r>
-          </a:p>
-        </p:txBody>
-      </p:sp>
-      <p:sp>
-        <p:nvSpPr>
-          <p:cNvPr id="32" name="TextBox 31"/>
-          <p:cNvSpPr txBox="1"/>
-          <p:nvPr/>
-        </p:nvSpPr>
-        <p:spPr>
-          <a:xfrm>
-            <a:off x="6138000" y="2898000"/>
-            <a:ext cx="1655999" cy="1260000"/>
-          </a:xfrm>
-          <a:prstGeom prst="rect">
-            <a:avLst/>
-          </a:prstGeom>
-          <a:noFill/>
-        </p:spPr>
-        <p:txBody>
-          <a:bodyPr wrap="square" lIns="0" rIns="0" tIns="0" bIns="0" anchor="t">
-            <a:spAutoFit/>
-          </a:bodyPr>
-          <a:lstStyle/>
-          <a:p>
-            <a:pPr algn="l">
-              <a:lnSpc>
-                <a:spcPct val="100000"/>
-              </a:lnSpc>
-            </a:pPr>
-            <a:r>
-              <a:rPr sz="1050" b="0">
-                <a:solidFill>
-                  <a:srgbClr val="141B34"/>
-                </a:solidFill>
-                <a:latin typeface="Evolventa"/>
-              </a:rPr>
-              <a:t>только SELECT, значения параметрами, таймаут 15 с</a:t>
-            </a:r>
-          </a:p>
-        </p:txBody>
-      </p:sp>
-      <p:pic>
-        <p:nvPicPr>
-          <p:cNvPr id="33" name="Picture 32" descr="i_arrow-right_o.png"/>
-          <p:cNvPicPr>
-            <a:picLocks noChangeAspect="1"/>
-          </p:cNvPicPr>
-          <p:nvPr/>
-        </p:nvPicPr>
-        <p:blipFill>
-          <a:blip r:embed="rId3"/>
-          <a:stretch>
-            <a:fillRect/>
-          </a:stretch>
-        </p:blipFill>
-        <p:spPr>
-          <a:xfrm>
-            <a:off x="7236000" y="2023200"/>
-            <a:ext cx="306000" cy="306000"/>
-          </a:xfrm>
-          <a:prstGeom prst="rect">
-            <a:avLst/>
-          </a:prstGeom>
-        </p:spPr>
-      </p:pic>
-      <p:sp>
-        <p:nvSpPr>
-          <p:cNvPr id="34" name="Rounded Rectangle 33"/>
+              <a:t>контракт с данными</a:t>
+            </a:r>
+          </a:p>
+        </p:txBody>
+      </p:sp>
+      <p:sp>
+        <p:nvSpPr>
+          <p:cNvPr id="26" name="Rounded Rectangle 25"/>
           <p:cNvSpPr/>
           <p:nvPr/>
         </p:nvSpPr>
         <p:spPr>
           <a:xfrm>
-            <a:off x="8028000" y="1872000"/>
-            <a:ext cx="612000" cy="612000"/>
+            <a:off x="4446000" y="2556000"/>
+            <a:ext cx="3294000" cy="1296000"/>
           </a:xfrm>
           <a:prstGeom prst="roundRect">
             <a:avLst>
-              <a:gd name="adj" fmla="val 50000"/>
+              <a:gd name="adj" fmla="val 9722"/>
             </a:avLst>
           </a:prstGeom>
           <a:solidFill>
-            <a:srgbClr val="E8ECFF"/>
+            <a:srgbClr val="0F1530"/>
           </a:solidFill>
           <a:ln>
             <a:noFill/>
@@ -7686,24 +7471,189 @@
           </a:p>
         </p:txBody>
       </p:sp>
+      <p:sp>
+        <p:nvSpPr>
+          <p:cNvPr id="27" name="TextBox 26"/>
+          <p:cNvSpPr txBox="1"/>
+          <p:nvPr/>
+        </p:nvSpPr>
+        <p:spPr>
+          <a:xfrm>
+            <a:off x="4590000" y="2664000"/>
+            <a:ext cx="3024000" cy="1116000"/>
+          </a:xfrm>
+          <a:prstGeom prst="rect">
+            <a:avLst/>
+          </a:prstGeom>
+          <a:noFill/>
+        </p:spPr>
+        <p:txBody>
+          <a:bodyPr wrap="square" lIns="0" rIns="0" tIns="0" bIns="0" anchor="t">
+            <a:spAutoFit/>
+          </a:bodyPr>
+          <a:lstStyle/>
+          <a:p>
+            <a:pPr algn="l">
+              <a:lnSpc>
+                <a:spcPct val="115000"/>
+              </a:lnSpc>
+            </a:pPr>
+            <a:r>
+              <a:rPr sz="1050" b="0">
+                <a:solidFill>
+                  <a:srgbClr val="FFFFFF"/>
+                </a:solidFill>
+                <a:latin typeface="Menlo"/>
+              </a:rPr>
+              <a:t>дашборд</a:t>
+            </a:r>
+          </a:p>
+          <a:p>
+            <a:pPr algn="l">
+              <a:lnSpc>
+                <a:spcPct val="115000"/>
+              </a:lnSpc>
+            </a:pPr>
+            <a:r>
+              <a:rPr sz="1050" b="0">
+                <a:solidFill>
+                  <a:srgbClr val="FFFFFF"/>
+                </a:solidFill>
+                <a:latin typeface="Menlo"/>
+              </a:rPr>
+              <a:t>разрез = регион</a:t>
+            </a:r>
+          </a:p>
+          <a:p>
+            <a:pPr algn="l">
+              <a:lnSpc>
+                <a:spcPct val="115000"/>
+              </a:lnSpc>
+            </a:pPr>
+            <a:r>
+              <a:rPr sz="1050" b="0">
+                <a:solidFill>
+                  <a:srgbClr val="FFFFFF"/>
+                </a:solidFill>
+                <a:latin typeface="Menlo"/>
+              </a:rPr>
+              <a:t>метрики = план, факт</a:t>
+            </a:r>
+          </a:p>
+          <a:p>
+            <a:pPr algn="l">
+              <a:lnSpc>
+                <a:spcPct val="115000"/>
+              </a:lnSpc>
+            </a:pPr>
+            <a:r>
+              <a:rPr sz="1050" b="0">
+                <a:solidFill>
+                  <a:srgbClr val="FFFFFF"/>
+                </a:solidFill>
+                <a:latin typeface="Menlo"/>
+              </a:rPr>
+              <a:t>период = окт 2025 … сен 2026</a:t>
+            </a:r>
+          </a:p>
+        </p:txBody>
+      </p:sp>
+      <p:sp>
+        <p:nvSpPr>
+          <p:cNvPr id="28" name="TextBox 27"/>
+          <p:cNvSpPr txBox="1"/>
+          <p:nvPr/>
+        </p:nvSpPr>
+        <p:spPr>
+          <a:xfrm>
+            <a:off x="4446000" y="4014000"/>
+            <a:ext cx="3311999" cy="251999"/>
+          </a:xfrm>
+          <a:prstGeom prst="rect">
+            <a:avLst/>
+          </a:prstGeom>
+          <a:noFill/>
+        </p:spPr>
+        <p:txBody>
+          <a:bodyPr wrap="square" lIns="0" rIns="0" tIns="0" bIns="0" anchor="t">
+            <a:spAutoFit/>
+          </a:bodyPr>
+          <a:lstStyle/>
+          <a:p>
+            <a:pPr algn="l">
+              <a:lnSpc>
+                <a:spcPct val="100000"/>
+              </a:lnSpc>
+            </a:pPr>
+            <a:r>
+              <a:rPr sz="1300" b="0">
+                <a:solidFill>
+                  <a:srgbClr val="12A150"/>
+                </a:solidFill>
+                <a:latin typeface="Intro"/>
+              </a:rPr>
+              <a:t>Отсекает ошибки</a:t>
+            </a:r>
+          </a:p>
+        </p:txBody>
+      </p:sp>
+      <p:sp>
+        <p:nvSpPr>
+          <p:cNvPr id="29" name="TextBox 28"/>
+          <p:cNvSpPr txBox="1"/>
+          <p:nvPr/>
+        </p:nvSpPr>
+        <p:spPr>
+          <a:xfrm>
+            <a:off x="4446000" y="4284000"/>
+            <a:ext cx="3311999" cy="503999"/>
+          </a:xfrm>
+          <a:prstGeom prst="rect">
+            <a:avLst/>
+          </a:prstGeom>
+          <a:noFill/>
+        </p:spPr>
+        <p:txBody>
+          <a:bodyPr wrap="square" lIns="0" rIns="0" tIns="0" bIns="0" anchor="t">
+            <a:spAutoFit/>
+          </a:bodyPr>
+          <a:lstStyle/>
+          <a:p>
+            <a:pPr algn="l">
+              <a:lnSpc>
+                <a:spcPct val="100000"/>
+              </a:lnSpc>
+            </a:pPr>
+            <a:r>
+              <a:rPr sz="1100" b="0">
+                <a:solidFill>
+                  <a:srgbClr val="141B34"/>
+                </a:solidFill>
+                <a:latin typeface="Evolventa"/>
+              </a:rPr>
+              <a:t>все, чего нет в каталоге, отбрасывается</a:t>
+            </a:r>
+          </a:p>
+        </p:txBody>
+      </p:sp>
       <p:pic>
         <p:nvPicPr>
-          <p:cNvPr id="35" name="Picture 34" descr="i_table_b.png"/>
+          <p:cNvPr id="30" name="Picture 29" descr="i_arrow-right_o.png"/>
           <p:cNvPicPr>
             <a:picLocks noChangeAspect="1"/>
           </p:cNvPicPr>
           <p:nvPr/>
         </p:nvPicPr>
         <p:blipFill>
-          <a:blip r:embed="rId7"/>
+          <a:blip r:embed="rId2"/>
           <a:stretch>
             <a:fillRect/>
           </a:stretch>
         </p:blipFill>
         <p:spPr>
           <a:xfrm>
-            <a:off x="8164800" y="2008800"/>
-            <a:ext cx="342000" cy="342000"/>
+            <a:off x="7956000" y="3024000"/>
+            <a:ext cx="270000" cy="270000"/>
           </a:xfrm>
           <a:prstGeom prst="rect">
             <a:avLst/>
@@ -7712,124 +7662,22 @@
       </p:pic>
       <p:sp>
         <p:nvSpPr>
-          <p:cNvPr id="36" name="TextBox 35"/>
-          <p:cNvSpPr txBox="1"/>
-          <p:nvPr/>
-        </p:nvSpPr>
-        <p:spPr>
-          <a:xfrm>
-            <a:off x="8028000" y="2610000"/>
-            <a:ext cx="1655999" cy="251999"/>
-          </a:xfrm>
-          <a:prstGeom prst="rect">
-            <a:avLst/>
-          </a:prstGeom>
-          <a:noFill/>
-        </p:spPr>
-        <p:txBody>
-          <a:bodyPr wrap="square" lIns="0" rIns="0" tIns="0" bIns="0" anchor="t">
-            <a:spAutoFit/>
-          </a:bodyPr>
-          <a:lstStyle/>
-          <a:p>
-            <a:pPr algn="l">
-              <a:lnSpc>
-                <a:spcPct val="100000"/>
-              </a:lnSpc>
-            </a:pPr>
-            <a:r>
-              <a:rPr sz="1250" b="0">
-                <a:solidFill>
-                  <a:srgbClr val="141B34"/>
-                </a:solidFill>
-                <a:latin typeface="Intro"/>
-              </a:rPr>
-              <a:t>5  Единая таблица</a:t>
-            </a:r>
-          </a:p>
-        </p:txBody>
-      </p:sp>
-      <p:sp>
-        <p:nvSpPr>
-          <p:cNvPr id="37" name="TextBox 36"/>
-          <p:cNvSpPr txBox="1"/>
-          <p:nvPr/>
-        </p:nvSpPr>
-        <p:spPr>
-          <a:xfrm>
-            <a:off x="8028000" y="2898000"/>
-            <a:ext cx="1655999" cy="1260000"/>
-          </a:xfrm>
-          <a:prstGeom prst="rect">
-            <a:avLst/>
-          </a:prstGeom>
-          <a:noFill/>
-        </p:spPr>
-        <p:txBody>
-          <a:bodyPr wrap="square" lIns="0" rIns="0" tIns="0" bIns="0" anchor="t">
-            <a:spAutoFit/>
-          </a:bodyPr>
-          <a:lstStyle/>
-          <a:p>
-            <a:pPr algn="l">
-              <a:lnSpc>
-                <a:spcPct val="100000"/>
-              </a:lnSpc>
-            </a:pPr>
-            <a:r>
-              <a:rPr sz="1050" b="0">
-                <a:solidFill>
-                  <a:srgbClr val="141B34"/>
-                </a:solidFill>
-                <a:latin typeface="Evolventa"/>
-              </a:rPr>
-              <a:t>33 787 строк, включая прошлый год для сравнения</a:t>
-            </a:r>
-          </a:p>
-        </p:txBody>
-      </p:sp>
-      <p:pic>
-        <p:nvPicPr>
-          <p:cNvPr id="38" name="Picture 37" descr="i_arrow-right_o.png"/>
-          <p:cNvPicPr>
-            <a:picLocks noChangeAspect="1"/>
-          </p:cNvPicPr>
-          <p:nvPr/>
-        </p:nvPicPr>
-        <p:blipFill>
-          <a:blip r:embed="rId3"/>
-          <a:stretch>
-            <a:fillRect/>
-          </a:stretch>
-        </p:blipFill>
-        <p:spPr>
-          <a:xfrm>
-            <a:off x="9126000" y="2023200"/>
-            <a:ext cx="306000" cy="306000"/>
-          </a:xfrm>
-          <a:prstGeom prst="rect">
-            <a:avLst/>
-          </a:prstGeom>
-        </p:spPr>
-      </p:pic>
-      <p:sp>
-        <p:nvSpPr>
-          <p:cNvPr id="39" name="Rounded Rectangle 38"/>
+          <p:cNvPr id="31" name="Rounded Rectangle 30"/>
           <p:cNvSpPr/>
           <p:nvPr/>
         </p:nvSpPr>
         <p:spPr>
           <a:xfrm>
-            <a:off x="9918000" y="1872000"/>
-            <a:ext cx="612000" cy="612000"/>
+            <a:off x="8226000" y="1638000"/>
+            <a:ext cx="3690000" cy="3311999"/>
           </a:xfrm>
           <a:prstGeom prst="roundRect">
             <a:avLst>
-              <a:gd name="adj" fmla="val 50000"/>
+              <a:gd name="adj" fmla="val 5434"/>
             </a:avLst>
           </a:prstGeom>
           <a:solidFill>
-            <a:srgbClr val="E8ECFF"/>
+            <a:srgbClr val="FFFFFF"/>
           </a:solidFill>
           <a:ln>
             <a:noFill/>
@@ -7858,126 +7706,24 @@
           </a:p>
         </p:txBody>
       </p:sp>
-      <p:pic>
-        <p:nvPicPr>
-          <p:cNvPr id="40" name="Picture 39" descr="i_layout-dashboard_b.png"/>
-          <p:cNvPicPr>
-            <a:picLocks noChangeAspect="1"/>
-          </p:cNvPicPr>
-          <p:nvPr/>
-        </p:nvPicPr>
-        <p:blipFill>
-          <a:blip r:embed="rId8"/>
-          <a:stretch>
-            <a:fillRect/>
-          </a:stretch>
-        </p:blipFill>
-        <p:spPr>
-          <a:xfrm>
-            <a:off x="10054800" y="2008800"/>
-            <a:ext cx="342000" cy="342000"/>
-          </a:xfrm>
-          <a:prstGeom prst="rect">
-            <a:avLst/>
-          </a:prstGeom>
-        </p:spPr>
-      </p:pic>
-      <p:sp>
-        <p:nvSpPr>
-          <p:cNvPr id="41" name="TextBox 40"/>
-          <p:cNvSpPr txBox="1"/>
-          <p:nvPr/>
-        </p:nvSpPr>
-        <p:spPr>
-          <a:xfrm>
-            <a:off x="9918000" y="2610000"/>
-            <a:ext cx="1655999" cy="251999"/>
-          </a:xfrm>
-          <a:prstGeom prst="rect">
-            <a:avLst/>
-          </a:prstGeom>
-          <a:noFill/>
-        </p:spPr>
-        <p:txBody>
-          <a:bodyPr wrap="square" lIns="0" rIns="0" tIns="0" bIns="0" anchor="t">
-            <a:spAutoFit/>
-          </a:bodyPr>
-          <a:lstStyle/>
-          <a:p>
-            <a:pPr algn="l">
-              <a:lnSpc>
-                <a:spcPct val="100000"/>
-              </a:lnSpc>
-            </a:pPr>
-            <a:r>
-              <a:rPr sz="1250" b="0">
-                <a:solidFill>
-                  <a:srgbClr val="141B34"/>
-                </a:solidFill>
-                <a:latin typeface="Intro"/>
-              </a:rPr>
-              <a:t>6  Дашборд</a:t>
-            </a:r>
-          </a:p>
-        </p:txBody>
-      </p:sp>
-      <p:sp>
-        <p:nvSpPr>
-          <p:cNvPr id="42" name="TextBox 41"/>
-          <p:cNvSpPr txBox="1"/>
-          <p:nvPr/>
-        </p:nvSpPr>
-        <p:spPr>
-          <a:xfrm>
-            <a:off x="9918000" y="2898000"/>
-            <a:ext cx="1655999" cy="1260000"/>
-          </a:xfrm>
-          <a:prstGeom prst="rect">
-            <a:avLst/>
-          </a:prstGeom>
-          <a:noFill/>
-        </p:spPr>
-        <p:txBody>
-          <a:bodyPr wrap="square" lIns="0" rIns="0" tIns="0" bIns="0" anchor="t">
-            <a:spAutoFit/>
-          </a:bodyPr>
-          <a:lstStyle/>
-          <a:p>
-            <a:pPr algn="l">
-              <a:lnSpc>
-                <a:spcPct val="100000"/>
-              </a:lnSpc>
-            </a:pPr>
-            <a:r>
-              <a:rPr sz="1050" b="0">
-                <a:solidFill>
-                  <a:srgbClr val="141B34"/>
-                </a:solidFill>
-                <a:latin typeface="Evolventa"/>
-              </a:rPr>
-              <a:t>KPI, фильтры, 4 графика, формулы деревом</a:t>
-            </a:r>
-          </a:p>
-        </p:txBody>
-      </p:sp>
-      <p:sp>
-        <p:nvSpPr>
-          <p:cNvPr id="43" name="Rounded Rectangle 42"/>
+      <p:sp>
+        <p:nvSpPr>
+          <p:cNvPr id="32" name="Rounded Rectangle 31"/>
           <p:cNvSpPr/>
           <p:nvPr/>
         </p:nvSpPr>
         <p:spPr>
           <a:xfrm>
-            <a:off x="270000" y="4500000"/>
-            <a:ext cx="5742000" cy="1872000"/>
+            <a:off x="8424000" y="1800000"/>
+            <a:ext cx="540000" cy="342000"/>
           </a:xfrm>
           <a:prstGeom prst="roundRect">
             <a:avLst>
-              <a:gd name="adj" fmla="val 9615"/>
+              <a:gd name="adj" fmla="val 50000"/>
             </a:avLst>
           </a:prstGeom>
           <a:solidFill>
-            <a:srgbClr val="FFFFFF"/>
+            <a:srgbClr val="3D5AFE"/>
           </a:solidFill>
           <a:ln>
             <a:noFill/>
@@ -7999,23 +7745,71 @@
           </a:fontRef>
         </p:style>
         <p:txBody>
-          <a:bodyPr rtlCol="0" anchor="ctr"/>
+          <a:bodyPr rtlCol="0" anchor="ctr" lIns="36000" rIns="36000" tIns="0" bIns="0"/>
           <a:lstStyle/>
           <a:p>
             <a:pPr algn="ctr"/>
-          </a:p>
-        </p:txBody>
-      </p:sp>
-      <p:sp>
-        <p:nvSpPr>
-          <p:cNvPr id="44" name="TextBox 43"/>
-          <p:cNvSpPr txBox="1"/>
-          <p:nvPr/>
-        </p:nvSpPr>
-        <p:spPr>
-          <a:xfrm>
-            <a:off x="468000" y="4644000"/>
-            <a:ext cx="5400000" cy="288000"/>
+            <a:r>
+              <a:rPr sz="1300">
+                <a:solidFill>
+                  <a:srgbClr val="FFFFFF"/>
+                </a:solidFill>
+                <a:latin typeface="Peace Sans"/>
+              </a:rPr>
+              <a:t>03</a:t>
+            </a:r>
+          </a:p>
+        </p:txBody>
+      </p:sp>
+      <p:sp>
+        <p:nvSpPr>
+          <p:cNvPr id="33" name="TextBox 32"/>
+          <p:cNvSpPr txBox="1"/>
+          <p:nvPr/>
+        </p:nvSpPr>
+        <p:spPr>
+          <a:xfrm>
+            <a:off x="9054000" y="1782000"/>
+            <a:ext cx="2736000" cy="360000"/>
+          </a:xfrm>
+          <a:prstGeom prst="rect">
+            <a:avLst/>
+          </a:prstGeom>
+          <a:noFill/>
+        </p:spPr>
+        <p:txBody>
+          <a:bodyPr wrap="square" lIns="0" rIns="0" tIns="0" bIns="0" anchor="ctr">
+            <a:spAutoFit/>
+          </a:bodyPr>
+          <a:lstStyle/>
+          <a:p>
+            <a:pPr algn="l">
+              <a:lnSpc>
+                <a:spcPct val="100000"/>
+              </a:lnSpc>
+            </a:pPr>
+            <a:r>
+              <a:rPr sz="1700" b="0">
+                <a:solidFill>
+                  <a:srgbClr val="141B34"/>
+                </a:solidFill>
+                <a:latin typeface="Peace Sans"/>
+              </a:rPr>
+              <a:t>Исполнение</a:t>
+            </a:r>
+          </a:p>
+        </p:txBody>
+      </p:sp>
+      <p:sp>
+        <p:nvSpPr>
+          <p:cNvPr id="34" name="TextBox 33"/>
+          <p:cNvSpPr txBox="1"/>
+          <p:nvPr/>
+        </p:nvSpPr>
+        <p:spPr>
+          <a:xfrm>
+            <a:off x="8424000" y="2250000"/>
+            <a:ext cx="3311999" cy="251999"/>
           </a:xfrm>
           <a:prstGeom prst="rect">
             <a:avLst/>
@@ -8034,115 +7828,35 @@
               </a:lnSpc>
             </a:pPr>
             <a:r>
-              <a:rPr sz="1400" b="0">
-                <a:solidFill>
-                  <a:srgbClr val="E5383B"/>
+              <a:rPr sz="1200" b="0">
+                <a:solidFill>
+                  <a:srgbClr val="3D5AFE"/>
                 </a:solidFill>
                 <a:latin typeface="Intro"/>
               </a:rPr>
-              <a:t>Обычный путь</a:t>
-            </a:r>
-          </a:p>
-        </p:txBody>
-      </p:sp>
-      <p:sp>
-        <p:nvSpPr>
-          <p:cNvPr id="45" name="TextBox 44"/>
-          <p:cNvSpPr txBox="1"/>
-          <p:nvPr/>
-        </p:nvSpPr>
-        <p:spPr>
-          <a:xfrm>
-            <a:off x="468000" y="4968000"/>
-            <a:ext cx="5400000" cy="1332000"/>
-          </a:xfrm>
-          <a:prstGeom prst="rect">
-            <a:avLst/>
-          </a:prstGeom>
-          <a:noFill/>
-        </p:spPr>
-        <p:txBody>
-          <a:bodyPr wrap="square" lIns="0" rIns="0" tIns="0" bIns="0" anchor="t">
-            <a:spAutoFit/>
-          </a:bodyPr>
-          <a:lstStyle/>
-          <a:p>
-            <a:pPr algn="l">
-              <a:lnSpc>
-                <a:spcPct val="110000"/>
-              </a:lnSpc>
-              <a:spcAft>
-                <a:spcPts val="600"/>
-              </a:spcAft>
-            </a:pPr>
-            <a:r>
-              <a:rPr sz="1150" b="0">
-                <a:solidFill>
-                  <a:srgbClr val="141B34"/>
-                </a:solidFill>
-                <a:latin typeface="Evolventa"/>
-              </a:rPr>
-              <a:t>LLM пишет SQL и Python, код запускается в песочнице</a:t>
-            </a:r>
-          </a:p>
-          <a:p>
-            <a:pPr algn="l">
-              <a:lnSpc>
-                <a:spcPct val="110000"/>
-              </a:lnSpc>
-              <a:spcAft>
-                <a:spcPts val="600"/>
-              </a:spcAft>
-            </a:pPr>
-            <a:r>
-              <a:rPr sz="1150" b="0">
-                <a:solidFill>
-                  <a:srgbClr val="141B34"/>
-                </a:solidFill>
-                <a:latin typeface="Evolventa"/>
-              </a:rPr>
-              <a:t>Любая ошибка модели может удалить или изменить данные, если песочница пропустит</a:t>
-            </a:r>
-          </a:p>
-          <a:p>
-            <a:pPr algn="l">
-              <a:lnSpc>
-                <a:spcPct val="110000"/>
-              </a:lnSpc>
-              <a:spcAft>
-                <a:spcPts val="600"/>
-              </a:spcAft>
-            </a:pPr>
-            <a:r>
-              <a:rPr sz="1150" b="0">
-                <a:solidFill>
-                  <a:srgbClr val="141B34"/>
-                </a:solidFill>
-                <a:latin typeface="Evolventa"/>
-              </a:rPr>
-              <a:t>Новая база клиента требует заново учить модель ее схеме</a:t>
-            </a:r>
-          </a:p>
-        </p:txBody>
-      </p:sp>
-      <p:sp>
-        <p:nvSpPr>
-          <p:cNvPr id="46" name="Rounded Rectangle 45"/>
+              <a:t>код без генерации</a:t>
+            </a:r>
+          </a:p>
+        </p:txBody>
+      </p:sp>
+      <p:sp>
+        <p:nvSpPr>
+          <p:cNvPr id="35" name="Rounded Rectangle 34"/>
           <p:cNvSpPr/>
           <p:nvPr/>
         </p:nvSpPr>
         <p:spPr>
           <a:xfrm>
-            <a:off x="6173999" y="4500000"/>
-            <a:ext cx="5742000" cy="1872000"/>
+            <a:off x="8424000" y="2556000"/>
+            <a:ext cx="3294000" cy="1296000"/>
           </a:xfrm>
           <a:prstGeom prst="roundRect">
             <a:avLst>
-              <a:gd name="adj" fmla="val 9615"/>
+              <a:gd name="adj" fmla="val 9722"/>
             </a:avLst>
           </a:prstGeom>
           <a:solidFill>
-            <a:srgbClr val="3D5AFE"/>
+            <a:srgbClr val="0F1530"/>
           </a:solidFill>
           <a:ln>
             <a:noFill/>
@@ -8173,14 +7887,465 @@
       </p:sp>
       <p:sp>
         <p:nvSpPr>
+          <p:cNvPr id="36" name="TextBox 35"/>
+          <p:cNvSpPr txBox="1"/>
+          <p:nvPr/>
+        </p:nvSpPr>
+        <p:spPr>
+          <a:xfrm>
+            <a:off x="8568000" y="2664000"/>
+            <a:ext cx="3024000" cy="1116000"/>
+          </a:xfrm>
+          <a:prstGeom prst="rect">
+            <a:avLst/>
+          </a:prstGeom>
+          <a:noFill/>
+        </p:spPr>
+        <p:txBody>
+          <a:bodyPr wrap="square" lIns="0" rIns="0" tIns="0" bIns="0" anchor="t">
+            <a:spAutoFit/>
+          </a:bodyPr>
+          <a:lstStyle/>
+          <a:p>
+            <a:pPr algn="l">
+              <a:lnSpc>
+                <a:spcPct val="115000"/>
+              </a:lnSpc>
+            </a:pPr>
+            <a:r>
+              <a:rPr sz="1050" b="0">
+                <a:solidFill>
+                  <a:srgbClr val="FFFFFF"/>
+                </a:solidFill>
+                <a:latin typeface="Menlo"/>
+              </a:rPr>
+              <a:t>SELECT region, sum(plan), sum(fact)</a:t>
+            </a:r>
+          </a:p>
+          <a:p>
+            <a:pPr algn="l">
+              <a:lnSpc>
+                <a:spcPct val="115000"/>
+              </a:lnSpc>
+            </a:pPr>
+            <a:r>
+              <a:rPr sz="1050" b="0">
+                <a:solidFill>
+                  <a:srgbClr val="FFFFFF"/>
+                </a:solidFill>
+                <a:latin typeface="Menlo"/>
+              </a:rPr>
+              <a:t>FROM sales …</a:t>
+            </a:r>
+          </a:p>
+          <a:p>
+            <a:pPr algn="l">
+              <a:lnSpc>
+                <a:spcPct val="115000"/>
+              </a:lnSpc>
+            </a:pPr>
+            <a:r>
+              <a:rPr sz="1050" b="0">
+                <a:solidFill>
+                  <a:srgbClr val="FFFFFF"/>
+                </a:solidFill>
+                <a:latin typeface="Menlo"/>
+              </a:rPr>
+              <a:t>WHERE sale_date &gt;= ?</a:t>
+            </a:r>
+          </a:p>
+          <a:p>
+            <a:pPr algn="l">
+              <a:lnSpc>
+                <a:spcPct val="115000"/>
+              </a:lnSpc>
+            </a:pPr>
+            <a:r>
+              <a:rPr sz="1050" b="0">
+                <a:solidFill>
+                  <a:srgbClr val="FFFFFF"/>
+                </a:solidFill>
+                <a:latin typeface="Menlo"/>
+              </a:rPr>
+              <a:t>→ 33 787 строк → дашборд</a:t>
+            </a:r>
+          </a:p>
+        </p:txBody>
+      </p:sp>
+      <p:sp>
+        <p:nvSpPr>
+          <p:cNvPr id="37" name="TextBox 36"/>
+          <p:cNvSpPr txBox="1"/>
+          <p:nvPr/>
+        </p:nvSpPr>
+        <p:spPr>
+          <a:xfrm>
+            <a:off x="8424000" y="4014000"/>
+            <a:ext cx="3311999" cy="251999"/>
+          </a:xfrm>
+          <a:prstGeom prst="rect">
+            <a:avLst/>
+          </a:prstGeom>
+          <a:noFill/>
+        </p:spPr>
+        <p:txBody>
+          <a:bodyPr wrap="square" lIns="0" rIns="0" tIns="0" bIns="0" anchor="t">
+            <a:spAutoFit/>
+          </a:bodyPr>
+          <a:lstStyle/>
+          <a:p>
+            <a:pPr algn="l">
+              <a:lnSpc>
+                <a:spcPct val="100000"/>
+              </a:lnSpc>
+            </a:pPr>
+            <a:r>
+              <a:rPr sz="1300" b="0">
+                <a:solidFill>
+                  <a:srgbClr val="12A150"/>
+                </a:solidFill>
+                <a:latin typeface="Intro"/>
+              </a:rPr>
+              <a:t>Считает точно</a:t>
+            </a:r>
+          </a:p>
+        </p:txBody>
+      </p:sp>
+      <p:sp>
+        <p:nvSpPr>
+          <p:cNvPr id="38" name="TextBox 37"/>
+          <p:cNvSpPr txBox="1"/>
+          <p:nvPr/>
+        </p:nvSpPr>
+        <p:spPr>
+          <a:xfrm>
+            <a:off x="8424000" y="4284000"/>
+            <a:ext cx="3311999" cy="503999"/>
+          </a:xfrm>
+          <a:prstGeom prst="rect">
+            <a:avLst/>
+          </a:prstGeom>
+          <a:noFill/>
+        </p:spPr>
+        <p:txBody>
+          <a:bodyPr wrap="square" lIns="0" rIns="0" tIns="0" bIns="0" anchor="t">
+            <a:spAutoFit/>
+          </a:bodyPr>
+          <a:lstStyle/>
+          <a:p>
+            <a:pPr algn="l">
+              <a:lnSpc>
+                <a:spcPct val="100000"/>
+              </a:lnSpc>
+            </a:pPr>
+            <a:r>
+              <a:rPr sz="1100" b="0">
+                <a:solidFill>
+                  <a:srgbClr val="141B34"/>
+                </a:solidFill>
+                <a:latin typeface="Evolventa"/>
+              </a:rPr>
+              <a:t>тот же код на любых данных</a:t>
+            </a:r>
+          </a:p>
+        </p:txBody>
+      </p:sp>
+      <p:cxnSp>
+        <p:nvCxnSpPr>
+          <p:cNvPr id="39" name="Connector 38"/>
+          <p:cNvCxnSpPr/>
+          <p:nvPr/>
+        </p:nvCxnSpPr>
+        <p:spPr>
+          <a:xfrm>
+            <a:off x="4111200" y="1638000"/>
+            <a:ext cx="0" cy="3312000"/>
+          </a:xfrm>
+          <a:prstGeom prst="line">
+            <a:avLst/>
+          </a:prstGeom>
+          <a:ln w="25400">
+            <a:solidFill>
+              <a:srgbClr val="FF8A3D"/>
+            </a:solidFill>
+            <a:prstDash val="dash"/>
+          </a:ln>
+        </p:spPr>
+        <p:style>
+          <a:lnRef idx="2">
+            <a:schemeClr val="accent1"/>
+          </a:lnRef>
+          <a:fillRef idx="0">
+            <a:schemeClr val="accent1"/>
+          </a:fillRef>
+          <a:effectRef idx="1">
+            <a:schemeClr val="accent1"/>
+          </a:effectRef>
+          <a:fontRef idx="minor">
+            <a:schemeClr val="tx1"/>
+          </a:fontRef>
+        </p:style>
+      </p:cxnSp>
+      <p:sp>
+        <p:nvSpPr>
+          <p:cNvPr id="40" name="TextBox 39"/>
+          <p:cNvSpPr txBox="1"/>
+          <p:nvPr/>
+        </p:nvSpPr>
+        <p:spPr>
+          <a:xfrm>
+            <a:off x="2951999" y="5112000"/>
+            <a:ext cx="2340000" cy="216000"/>
+          </a:xfrm>
+          <a:prstGeom prst="rect">
+            <a:avLst/>
+          </a:prstGeom>
+          <a:noFill/>
+        </p:spPr>
+        <p:txBody>
+          <a:bodyPr wrap="square" lIns="0" rIns="0" tIns="0" bIns="0" anchor="t">
+            <a:spAutoFit/>
+          </a:bodyPr>
+          <a:lstStyle/>
+          <a:p>
+            <a:pPr algn="ctr">
+              <a:lnSpc>
+                <a:spcPct val="100000"/>
+              </a:lnSpc>
+            </a:pPr>
+            <a:r>
+              <a:rPr sz="1000" b="0">
+                <a:solidFill>
+                  <a:srgbClr val="FF8A3D"/>
+                </a:solidFill>
+                <a:latin typeface="Intro"/>
+              </a:rPr>
+              <a:t>граница доверия</a:t>
+            </a:r>
+          </a:p>
+        </p:txBody>
+      </p:sp>
+      <p:sp>
+        <p:nvSpPr>
+          <p:cNvPr id="41" name="Rounded Rectangle 40"/>
+          <p:cNvSpPr/>
+          <p:nvPr/>
+        </p:nvSpPr>
+        <p:spPr>
+          <a:xfrm>
+            <a:off x="270000" y="5364000"/>
+            <a:ext cx="11646000" cy="1007999"/>
+          </a:xfrm>
+          <a:prstGeom prst="roundRect">
+            <a:avLst>
+              <a:gd name="adj" fmla="val 17857"/>
+            </a:avLst>
+          </a:prstGeom>
+          <a:solidFill>
+            <a:srgbClr val="FFFFFF"/>
+          </a:solidFill>
+          <a:ln>
+            <a:noFill/>
+          </a:ln>
+          <a:effectLst/>
+        </p:spPr>
+        <p:style>
+          <a:lnRef idx="1">
+            <a:schemeClr val="accent1"/>
+          </a:lnRef>
+          <a:fillRef idx="3">
+            <a:schemeClr val="accent1"/>
+          </a:fillRef>
+          <a:effectRef idx="2">
+            <a:schemeClr val="accent1"/>
+          </a:effectRef>
+          <a:fontRef idx="minor">
+            <a:schemeClr val="lt1"/>
+          </a:fontRef>
+        </p:style>
+        <p:txBody>
+          <a:bodyPr rtlCol="0" anchor="ctr"/>
+          <a:lstStyle/>
+          <a:p>
+            <a:pPr algn="ctr"/>
+          </a:p>
+        </p:txBody>
+      </p:sp>
+      <p:pic>
+        <p:nvPicPr>
+          <p:cNvPr id="42" name="Picture 41" descr="i_shield-check_b.png"/>
+          <p:cNvPicPr>
+            <a:picLocks noChangeAspect="1"/>
+          </p:cNvPicPr>
+          <p:nvPr/>
+        </p:nvPicPr>
+        <p:blipFill>
+          <a:blip r:embed="rId3"/>
+          <a:stretch>
+            <a:fillRect/>
+          </a:stretch>
+        </p:blipFill>
+        <p:spPr>
+          <a:xfrm>
+            <a:off x="468000" y="5562000"/>
+            <a:ext cx="342000" cy="342000"/>
+          </a:xfrm>
+          <a:prstGeom prst="rect">
+            <a:avLst/>
+          </a:prstGeom>
+        </p:spPr>
+      </p:pic>
+      <p:sp>
+        <p:nvSpPr>
+          <p:cNvPr id="43" name="TextBox 42"/>
+          <p:cNvSpPr txBox="1"/>
+          <p:nvPr/>
+        </p:nvSpPr>
+        <p:spPr>
+          <a:xfrm>
+            <a:off x="954000" y="5526000"/>
+            <a:ext cx="3240000" cy="251999"/>
+          </a:xfrm>
+          <a:prstGeom prst="rect">
+            <a:avLst/>
+          </a:prstGeom>
+          <a:noFill/>
+        </p:spPr>
+        <p:txBody>
+          <a:bodyPr wrap="square" lIns="0" rIns="0" tIns="0" bIns="0" anchor="t">
+            <a:spAutoFit/>
+          </a:bodyPr>
+          <a:lstStyle/>
+          <a:p>
+            <a:pPr algn="l">
+              <a:lnSpc>
+                <a:spcPct val="100000"/>
+              </a:lnSpc>
+            </a:pPr>
+            <a:r>
+              <a:rPr sz="1250" b="0">
+                <a:solidFill>
+                  <a:srgbClr val="141B34"/>
+                </a:solidFill>
+                <a:latin typeface="Intro"/>
+              </a:rPr>
+              <a:t>Безопасность по устройству</a:t>
+            </a:r>
+          </a:p>
+        </p:txBody>
+      </p:sp>
+      <p:sp>
+        <p:nvSpPr>
+          <p:cNvPr id="44" name="TextBox 43"/>
+          <p:cNvSpPr txBox="1"/>
+          <p:nvPr/>
+        </p:nvSpPr>
+        <p:spPr>
+          <a:xfrm>
+            <a:off x="954000" y="5796000"/>
+            <a:ext cx="3240000" cy="432000"/>
+          </a:xfrm>
+          <a:prstGeom prst="rect">
+            <a:avLst/>
+          </a:prstGeom>
+          <a:noFill/>
+        </p:spPr>
+        <p:txBody>
+          <a:bodyPr wrap="square" lIns="0" rIns="0" tIns="0" bIns="0" anchor="t">
+            <a:spAutoFit/>
+          </a:bodyPr>
+          <a:lstStyle/>
+          <a:p>
+            <a:pPr algn="l">
+              <a:lnSpc>
+                <a:spcPct val="100000"/>
+              </a:lnSpc>
+            </a:pPr>
+            <a:r>
+              <a:rPr sz="1100" b="0">
+                <a:solidFill>
+                  <a:srgbClr val="141B34"/>
+                </a:solidFill>
+                <a:latin typeface="Evolventa"/>
+              </a:rPr>
+              <a:t>изолировать нечего, генерируемого кода нет</a:t>
+            </a:r>
+          </a:p>
+        </p:txBody>
+      </p:sp>
+      <p:pic>
+        <p:nvPicPr>
+          <p:cNvPr id="45" name="Picture 44" descr="i_sigma_b.png"/>
+          <p:cNvPicPr>
+            <a:picLocks noChangeAspect="1"/>
+          </p:cNvPicPr>
+          <p:nvPr/>
+        </p:nvPicPr>
+        <p:blipFill>
+          <a:blip r:embed="rId4"/>
+          <a:stretch>
+            <a:fillRect/>
+          </a:stretch>
+        </p:blipFill>
+        <p:spPr>
+          <a:xfrm>
+            <a:off x="4338000" y="5562000"/>
+            <a:ext cx="342000" cy="342000"/>
+          </a:xfrm>
+          <a:prstGeom prst="rect">
+            <a:avLst/>
+          </a:prstGeom>
+        </p:spPr>
+      </p:pic>
+      <p:sp>
+        <p:nvSpPr>
+          <p:cNvPr id="46" name="TextBox 45"/>
+          <p:cNvSpPr txBox="1"/>
+          <p:nvPr/>
+        </p:nvSpPr>
+        <p:spPr>
+          <a:xfrm>
+            <a:off x="4824000" y="5526000"/>
+            <a:ext cx="3240000" cy="251999"/>
+          </a:xfrm>
+          <a:prstGeom prst="rect">
+            <a:avLst/>
+          </a:prstGeom>
+          <a:noFill/>
+        </p:spPr>
+        <p:txBody>
+          <a:bodyPr wrap="square" lIns="0" rIns="0" tIns="0" bIns="0" anchor="t">
+            <a:spAutoFit/>
+          </a:bodyPr>
+          <a:lstStyle/>
+          <a:p>
+            <a:pPr algn="l">
+              <a:lnSpc>
+                <a:spcPct val="100000"/>
+              </a:lnSpc>
+            </a:pPr>
+            <a:r>
+              <a:rPr sz="1250" b="0">
+                <a:solidFill>
+                  <a:srgbClr val="141B34"/>
+                </a:solidFill>
+                <a:latin typeface="Intro"/>
+              </a:rPr>
+              <a:t>Цифры без выдумки</a:t>
+            </a:r>
+          </a:p>
+        </p:txBody>
+      </p:sp>
+      <p:sp>
+        <p:nvSpPr>
           <p:cNvPr id="47" name="TextBox 46"/>
           <p:cNvSpPr txBox="1"/>
           <p:nvPr/>
         </p:nvSpPr>
         <p:spPr>
           <a:xfrm>
-            <a:off x="6372000" y="4644000"/>
-            <a:ext cx="5400000" cy="288000"/>
+            <a:off x="4824000" y="5796000"/>
+            <a:ext cx="3240000" cy="432000"/>
           </a:xfrm>
           <a:prstGeom prst="rect">
             <a:avLst/>
@@ -8199,27 +8364,90 @@
               </a:lnSpc>
             </a:pPr>
             <a:r>
-              <a:rPr sz="1400" b="0">
-                <a:solidFill>
-                  <a:srgbClr val="FFFFFF"/>
+              <a:rPr sz="1100" b="0">
+                <a:solidFill>
+                  <a:srgbClr val="141B34"/>
+                </a:solidFill>
+                <a:latin typeface="Evolventa"/>
+              </a:rPr>
+              <a:t>все числа считает код, модель их не пишет</a:t>
+            </a:r>
+          </a:p>
+        </p:txBody>
+      </p:sp>
+      <p:pic>
+        <p:nvPicPr>
+          <p:cNvPr id="48" name="Picture 47" descr="i_database_b.png"/>
+          <p:cNvPicPr>
+            <a:picLocks noChangeAspect="1"/>
+          </p:cNvPicPr>
+          <p:nvPr/>
+        </p:nvPicPr>
+        <p:blipFill>
+          <a:blip r:embed="rId5"/>
+          <a:stretch>
+            <a:fillRect/>
+          </a:stretch>
+        </p:blipFill>
+        <p:spPr>
+          <a:xfrm>
+            <a:off x="8208000" y="5562000"/>
+            <a:ext cx="342000" cy="342000"/>
+          </a:xfrm>
+          <a:prstGeom prst="rect">
+            <a:avLst/>
+          </a:prstGeom>
+        </p:spPr>
+      </p:pic>
+      <p:sp>
+        <p:nvSpPr>
+          <p:cNvPr id="49" name="TextBox 48"/>
+          <p:cNvSpPr txBox="1"/>
+          <p:nvPr/>
+        </p:nvSpPr>
+        <p:spPr>
+          <a:xfrm>
+            <a:off x="8694000" y="5526000"/>
+            <a:ext cx="3240000" cy="251999"/>
+          </a:xfrm>
+          <a:prstGeom prst="rect">
+            <a:avLst/>
+          </a:prstGeom>
+          <a:noFill/>
+        </p:spPr>
+        <p:txBody>
+          <a:bodyPr wrap="square" lIns="0" rIns="0" tIns="0" bIns="0" anchor="t">
+            <a:spAutoFit/>
+          </a:bodyPr>
+          <a:lstStyle/>
+          <a:p>
+            <a:pPr algn="l">
+              <a:lnSpc>
+                <a:spcPct val="100000"/>
+              </a:lnSpc>
+            </a:pPr>
+            <a:r>
+              <a:rPr sz="1250" b="0">
+                <a:solidFill>
+                  <a:srgbClr val="141B34"/>
                 </a:solidFill>
                 <a:latin typeface="Intro"/>
               </a:rPr>
-              <a:t>Мой путь</a:t>
-            </a:r>
-          </a:p>
-        </p:txBody>
-      </p:sp>
-      <p:sp>
-        <p:nvSpPr>
-          <p:cNvPr id="48" name="TextBox 47"/>
-          <p:cNvSpPr txBox="1"/>
-          <p:nvPr/>
-        </p:nvSpPr>
-        <p:spPr>
-          <a:xfrm>
-            <a:off x="6372000" y="4968000"/>
-            <a:ext cx="5400000" cy="1332000"/>
+              <a:t>Новая база за дни</a:t>
+            </a:r>
+          </a:p>
+        </p:txBody>
+      </p:sp>
+      <p:sp>
+        <p:nvSpPr>
+          <p:cNvPr id="50" name="TextBox 49"/>
+          <p:cNvSpPr txBox="1"/>
+          <p:nvPr/>
+        </p:nvSpPr>
+        <p:spPr>
+          <a:xfrm>
+            <a:off x="8694000" y="5796000"/>
+            <a:ext cx="3240000" cy="432000"/>
           </a:xfrm>
           <a:prstGeom prst="rect">
             <a:avLst/>
@@ -8234,65 +8462,24 @@
           <a:p>
             <a:pPr algn="l">
               <a:lnSpc>
-                <a:spcPct val="110000"/>
-              </a:lnSpc>
-              <a:spcAft>
-                <a:spcPts val="600"/>
-              </a:spcAft>
-            </a:pPr>
-            <a:r>
-              <a:rPr sz="1150" b="0">
-                <a:solidFill>
-                  <a:srgbClr val="FFFFFF"/>
+                <a:spcPct val="100000"/>
+              </a:lnSpc>
+            </a:pPr>
+            <a:r>
+              <a:rPr sz="1100" b="0">
+                <a:solidFill>
+                  <a:srgbClr val="141B34"/>
                 </a:solidFill>
                 <a:latin typeface="Evolventa"/>
               </a:rPr>
-              <a:t>Модель выбирает команду, код собирает SQL и формулы</a:t>
-            </a:r>
-          </a:p>
-          <a:p>
-            <a:pPr algn="l">
-              <a:lnSpc>
-                <a:spcPct val="110000"/>
-              </a:lnSpc>
-              <a:spcAft>
-                <a:spcPts val="600"/>
-              </a:spcAft>
-            </a:pPr>
-            <a:r>
-              <a:rPr sz="1150" b="0">
-                <a:solidFill>
-                  <a:srgbClr val="FFFFFF"/>
-                </a:solidFill>
-                <a:latin typeface="Evolventa"/>
-              </a:rPr>
-              <a:t>Изолировать нечего, потому что сгенерированного кода нет</a:t>
-            </a:r>
-          </a:p>
-          <a:p>
-            <a:pPr algn="l">
-              <a:lnSpc>
-                <a:spcPct val="110000"/>
-              </a:lnSpc>
-              <a:spcAft>
-                <a:spcPts val="600"/>
-              </a:spcAft>
-            </a:pPr>
-            <a:r>
-              <a:rPr sz="1150" b="0">
-                <a:solidFill>
-                  <a:srgbClr val="FFFFFF"/>
-                </a:solidFill>
-                <a:latin typeface="Evolventa"/>
-              </a:rPr>
-              <a:t>Для Oracle клиента меняется только каталог, логика бота та же</a:t>
-            </a:r>
-          </a:p>
-        </p:txBody>
-      </p:sp>
-      <p:sp>
-        <p:nvSpPr>
-          <p:cNvPr id="49" name="TextBox 48"/>
+              <a:t>для Oracle клиента описывается каталог</a:t>
+            </a:r>
+          </a:p>
+        </p:txBody>
+      </p:sp>
+      <p:sp>
+        <p:nvSpPr>
+          <p:cNvPr id="51" name="TextBox 50"/>
           <p:cNvSpPr txBox="1"/>
           <p:nvPr/>
         </p:nvSpPr>
@@ -8324,14 +8511,14 @@
                 </a:solidFill>
                 <a:latin typeface="Evolventa"/>
               </a:rPr>
-              <a:t>Источники  [2] код решения, папки app/catalog.py, app/db.py, app/compute.py</a:t>
-            </a:r>
-          </a:p>
-        </p:txBody>
-      </p:sp>
-      <p:sp>
-        <p:nvSpPr>
-          <p:cNvPr id="50" name="TextBox 49"/>
+              <a:t>Источники  [2] код решения, app/nlu.py, app/catalog.py, app/db.py</a:t>
+            </a:r>
+          </a:p>
+        </p:txBody>
+      </p:sp>
+      <p:sp>
+        <p:nvSpPr>
+          <p:cNvPr id="52" name="TextBox 51"/>
           <p:cNvSpPr txBox="1"/>
           <p:nvPr/>
         </p:nvSpPr>
@@ -12744,8 +12931,8 @@
         </p:blipFill>
         <p:spPr>
           <a:xfrm>
-            <a:off x="1403128" y="1710000"/>
-            <a:ext cx="5509743" cy="4590000"/>
+            <a:off x="1528142" y="1710000"/>
+            <a:ext cx="5259715" cy="4590000"/>
           </a:xfrm>
           <a:prstGeom prst="rect">
             <a:avLst/>
@@ -12887,7 +13074,7 @@
                 </a:solidFill>
                 <a:latin typeface="Intro"/>
               </a:rPr>
-              <a:t>KPI сверху</a:t>
+              <a:t>KPI с контекстом</a:t>
             </a:r>
           </a:p>
         </p:txBody>
@@ -12926,7 +13113,7 @@
                 </a:solidFill>
                 <a:latin typeface="Evolventa"/>
               </a:rPr>
-              <a:t>план, факт, выполнение, отклонение, точки, динамика к году; зеленый и красный цвет</a:t>
+              <a:t>факт к плану и к прошлому году, мини-графики по месяцам</a:t>
             </a:r>
           </a:p>
         </p:txBody>
@@ -13153,7 +13340,7 @@
                 </a:solidFill>
                 <a:latin typeface="Intro"/>
               </a:rPr>
-              <a:t>Четыре связанных графика</a:t>
+              <a:t>Графики по стандарту IBCS</a:t>
             </a:r>
           </a:p>
         </p:txBody>
@@ -13192,7 +13379,7 @@
                 </a:solidFill>
                 <a:latin typeface="Evolventa"/>
               </a:rPr>
-              <a:t>план-факт, структура, ТОП, выполнение плана с линией 100%</a:t>
+              <a:t>факт сплошной, план контуром, прошлый год риской, отклонения зеленым и красным</a:t>
             </a:r>
           </a:p>
         </p:txBody>
@@ -13362,49 +13549,33 @@
         </p:nvSpPr>
         <p:spPr>
           <a:xfrm>
-            <a:off x="9324000" y="5562000"/>
-            <a:ext cx="2448000" cy="720000"/>
-          </a:xfrm>
-          <a:prstGeom prst="rect">
-            <a:avLst/>
-          </a:prstGeom>
-          <a:noFill/>
-        </p:spPr>
-        <p:txBody>
-          <a:bodyPr wrap="square" lIns="0" rIns="0" tIns="0" bIns="0" anchor="t">
+            <a:off x="9324000" y="5472000"/>
+            <a:ext cx="2448000" cy="827999"/>
+          </a:xfrm>
+          <a:prstGeom prst="rect">
+            <a:avLst/>
+          </a:prstGeom>
+          <a:noFill/>
+        </p:spPr>
+        <p:txBody>
+          <a:bodyPr wrap="square" lIns="0" rIns="0" tIns="0" bIns="0" anchor="ctr">
             <a:spAutoFit/>
           </a:bodyPr>
           <a:lstStyle/>
           <a:p>
             <a:pPr algn="l">
               <a:lnSpc>
-                <a:spcPct val="110000"/>
-              </a:lnSpc>
-            </a:pPr>
-            <a:r>
-              <a:rPr sz="1200" b="0">
+                <a:spcPct val="100000"/>
+              </a:lnSpc>
+            </a:pPr>
+            <a:r>
+              <a:rPr sz="1250" b="0">
                 <a:solidFill>
                   <a:srgbClr val="141B34"/>
                 </a:solidFill>
                 <a:latin typeface="Intro"/>
               </a:rPr>
-              <a:t>Покликать самому</a:t>
-            </a:r>
-          </a:p>
-          <a:p>
-            <a:pPr algn="l">
-              <a:lnSpc>
-                <a:spcPct val="110000"/>
-              </a:lnSpc>
-            </a:pPr>
-            <a:r>
-              <a:rPr sz="1050" b="0">
-                <a:solidFill>
-                  <a:srgbClr val="141B34"/>
-                </a:solidFill>
-                <a:latin typeface="Evolventa"/>
-              </a:rPr>
-              <a:t>живая версия дашборда в браузере</a:t>
+              <a:t>Живой дашборд</a:t>
             </a:r>
           </a:p>
         </p:txBody>
@@ -15016,7 +15187,7 @@
                 </a:solidFill>
                 <a:latin typeface="Peace Sans"/>
               </a:rPr>
-              <a:t>Точность разбора запросов</a:t>
+              <a:t>Точность разбора</a:t>
             </a:r>
           </a:p>
         </p:txBody>
@@ -15055,7 +15226,7 @@
                 </a:solidFill>
                 <a:latin typeface="Intro"/>
               </a:rPr>
-              <a:t>Правила знают язык кейса полностью, на новых формулировках их страхует бесплатная LLM</a:t>
+              <a:t>Язык кейса бот знает полностью, слабее всего первый запрос на дашборд, туда и направлена LLM</a:t>
             </a:r>
           </a:p>
         </p:txBody>
@@ -15069,11 +15240,11 @@
         <p:spPr>
           <a:xfrm>
             <a:off x="270000" y="1638000"/>
-            <a:ext cx="6336000" cy="4734000"/>
+            <a:ext cx="11646000" cy="990000"/>
           </a:xfrm>
           <a:prstGeom prst="roundRect">
             <a:avLst>
-              <a:gd name="adj" fmla="val 3802"/>
+              <a:gd name="adj" fmla="val 18181"/>
             </a:avLst>
           </a:prstGeom>
           <a:solidFill>
@@ -15114,8 +15285,8 @@
         </p:nvSpPr>
         <p:spPr>
           <a:xfrm>
-            <a:off x="468000" y="1782000"/>
-            <a:ext cx="5940000" cy="288000"/>
+            <a:off x="468000" y="1745999"/>
+            <a:ext cx="1655999" cy="468000"/>
           </a:xfrm>
           <a:prstGeom prst="rect">
             <a:avLst/>
@@ -15134,45 +15305,144 @@
               </a:lnSpc>
             </a:pPr>
             <a:r>
-              <a:rPr sz="1250" b="0">
+              <a:rPr sz="2600" b="0">
+                <a:solidFill>
+                  <a:srgbClr val="12A150"/>
+                </a:solidFill>
+                <a:latin typeface="Peace Sans"/>
+              </a:rPr>
+              <a:t>38 из 38</a:t>
+            </a:r>
+          </a:p>
+        </p:txBody>
+      </p:sp>
+      <p:sp>
+        <p:nvSpPr>
+          <p:cNvPr id="15" name="TextBox 14"/>
+          <p:cNvSpPr txBox="1"/>
+          <p:nvPr/>
+        </p:nvSpPr>
+        <p:spPr>
+          <a:xfrm>
+            <a:off x="2232000" y="1782000"/>
+            <a:ext cx="1980000" cy="684000"/>
+          </a:xfrm>
+          <a:prstGeom prst="rect">
+            <a:avLst/>
+          </a:prstGeom>
+          <a:noFill/>
+        </p:spPr>
+        <p:txBody>
+          <a:bodyPr wrap="square" lIns="0" rIns="0" tIns="0" bIns="0" anchor="ctr">
+            <a:spAutoFit/>
+          </a:bodyPr>
+          <a:lstStyle/>
+          <a:p>
+            <a:pPr algn="l">
+              <a:lnSpc>
+                <a:spcPct val="100000"/>
+              </a:lnSpc>
+            </a:pPr>
+            <a:r>
+              <a:rPr sz="1100" b="0">
+                <a:solidFill>
+                  <a:srgbClr val="141B34"/>
+                </a:solidFill>
+                <a:latin typeface="Evolventa"/>
+              </a:rPr>
+              <a:t>запросов из приложения к кейсу разобраны верно</a:t>
+            </a:r>
+          </a:p>
+        </p:txBody>
+      </p:sp>
+      <p:sp>
+        <p:nvSpPr>
+          <p:cNvPr id="16" name="TextBox 15"/>
+          <p:cNvSpPr txBox="1"/>
+          <p:nvPr/>
+        </p:nvSpPr>
+        <p:spPr>
+          <a:xfrm>
+            <a:off x="4338000" y="1745999"/>
+            <a:ext cx="1655999" cy="468000"/>
+          </a:xfrm>
+          <a:prstGeom prst="rect">
+            <a:avLst/>
+          </a:prstGeom>
+          <a:noFill/>
+        </p:spPr>
+        <p:txBody>
+          <a:bodyPr wrap="square" lIns="0" rIns="0" tIns="0" bIns="0" anchor="t">
+            <a:spAutoFit/>
+          </a:bodyPr>
+          <a:lstStyle/>
+          <a:p>
+            <a:pPr algn="l">
+              <a:lnSpc>
+                <a:spcPct val="100000"/>
+              </a:lnSpc>
+            </a:pPr>
+            <a:r>
+              <a:rPr sz="2600" b="0">
                 <a:solidFill>
                   <a:srgbClr val="3D5AFE"/>
                 </a:solidFill>
-                <a:latin typeface="Intro"/>
-              </a:rPr>
-              <a:t>Сравнение точности по наборам запросов, первый прогон</a:t>
-            </a:r>
-          </a:p>
-        </p:txBody>
-      </p:sp>
-      <p:graphicFrame>
-        <p:nvGraphicFramePr>
-          <p:cNvPr id="15" name="Chart 14"/>
-          <p:cNvGraphicFramePr>
-            <a:graphicFrameLocks noGrp="1"/>
-          </p:cNvGraphicFramePr>
-          <p:nvPr/>
-        </p:nvGraphicFramePr>
-        <p:xfrm>
-          <a:off x="360000" y="2124000"/>
-          <a:ext cx="6120000" cy="3384000"/>
-        </p:xfrm>
-        <a:graphic>
-          <a:graphicData uri="http://schemas.openxmlformats.org/drawingml/2006/chart">
-            <c:chart xmlns:c="http://schemas.openxmlformats.org/drawingml/2006/chart" r:id="rId2"/>
-          </a:graphicData>
-        </a:graphic>
-      </p:graphicFrame>
-      <p:sp>
-        <p:nvSpPr>
-          <p:cNvPr id="16" name="TextBox 15"/>
-          <p:cNvSpPr txBox="1"/>
-          <p:nvPr/>
-        </p:nvSpPr>
-        <p:spPr>
-          <a:xfrm>
-            <a:off x="468000" y="5616000"/>
-            <a:ext cx="5940000" cy="684000"/>
+                <a:latin typeface="Peace Sans"/>
+              </a:rPr>
+              <a:t>25 из 35</a:t>
+            </a:r>
+          </a:p>
+        </p:txBody>
+      </p:sp>
+      <p:sp>
+        <p:nvSpPr>
+          <p:cNvPr id="17" name="TextBox 16"/>
+          <p:cNvSpPr txBox="1"/>
+          <p:nvPr/>
+        </p:nvSpPr>
+        <p:spPr>
+          <a:xfrm>
+            <a:off x="6102000" y="1782000"/>
+            <a:ext cx="1980000" cy="684000"/>
+          </a:xfrm>
+          <a:prstGeom prst="rect">
+            <a:avLst/>
+          </a:prstGeom>
+          <a:noFill/>
+        </p:spPr>
+        <p:txBody>
+          <a:bodyPr wrap="square" lIns="0" rIns="0" tIns="0" bIns="0" anchor="ctr">
+            <a:spAutoFit/>
+          </a:bodyPr>
+          <a:lstStyle/>
+          <a:p>
+            <a:pPr algn="l">
+              <a:lnSpc>
+                <a:spcPct val="100000"/>
+              </a:lnSpc>
+            </a:pPr>
+            <a:r>
+              <a:rPr sz="1100" b="0">
+                <a:solidFill>
+                  <a:srgbClr val="141B34"/>
+                </a:solidFill>
+                <a:latin typeface="Evolventa"/>
+              </a:rPr>
+              <a:t>новых фраз верно с первого прогона, без LLM</a:t>
+            </a:r>
+          </a:p>
+        </p:txBody>
+      </p:sp>
+      <p:sp>
+        <p:nvSpPr>
+          <p:cNvPr id="18" name="TextBox 17"/>
+          <p:cNvSpPr txBox="1"/>
+          <p:nvPr/>
+        </p:nvSpPr>
+        <p:spPr>
+          <a:xfrm>
+            <a:off x="8208000" y="1745999"/>
+            <a:ext cx="1655999" cy="468000"/>
           </a:xfrm>
           <a:prstGeom prst="rect">
             <a:avLst/>
@@ -15191,31 +15461,70 @@
               </a:lnSpc>
             </a:pPr>
             <a:r>
-              <a:rPr sz="1050" b="0">
+              <a:rPr sz="2600" b="0">
+                <a:solidFill>
+                  <a:srgbClr val="FF8A3D"/>
+                </a:solidFill>
+                <a:latin typeface="Peace Sans"/>
+              </a:rPr>
+              <a:t>4 из 10</a:t>
+            </a:r>
+          </a:p>
+        </p:txBody>
+      </p:sp>
+      <p:sp>
+        <p:nvSpPr>
+          <p:cNvPr id="19" name="TextBox 18"/>
+          <p:cNvSpPr txBox="1"/>
+          <p:nvPr/>
+        </p:nvSpPr>
+        <p:spPr>
+          <a:xfrm>
+            <a:off x="9972000" y="1782000"/>
+            <a:ext cx="1980000" cy="684000"/>
+          </a:xfrm>
+          <a:prstGeom prst="rect">
+            <a:avLst/>
+          </a:prstGeom>
+          <a:noFill/>
+        </p:spPr>
+        <p:txBody>
+          <a:bodyPr wrap="square" lIns="0" rIns="0" tIns="0" bIns="0" anchor="ctr">
+            <a:spAutoFit/>
+          </a:bodyPr>
+          <a:lstStyle/>
+          <a:p>
+            <a:pPr algn="l">
+              <a:lnSpc>
+                <a:spcPct val="100000"/>
+              </a:lnSpc>
+            </a:pPr>
+            <a:r>
+              <a:rPr sz="1100" b="0">
                 <a:solidFill>
                   <a:srgbClr val="141B34"/>
                 </a:solidFill>
                 <a:latin typeface="Evolventa"/>
               </a:rPr>
-              <a:t>После первых прогонов я исправил найденные ошибки, сейчас все 73 запроса проходят. Честная оценка для новых фраз без LLM от 67 до 75%</a:t>
-            </a:r>
-          </a:p>
-        </p:txBody>
-      </p:sp>
-      <p:sp>
-        <p:nvSpPr>
-          <p:cNvPr id="17" name="Rounded Rectangle 16"/>
+              <a:t>ошибок бот сам отметил как непонятные и передал бы LLM</a:t>
+            </a:r>
+          </a:p>
+        </p:txBody>
+      </p:sp>
+      <p:sp>
+        <p:nvSpPr>
+          <p:cNvPr id="20" name="Rounded Rectangle 19"/>
           <p:cNvSpPr/>
           <p:nvPr/>
         </p:nvSpPr>
         <p:spPr>
           <a:xfrm>
-            <a:off x="6750000" y="1638000"/>
-            <a:ext cx="5166000" cy="4734000"/>
+            <a:off x="270000" y="2754000"/>
+            <a:ext cx="5544000" cy="3618000"/>
           </a:xfrm>
           <a:prstGeom prst="roundRect">
             <a:avLst>
-              <a:gd name="adj" fmla="val 3802"/>
+              <a:gd name="adj" fmla="val 4975"/>
             </a:avLst>
           </a:prstGeom>
           <a:solidFill>
@@ -15250,14 +15559,14 @@
       </p:sp>
       <p:sp>
         <p:nvSpPr>
-          <p:cNvPr id="18" name="TextBox 17"/>
-          <p:cNvSpPr txBox="1"/>
-          <p:nvPr/>
-        </p:nvSpPr>
-        <p:spPr>
-          <a:xfrm>
-            <a:off x="6948000" y="1782000"/>
-            <a:ext cx="4680000" cy="288000"/>
+          <p:cNvPr id="21" name="TextBox 20"/>
+          <p:cNvSpPr txBox="1"/>
+          <p:nvPr/>
+        </p:nvSpPr>
+        <p:spPr>
+          <a:xfrm>
+            <a:off x="468000" y="2880000"/>
+            <a:ext cx="5220000" cy="288000"/>
           </a:xfrm>
           <a:prstGeom prst="rect">
             <a:avLst/>
@@ -15282,45 +15591,85 @@
                 </a:solidFill>
                 <a:latin typeface="Intro"/>
               </a:rPr>
-              <a:t>Что из этого следует</a:t>
-            </a:r>
-          </a:p>
-        </p:txBody>
-      </p:sp>
-      <p:pic>
-        <p:nvPicPr>
-          <p:cNvPr id="19" name="Picture 18" descr="i_list-checks_b.png"/>
-          <p:cNvPicPr>
-            <a:picLocks noChangeAspect="1"/>
-          </p:cNvPicPr>
-          <p:nvPr/>
-        </p:nvPicPr>
-        <p:blipFill>
-          <a:blip r:embed="rId3"/>
-          <a:stretch>
-            <a:fillRect/>
-          </a:stretch>
-        </p:blipFill>
-        <p:spPr>
-          <a:xfrm>
-            <a:off x="6948000" y="2160000"/>
-            <a:ext cx="306000" cy="306000"/>
-          </a:xfrm>
-          <a:prstGeom prst="rect">
-            <a:avLst/>
-          </a:prstGeom>
-        </p:spPr>
-      </p:pic>
-      <p:sp>
-        <p:nvSpPr>
-          <p:cNvPr id="20" name="TextBox 19"/>
-          <p:cNvSpPr txBox="1"/>
-          <p:nvPr/>
-        </p:nvSpPr>
-        <p:spPr>
-          <a:xfrm>
-            <a:off x="7380000" y="2142000"/>
-            <a:ext cx="4320000" cy="251999"/>
+              <a:t>Сравнение точности по группам команд на новых фразах</a:t>
+            </a:r>
+          </a:p>
+        </p:txBody>
+      </p:sp>
+      <p:graphicFrame>
+        <p:nvGraphicFramePr>
+          <p:cNvPr id="22" name="Chart 21"/>
+          <p:cNvGraphicFramePr>
+            <a:graphicFrameLocks noGrp="1"/>
+          </p:cNvGraphicFramePr>
+          <p:nvPr/>
+        </p:nvGraphicFramePr>
+        <p:xfrm>
+          <a:off x="360000" y="3168000"/>
+          <a:ext cx="5364000" cy="3096000"/>
+        </p:xfrm>
+        <a:graphic>
+          <a:graphicData uri="http://schemas.openxmlformats.org/drawingml/2006/chart">
+            <c:chart xmlns:c="http://schemas.openxmlformats.org/drawingml/2006/chart" r:id="rId2"/>
+          </a:graphicData>
+        </a:graphic>
+      </p:graphicFrame>
+      <p:sp>
+        <p:nvSpPr>
+          <p:cNvPr id="23" name="Rounded Rectangle 22"/>
+          <p:cNvSpPr/>
+          <p:nvPr/>
+        </p:nvSpPr>
+        <p:spPr>
+          <a:xfrm>
+            <a:off x="5958000" y="2754000"/>
+            <a:ext cx="5958000" cy="3618000"/>
+          </a:xfrm>
+          <a:prstGeom prst="roundRect">
+            <a:avLst>
+              <a:gd name="adj" fmla="val 4975"/>
+            </a:avLst>
+          </a:prstGeom>
+          <a:solidFill>
+            <a:srgbClr val="FFFFFF"/>
+          </a:solidFill>
+          <a:ln>
+            <a:noFill/>
+          </a:ln>
+          <a:effectLst/>
+        </p:spPr>
+        <p:style>
+          <a:lnRef idx="1">
+            <a:schemeClr val="accent1"/>
+          </a:lnRef>
+          <a:fillRef idx="3">
+            <a:schemeClr val="accent1"/>
+          </a:fillRef>
+          <a:effectRef idx="2">
+            <a:schemeClr val="accent1"/>
+          </a:effectRef>
+          <a:fontRef idx="minor">
+            <a:schemeClr val="lt1"/>
+          </a:fontRef>
+        </p:style>
+        <p:txBody>
+          <a:bodyPr rtlCol="0" anchor="ctr"/>
+          <a:lstStyle/>
+          <a:p>
+            <a:pPr algn="ctr"/>
+          </a:p>
+        </p:txBody>
+      </p:sp>
+      <p:sp>
+        <p:nvSpPr>
+          <p:cNvPr id="24" name="TextBox 23"/>
+          <p:cNvSpPr txBox="1"/>
+          <p:nvPr/>
+        </p:nvSpPr>
+        <p:spPr>
+          <a:xfrm>
+            <a:off x="6156000" y="2880000"/>
+            <a:ext cx="5580000" cy="288000"/>
           </a:xfrm>
           <a:prstGeom prst="rect">
             <a:avLst/>
@@ -15339,27 +15688,66 @@
               </a:lnSpc>
             </a:pPr>
             <a:r>
-              <a:rPr sz="1200" b="0">
+              <a:rPr sz="1250" b="0">
+                <a:solidFill>
+                  <a:srgbClr val="3D5AFE"/>
+                </a:solidFill>
+                <a:latin typeface="Intro"/>
+              </a:rPr>
+              <a:t>Типы ошибок и что с ними делает бот</a:t>
+            </a:r>
+          </a:p>
+        </p:txBody>
+      </p:sp>
+      <p:sp>
+        <p:nvSpPr>
+          <p:cNvPr id="25" name="TextBox 24"/>
+          <p:cNvSpPr txBox="1"/>
+          <p:nvPr/>
+        </p:nvSpPr>
+        <p:spPr>
+          <a:xfrm>
+            <a:off x="6156000" y="3276000"/>
+            <a:ext cx="3240000" cy="251999"/>
+          </a:xfrm>
+          <a:prstGeom prst="rect">
+            <a:avLst/>
+          </a:prstGeom>
+          <a:noFill/>
+        </p:spPr>
+        <p:txBody>
+          <a:bodyPr wrap="square" lIns="0" rIns="0" tIns="0" bIns="0" anchor="t">
+            <a:spAutoFit/>
+          </a:bodyPr>
+          <a:lstStyle/>
+          <a:p>
+            <a:pPr algn="l">
+              <a:lnSpc>
+                <a:spcPct val="100000"/>
+              </a:lnSpc>
+            </a:pPr>
+            <a:r>
+              <a:rPr sz="1250" b="0">
                 <a:solidFill>
                   <a:srgbClr val="141B34"/>
                 </a:solidFill>
                 <a:latin typeface="Intro"/>
               </a:rPr>
-              <a:t>Язык заказчика выучен</a:t>
-            </a:r>
-          </a:p>
-        </p:txBody>
-      </p:sp>
-      <p:sp>
-        <p:nvSpPr>
-          <p:cNvPr id="21" name="TextBox 20"/>
-          <p:cNvSpPr txBox="1"/>
-          <p:nvPr/>
-        </p:nvSpPr>
-        <p:spPr>
-          <a:xfrm>
-            <a:off x="7380000" y="2394000"/>
-            <a:ext cx="4320000" cy="576000"/>
+              <a:t>Незнакомое слово</a:t>
+            </a:r>
+          </a:p>
+        </p:txBody>
+      </p:sp>
+      <p:sp>
+        <p:nvSpPr>
+          <p:cNvPr id="26" name="TextBox 25"/>
+          <p:cNvSpPr txBox="1"/>
+          <p:nvPr/>
+        </p:nvSpPr>
+        <p:spPr>
+          <a:xfrm>
+            <a:off x="10872000" y="3167999"/>
+            <a:ext cx="864000" cy="396000"/>
           </a:xfrm>
           <a:prstGeom prst="rect">
             <a:avLst/>
@@ -15372,6 +15760,45 @@
           </a:bodyPr>
           <a:lstStyle/>
           <a:p>
+            <a:pPr algn="r">
+              <a:lnSpc>
+                <a:spcPct val="100000"/>
+              </a:lnSpc>
+            </a:pPr>
+            <a:r>
+              <a:rPr sz="2400" b="0">
+                <a:solidFill>
+                  <a:srgbClr val="FF8A3D"/>
+                </a:solidFill>
+                <a:latin typeface="Peace Sans"/>
+              </a:rPr>
+              <a:t>5</a:t>
+            </a:r>
+          </a:p>
+        </p:txBody>
+      </p:sp>
+      <p:sp>
+        <p:nvSpPr>
+          <p:cNvPr id="27" name="TextBox 26"/>
+          <p:cNvSpPr txBox="1"/>
+          <p:nvPr/>
+        </p:nvSpPr>
+        <p:spPr>
+          <a:xfrm>
+            <a:off x="6156000" y="3546000"/>
+            <a:ext cx="4680000" cy="324000"/>
+          </a:xfrm>
+          <a:prstGeom prst="rect">
+            <a:avLst/>
+          </a:prstGeom>
+          <a:noFill/>
+        </p:spPr>
+        <p:txBody>
+          <a:bodyPr wrap="square" lIns="0" rIns="0" tIns="0" bIns="0" anchor="t">
+            <a:spAutoFit/>
+          </a:bodyPr>
+          <a:lstStyle/>
+          <a:p>
             <a:pPr algn="l">
               <a:lnSpc>
                 <a:spcPct val="100000"/>
@@ -15380,49 +15807,64 @@
             <a:r>
               <a:rPr sz="1050" b="0">
                 <a:solidFill>
+                  <a:srgbClr val="3D5AFE"/>
+                </a:solidFill>
+                <a:latin typeface="Evolventa"/>
+              </a:rPr>
+              <a:t>«Выведи план и факт по молочной продукции»</a:t>
+            </a:r>
+          </a:p>
+        </p:txBody>
+      </p:sp>
+      <p:sp>
+        <p:nvSpPr>
+          <p:cNvPr id="28" name="TextBox 27"/>
+          <p:cNvSpPr txBox="1"/>
+          <p:nvPr/>
+        </p:nvSpPr>
+        <p:spPr>
+          <a:xfrm>
+            <a:off x="6156000" y="3797999"/>
+            <a:ext cx="5544000" cy="324000"/>
+          </a:xfrm>
+          <a:prstGeom prst="rect">
+            <a:avLst/>
+          </a:prstGeom>
+          <a:noFill/>
+        </p:spPr>
+        <p:txBody>
+          <a:bodyPr wrap="square" lIns="0" rIns="0" tIns="0" bIns="0" anchor="t">
+            <a:spAutoFit/>
+          </a:bodyPr>
+          <a:lstStyle/>
+          <a:p>
+            <a:pPr algn="l">
+              <a:lnSpc>
+                <a:spcPct val="100000"/>
+              </a:lnSpc>
+            </a:pPr>
+            <a:r>
+              <a:rPr sz="1050" b="0">
+                <a:solidFill>
                   <a:srgbClr val="141B34"/>
                 </a:solidFill>
                 <a:latin typeface="Evolventa"/>
               </a:rPr>
-              <a:t>все 38 запросов из приложения к кейсу проходят без LLM</a:t>
-            </a:r>
-          </a:p>
-        </p:txBody>
-      </p:sp>
-      <p:pic>
-        <p:nvPicPr>
-          <p:cNvPr id="22" name="Picture 21" descr="i_bot_b.png"/>
-          <p:cNvPicPr>
-            <a:picLocks noChangeAspect="1"/>
-          </p:cNvPicPr>
-          <p:nvPr/>
-        </p:nvPicPr>
-        <p:blipFill>
-          <a:blip r:embed="rId4"/>
-          <a:stretch>
-            <a:fillRect/>
-          </a:stretch>
-        </p:blipFill>
-        <p:spPr>
-          <a:xfrm>
-            <a:off x="6948000" y="3186000"/>
-            <a:ext cx="306000" cy="306000"/>
-          </a:xfrm>
-          <a:prstGeom prst="rect">
-            <a:avLst/>
-          </a:prstGeom>
-        </p:spPr>
-      </p:pic>
-      <p:sp>
-        <p:nvSpPr>
-          <p:cNvPr id="23" name="TextBox 22"/>
-          <p:cNvSpPr txBox="1"/>
-          <p:nvPr/>
-        </p:nvSpPr>
-        <p:spPr>
-          <a:xfrm>
-            <a:off x="7380000" y="3167999"/>
-            <a:ext cx="4320000" cy="251999"/>
+              <a:t>LLM разбирает фразу, ответ проверяет каталог</a:t>
+            </a:r>
+          </a:p>
+        </p:txBody>
+      </p:sp>
+      <p:sp>
+        <p:nvSpPr>
+          <p:cNvPr id="29" name="TextBox 28"/>
+          <p:cNvSpPr txBox="1"/>
+          <p:nvPr/>
+        </p:nvSpPr>
+        <p:spPr>
+          <a:xfrm>
+            <a:off x="6156000" y="4266000"/>
+            <a:ext cx="3240000" cy="251999"/>
           </a:xfrm>
           <a:prstGeom prst="rect">
             <a:avLst/>
@@ -15441,27 +15883,27 @@
               </a:lnSpc>
             </a:pPr>
             <a:r>
-              <a:rPr sz="1200" b="0">
+              <a:rPr sz="1250" b="0">
                 <a:solidFill>
                   <a:srgbClr val="141B34"/>
                 </a:solidFill>
                 <a:latin typeface="Intro"/>
               </a:rPr>
-              <a:t>LLM нужна для хвоста</a:t>
-            </a:r>
-          </a:p>
-        </p:txBody>
-      </p:sp>
-      <p:sp>
-        <p:nvSpPr>
-          <p:cNvPr id="24" name="TextBox 23"/>
-          <p:cNvSpPr txBox="1"/>
-          <p:nvPr/>
-        </p:nvSpPr>
-        <p:spPr>
-          <a:xfrm>
-            <a:off x="7380000" y="3420000"/>
-            <a:ext cx="4320000" cy="576000"/>
+              <a:t>Перепутан смысл</a:t>
+            </a:r>
+          </a:p>
+        </p:txBody>
+      </p:sp>
+      <p:sp>
+        <p:nvSpPr>
+          <p:cNvPr id="30" name="TextBox 29"/>
+          <p:cNvSpPr txBox="1"/>
+          <p:nvPr/>
+        </p:nvSpPr>
+        <p:spPr>
+          <a:xfrm>
+            <a:off x="10872000" y="4157999"/>
+            <a:ext cx="864000" cy="396000"/>
           </a:xfrm>
           <a:prstGeom prst="rect">
             <a:avLst/>
@@ -15474,6 +15916,45 @@
           </a:bodyPr>
           <a:lstStyle/>
           <a:p>
+            <a:pPr algn="r">
+              <a:lnSpc>
+                <a:spcPct val="100000"/>
+              </a:lnSpc>
+            </a:pPr>
+            <a:r>
+              <a:rPr sz="2400" b="0">
+                <a:solidFill>
+                  <a:srgbClr val="FF8A3D"/>
+                </a:solidFill>
+                <a:latin typeface="Peace Sans"/>
+              </a:rPr>
+              <a:t>4</a:t>
+            </a:r>
+          </a:p>
+        </p:txBody>
+      </p:sp>
+      <p:sp>
+        <p:nvSpPr>
+          <p:cNvPr id="31" name="TextBox 30"/>
+          <p:cNvSpPr txBox="1"/>
+          <p:nvPr/>
+        </p:nvSpPr>
+        <p:spPr>
+          <a:xfrm>
+            <a:off x="6156000" y="4536000"/>
+            <a:ext cx="4680000" cy="324000"/>
+          </a:xfrm>
+          <a:prstGeom prst="rect">
+            <a:avLst/>
+          </a:prstGeom>
+          <a:noFill/>
+        </p:spPr>
+        <p:txBody>
+          <a:bodyPr wrap="square" lIns="0" rIns="0" tIns="0" bIns="0" anchor="t">
+            <a:spAutoFit/>
+          </a:bodyPr>
+          <a:lstStyle/>
+          <a:p>
             <a:pPr algn="l">
               <a:lnSpc>
                 <a:spcPct val="100000"/>
@@ -15482,49 +15963,64 @@
             <a:r>
               <a:rPr sz="1050" b="0">
                 <a:solidFill>
+                  <a:srgbClr val="3D5AFE"/>
+                </a:solidFill>
+                <a:latin typeface="Evolventa"/>
+              </a:rPr>
+              <a:t>«Какие выводы по дашборду?» запускал новый дашборд</a:t>
+            </a:r>
+          </a:p>
+        </p:txBody>
+      </p:sp>
+      <p:sp>
+        <p:nvSpPr>
+          <p:cNvPr id="32" name="TextBox 31"/>
+          <p:cNvSpPr txBox="1"/>
+          <p:nvPr/>
+        </p:nvSpPr>
+        <p:spPr>
+          <a:xfrm>
+            <a:off x="6156000" y="4788000"/>
+            <a:ext cx="5544000" cy="324000"/>
+          </a:xfrm>
+          <a:prstGeom prst="rect">
+            <a:avLst/>
+          </a:prstGeom>
+          <a:noFill/>
+        </p:spPr>
+        <p:txBody>
+          <a:bodyPr wrap="square" lIns="0" rIns="0" tIns="0" bIns="0" anchor="t">
+            <a:spAutoFit/>
+          </a:bodyPr>
+          <a:lstStyle/>
+          <a:p>
+            <a:pPr algn="l">
+              <a:lnSpc>
+                <a:spcPct val="100000"/>
+              </a:lnSpc>
+            </a:pPr>
+            <a:r>
+              <a:rPr sz="1050" b="0">
+                <a:solidFill>
                   <a:srgbClr val="141B34"/>
                 </a:solidFill>
                 <a:latin typeface="Evolventa"/>
               </a:rPr>
-              <a:t>треть новых формулировок правила не узнают, их разбирает модель</a:t>
-            </a:r>
-          </a:p>
-        </p:txBody>
-      </p:sp>
-      <p:pic>
-        <p:nvPicPr>
-          <p:cNvPr id="25" name="Picture 24" descr="i_lock_b.png"/>
-          <p:cNvPicPr>
-            <a:picLocks noChangeAspect="1"/>
-          </p:cNvPicPr>
-          <p:nvPr/>
-        </p:nvPicPr>
-        <p:blipFill>
-          <a:blip r:embed="rId5"/>
-          <a:stretch>
-            <a:fillRect/>
-          </a:stretch>
-        </p:blipFill>
-        <p:spPr>
-          <a:xfrm>
-            <a:off x="6948000" y="4212000"/>
-            <a:ext cx="306000" cy="306000"/>
-          </a:xfrm>
-          <a:prstGeom prst="rect">
-            <a:avLst/>
-          </a:prstGeom>
-        </p:spPr>
-      </p:pic>
-      <p:sp>
-        <p:nvSpPr>
-          <p:cNvPr id="26" name="TextBox 25"/>
-          <p:cNvSpPr txBox="1"/>
-          <p:nvPr/>
-        </p:nvSpPr>
-        <p:spPr>
-          <a:xfrm>
-            <a:off x="7380000" y="4193999"/>
-            <a:ext cx="4320000" cy="251999"/>
+              <a:t>бот показывает, как понял запрос, шаг отменяется одной фразой</a:t>
+            </a:r>
+          </a:p>
+        </p:txBody>
+      </p:sp>
+      <p:sp>
+        <p:nvSpPr>
+          <p:cNvPr id="33" name="TextBox 32"/>
+          <p:cNvSpPr txBox="1"/>
+          <p:nvPr/>
+        </p:nvSpPr>
+        <p:spPr>
+          <a:xfrm>
+            <a:off x="6156000" y="5256000"/>
+            <a:ext cx="3240000" cy="251999"/>
           </a:xfrm>
           <a:prstGeom prst="rect">
             <a:avLst/>
@@ -15543,27 +16039,27 @@
               </a:lnSpc>
             </a:pPr>
             <a:r>
-              <a:rPr sz="1200" b="0">
+              <a:rPr sz="1250" b="0">
                 <a:solidFill>
                   <a:srgbClr val="141B34"/>
                 </a:solidFill>
                 <a:latin typeface="Intro"/>
               </a:rPr>
-              <a:t>Модель внутри компании</a:t>
-            </a:r>
-          </a:p>
-        </p:txBody>
-      </p:sp>
-      <p:sp>
-        <p:nvSpPr>
-          <p:cNvPr id="27" name="TextBox 26"/>
-          <p:cNvSpPr txBox="1"/>
-          <p:nvPr/>
-        </p:nvSpPr>
-        <p:spPr>
-          <a:xfrm>
-            <a:off x="7380000" y="4446000"/>
-            <a:ext cx="4320000" cy="576000"/>
+              <a:t>Ложное совпадение</a:t>
+            </a:r>
+          </a:p>
+        </p:txBody>
+      </p:sp>
+      <p:sp>
+        <p:nvSpPr>
+          <p:cNvPr id="34" name="TextBox 33"/>
+          <p:cNvSpPr txBox="1"/>
+          <p:nvPr/>
+        </p:nvSpPr>
+        <p:spPr>
+          <a:xfrm>
+            <a:off x="10872000" y="5148000"/>
+            <a:ext cx="864000" cy="396000"/>
           </a:xfrm>
           <a:prstGeom prst="rect">
             <a:avLst/>
@@ -15576,6 +16072,45 @@
           </a:bodyPr>
           <a:lstStyle/>
           <a:p>
+            <a:pPr algn="r">
+              <a:lnSpc>
+                <a:spcPct val="100000"/>
+              </a:lnSpc>
+            </a:pPr>
+            <a:r>
+              <a:rPr sz="2400" b="0">
+                <a:solidFill>
+                  <a:srgbClr val="FF8A3D"/>
+                </a:solidFill>
+                <a:latin typeface="Peace Sans"/>
+              </a:rPr>
+              <a:t>1</a:t>
+            </a:r>
+          </a:p>
+        </p:txBody>
+      </p:sp>
+      <p:sp>
+        <p:nvSpPr>
+          <p:cNvPr id="35" name="TextBox 34"/>
+          <p:cNvSpPr txBox="1"/>
+          <p:nvPr/>
+        </p:nvSpPr>
+        <p:spPr>
+          <a:xfrm>
+            <a:off x="6156000" y="5526000"/>
+            <a:ext cx="4680000" cy="324000"/>
+          </a:xfrm>
+          <a:prstGeom prst="rect">
+            <a:avLst/>
+          </a:prstGeom>
+          <a:noFill/>
+        </p:spPr>
+        <p:txBody>
+          <a:bodyPr wrap="square" lIns="0" rIns="0" tIns="0" bIns="0" anchor="t">
+            <a:spAutoFit/>
+          </a:bodyPr>
+          <a:lstStyle/>
+          <a:p>
             <a:pPr algn="l">
               <a:lnSpc>
                 <a:spcPct val="100000"/>
@@ -15584,49 +16119,64 @@
             <a:r>
               <a:rPr sz="1050" b="0">
                 <a:solidFill>
+                  <a:srgbClr val="3D5AFE"/>
+                </a:solidFill>
+                <a:latin typeface="Evolventa"/>
+              </a:rPr>
+              <a:t>«супермаркетов» находило клиента «Маркет»</a:t>
+            </a:r>
+          </a:p>
+        </p:txBody>
+      </p:sp>
+      <p:sp>
+        <p:nvSpPr>
+          <p:cNvPr id="36" name="TextBox 35"/>
+          <p:cNvSpPr txBox="1"/>
+          <p:nvPr/>
+        </p:nvSpPr>
+        <p:spPr>
+          <a:xfrm>
+            <a:off x="6156000" y="5778000"/>
+            <a:ext cx="5544000" cy="324000"/>
+          </a:xfrm>
+          <a:prstGeom prst="rect">
+            <a:avLst/>
+          </a:prstGeom>
+          <a:noFill/>
+        </p:spPr>
+        <p:txBody>
+          <a:bodyPr wrap="square" lIns="0" rIns="0" tIns="0" bIns="0" anchor="t">
+            <a:spAutoFit/>
+          </a:bodyPr>
+          <a:lstStyle/>
+          <a:p>
+            <a:pPr algn="l">
+              <a:lnSpc>
+                <a:spcPct val="100000"/>
+              </a:lnSpc>
+            </a:pPr>
+            <a:r>
+              <a:rPr sz="1050" b="0">
+                <a:solidFill>
                   <a:srgbClr val="141B34"/>
                 </a:solidFill>
                 <a:latin typeface="Evolventa"/>
               </a:rPr>
-              <a:t>Ollama бесплатна и работает локально, данные не уходят наружу</a:t>
-            </a:r>
-          </a:p>
-        </p:txBody>
-      </p:sp>
-      <p:pic>
-        <p:nvPicPr>
-          <p:cNvPr id="28" name="Picture 27" descr="i_search_b.png"/>
-          <p:cNvPicPr>
-            <a:picLocks noChangeAspect="1"/>
-          </p:cNvPicPr>
-          <p:nvPr/>
-        </p:nvPicPr>
-        <p:blipFill>
-          <a:blip r:embed="rId6"/>
-          <a:stretch>
-            <a:fillRect/>
-          </a:stretch>
-        </p:blipFill>
-        <p:spPr>
-          <a:xfrm>
-            <a:off x="6948000" y="5238000"/>
-            <a:ext cx="306000" cy="306000"/>
-          </a:xfrm>
-          <a:prstGeom prst="rect">
-            <a:avLst/>
-          </a:prstGeom>
-        </p:spPr>
-      </p:pic>
-      <p:sp>
-        <p:nvSpPr>
-          <p:cNvPr id="29" name="TextBox 28"/>
-          <p:cNvSpPr txBox="1"/>
-          <p:nvPr/>
-        </p:nvSpPr>
-        <p:spPr>
-          <a:xfrm>
-            <a:off x="7380000" y="5219999"/>
-            <a:ext cx="4320000" cy="251999"/>
+              <a:t>поиск имен только по целым словам</a:t>
+            </a:r>
+          </a:p>
+        </p:txBody>
+      </p:sp>
+      <p:sp>
+        <p:nvSpPr>
+          <p:cNvPr id="37" name="TextBox 36"/>
+          <p:cNvSpPr txBox="1"/>
+          <p:nvPr/>
+        </p:nvSpPr>
+        <p:spPr>
+          <a:xfrm>
+            <a:off x="6156000" y="6066000"/>
+            <a:ext cx="5544000" cy="251999"/>
           </a:xfrm>
           <a:prstGeom prst="rect">
             <a:avLst/>
@@ -15645,59 +16195,20 @@
               </a:lnSpc>
             </a:pPr>
             <a:r>
-              <a:rPr sz="1200" b="0">
-                <a:solidFill>
-                  <a:srgbClr val="141B34"/>
+              <a:rPr sz="1050" b="0">
+                <a:solidFill>
+                  <a:srgbClr val="12A150"/>
                 </a:solidFill>
                 <a:latin typeface="Intro"/>
               </a:rPr>
-              <a:t>Ошибку видно сразу</a:t>
-            </a:r>
-          </a:p>
-        </p:txBody>
-      </p:sp>
-      <p:sp>
-        <p:nvSpPr>
-          <p:cNvPr id="30" name="TextBox 29"/>
-          <p:cNvSpPr txBox="1"/>
-          <p:nvPr/>
-        </p:nvSpPr>
-        <p:spPr>
-          <a:xfrm>
-            <a:off x="7380000" y="5472000"/>
-            <a:ext cx="4320000" cy="576000"/>
-          </a:xfrm>
-          <a:prstGeom prst="rect">
-            <a:avLst/>
-          </a:prstGeom>
-          <a:noFill/>
-        </p:spPr>
-        <p:txBody>
-          <a:bodyPr wrap="square" lIns="0" rIns="0" tIns="0" bIns="0" anchor="t">
-            <a:spAutoFit/>
-          </a:bodyPr>
-          <a:lstStyle/>
-          <a:p>
-            <a:pPr algn="l">
-              <a:lnSpc>
-                <a:spcPct val="100000"/>
-              </a:lnSpc>
-            </a:pPr>
-            <a:r>
-              <a:rPr sz="1050" b="0">
-                <a:solidFill>
-                  <a:srgbClr val="141B34"/>
-                </a:solidFill>
-                <a:latin typeface="Evolventa"/>
-              </a:rPr>
-              <a:t>бот показывает таблицу и SQL, менеджер видит, что понято</a:t>
-            </a:r>
-          </a:p>
-        </p:txBody>
-      </p:sp>
-      <p:sp>
-        <p:nvSpPr>
-          <p:cNvPr id="31" name="TextBox 30"/>
+              <a:t>Все 10 ошибок исправлены, теперь проходят 73 запроса из 73</a:t>
+            </a:r>
+          </a:p>
+        </p:txBody>
+      </p:sp>
+      <p:sp>
+        <p:nvSpPr>
+          <p:cNvPr id="38" name="TextBox 37"/>
           <p:cNvSpPr txBox="1"/>
           <p:nvPr/>
         </p:nvSpPr>
@@ -15729,14 +16240,14 @@
                 </a:solidFill>
                 <a:latin typeface="Evolventa"/>
               </a:rPr>
-              <a:t>Источники  [2] tests/eval_queries.py, наборы запросов кейса, перефразировок и слепой выборки</a:t>
-            </a:r>
-          </a:p>
-        </p:txBody>
-      </p:sp>
-      <p:sp>
-        <p:nvSpPr>
-          <p:cNvPr id="32" name="TextBox 31"/>
+              <a:t>Источники  [2] tests/eval_queries.py, 38 запросов кейса и 35 новых фраз в двух отложенных выборках</a:t>
+            </a:r>
+          </a:p>
+        </p:txBody>
+      </p:sp>
+      <p:sp>
+        <p:nvSpPr>
+          <p:cNvPr id="39" name="TextBox 38"/>
           <p:cNvSpPr txBox="1"/>
           <p:nvPr/>
         </p:nvSpPr>

--- a/sk-challenge-puzzle-bi-bot/presentation/Puzzle_BI_чат-бот.pptx
+++ b/sk-challenge-puzzle-bi-bot/presentation/Puzzle_BI_чат-бот.pptx
@@ -1124,7 +1124,7 @@
           <a:lstStyle/>
           <a:p>
             <a:r>
-              <a:t>Тайминг 40 секунд. Бот разбит на маленькие модули. Каталог, разбор текста, LLM, база, вычисления, диалог, хранилище и дашборд. Фронтенд без сборки, Plotly лежит в проекте, поэтому дашборд и экспорт работают без интернета.</a:t>
+              <a:t>Тайминг 50 секунд. Фраза проходит семь шагов: чат, диалог, разбор, каталог, база, вычисления и дашборд, каждый шаг отдельный модуль. Ответ приходит за 0,46 секунды: разбор занимает 2 миллисекунды, выгрузка 0,2 секунды. Дашборд хранится как состояние, поэтому сохранение, отмена и копия получаются почти бесплатно.</a:t>
             </a:r>
           </a:p>
         </p:txBody>
@@ -4781,7 +4781,7 @@
                 </a:solidFill>
                 <a:latin typeface="Evolventa"/>
               </a:rPr>
-              <a:t>github.com/alkornilovich/cases/tree/main/sk-challenge-puzzle-bi-bot</a:t>
+              <a:t>github.com/alkornilovich/Cases</a:t>
             </a:r>
           </a:p>
         </p:txBody>
@@ -9084,7 +9084,7 @@
                 </a:solidFill>
                 <a:latin typeface="Intro"/>
               </a:rPr>
-              <a:t>Семь небольших модулей на Python и чат без сборки фронтенда, запуск двумя командами</a:t>
+              <a:t>Семь шагов от фразы до дашборда, каждый отдельный модуль на Python, ответ приходит меньше чем за полсекунды</a:t>
             </a:r>
           </a:p>
         </p:txBody>
@@ -9098,11 +9098,11 @@
         <p:spPr>
           <a:xfrm>
             <a:off x="270000" y="1638000"/>
-            <a:ext cx="6336000" cy="4734000"/>
+            <a:ext cx="11646000" cy="2160000"/>
           </a:xfrm>
           <a:prstGeom prst="roundRect">
             <a:avLst>
-              <a:gd name="adj" fmla="val 3802"/>
+              <a:gd name="adj" fmla="val 8333"/>
             </a:avLst>
           </a:prstGeom>
           <a:solidFill>
@@ -9137,681 +9137,1856 @@
       </p:sp>
       <p:sp>
         <p:nvSpPr>
-          <p:cNvPr id="14" name="TextBox 13"/>
-          <p:cNvSpPr txBox="1"/>
-          <p:nvPr/>
-        </p:nvSpPr>
-        <p:spPr>
-          <a:xfrm>
-            <a:off x="468000" y="1782000"/>
-            <a:ext cx="5760000" cy="288000"/>
-          </a:xfrm>
-          <a:prstGeom prst="rect">
-            <a:avLst/>
-          </a:prstGeom>
-          <a:noFill/>
-        </p:spPr>
-        <p:txBody>
-          <a:bodyPr wrap="square" lIns="0" rIns="0" tIns="0" bIns="0" anchor="t">
-            <a:spAutoFit/>
-          </a:bodyPr>
-          <a:lstStyle/>
-          <a:p>
-            <a:pPr algn="l">
-              <a:lnSpc>
-                <a:spcPct val="100000"/>
-              </a:lnSpc>
-            </a:pPr>
-            <a:r>
-              <a:rPr sz="1400" b="0">
-                <a:solidFill>
-                  <a:srgbClr val="3D5AFE"/>
-                </a:solidFill>
-                <a:latin typeface="Intro"/>
-              </a:rPr>
-              <a:t>Модули</a:t>
-            </a:r>
-          </a:p>
-        </p:txBody>
-      </p:sp>
-      <p:sp>
-        <p:nvSpPr>
-          <p:cNvPr id="15" name="TextBox 14"/>
-          <p:cNvSpPr txBox="1"/>
-          <p:nvPr/>
-        </p:nvSpPr>
-        <p:spPr>
-          <a:xfrm>
-            <a:off x="468000" y="2160000"/>
-            <a:ext cx="1728000" cy="288000"/>
-          </a:xfrm>
-          <a:prstGeom prst="rect">
-            <a:avLst/>
-          </a:prstGeom>
-          <a:noFill/>
-        </p:spPr>
-        <p:txBody>
-          <a:bodyPr wrap="square" lIns="0" rIns="0" tIns="0" bIns="0" anchor="ctr">
-            <a:spAutoFit/>
-          </a:bodyPr>
-          <a:lstStyle/>
-          <a:p>
-            <a:pPr algn="l">
-              <a:lnSpc>
-                <a:spcPct val="100000"/>
-              </a:lnSpc>
-            </a:pPr>
-            <a:r>
-              <a:rPr sz="1200" b="0">
-                <a:solidFill>
-                  <a:srgbClr val="3D5AFE"/>
-                </a:solidFill>
-                <a:latin typeface="Intro"/>
-              </a:rPr>
-              <a:t>catalog.py</a:t>
-            </a:r>
-          </a:p>
-        </p:txBody>
-      </p:sp>
-      <p:sp>
-        <p:nvSpPr>
-          <p:cNvPr id="16" name="TextBox 15"/>
-          <p:cNvSpPr txBox="1"/>
-          <p:nvPr/>
-        </p:nvSpPr>
-        <p:spPr>
-          <a:xfrm>
-            <a:off x="2232000" y="2160000"/>
-            <a:ext cx="4248000" cy="288000"/>
-          </a:xfrm>
-          <a:prstGeom prst="rect">
-            <a:avLst/>
-          </a:prstGeom>
-          <a:noFill/>
-        </p:spPr>
-        <p:txBody>
-          <a:bodyPr wrap="square" lIns="0" rIns="0" tIns="0" bIns="0" anchor="ctr">
-            <a:spAutoFit/>
-          </a:bodyPr>
-          <a:lstStyle/>
-          <a:p>
-            <a:pPr algn="l">
-              <a:lnSpc>
-                <a:spcPct val="100000"/>
-              </a:lnSpc>
-            </a:pPr>
-            <a:r>
-              <a:rPr sz="1150" b="0">
-                <a:solidFill>
-                  <a:srgbClr val="141B34"/>
-                </a:solidFill>
-                <a:latin typeface="Evolventa"/>
-              </a:rPr>
-              <a:t>семантический слой, разрезы, метрики, словари</a:t>
-            </a:r>
-          </a:p>
-        </p:txBody>
-      </p:sp>
-      <p:sp>
-        <p:nvSpPr>
-          <p:cNvPr id="17" name="TextBox 16"/>
-          <p:cNvSpPr txBox="1"/>
-          <p:nvPr/>
-        </p:nvSpPr>
-        <p:spPr>
-          <a:xfrm>
-            <a:off x="468000" y="2664000"/>
-            <a:ext cx="1728000" cy="288000"/>
-          </a:xfrm>
-          <a:prstGeom prst="rect">
-            <a:avLst/>
-          </a:prstGeom>
-          <a:noFill/>
-        </p:spPr>
-        <p:txBody>
-          <a:bodyPr wrap="square" lIns="0" rIns="0" tIns="0" bIns="0" anchor="ctr">
-            <a:spAutoFit/>
-          </a:bodyPr>
-          <a:lstStyle/>
-          <a:p>
-            <a:pPr algn="l">
-              <a:lnSpc>
-                <a:spcPct val="100000"/>
-              </a:lnSpc>
-            </a:pPr>
-            <a:r>
-              <a:rPr sz="1200" b="0">
-                <a:solidFill>
-                  <a:srgbClr val="3D5AFE"/>
-                </a:solidFill>
-                <a:latin typeface="Intro"/>
-              </a:rPr>
-              <a:t>nlu.py</a:t>
-            </a:r>
-          </a:p>
-        </p:txBody>
-      </p:sp>
-      <p:sp>
-        <p:nvSpPr>
-          <p:cNvPr id="18" name="TextBox 17"/>
-          <p:cNvSpPr txBox="1"/>
-          <p:nvPr/>
-        </p:nvSpPr>
-        <p:spPr>
-          <a:xfrm>
-            <a:off x="2232000" y="2664000"/>
-            <a:ext cx="4248000" cy="288000"/>
-          </a:xfrm>
-          <a:prstGeom prst="rect">
-            <a:avLst/>
-          </a:prstGeom>
-          <a:noFill/>
-        </p:spPr>
-        <p:txBody>
-          <a:bodyPr wrap="square" lIns="0" rIns="0" tIns="0" bIns="0" anchor="ctr">
-            <a:spAutoFit/>
-          </a:bodyPr>
-          <a:lstStyle/>
-          <a:p>
-            <a:pPr algn="l">
-              <a:lnSpc>
-                <a:spcPct val="100000"/>
-              </a:lnSpc>
-            </a:pPr>
-            <a:r>
-              <a:rPr sz="1150" b="0">
-                <a:solidFill>
-                  <a:srgbClr val="141B34"/>
-                </a:solidFill>
-                <a:latin typeface="Evolventa"/>
-              </a:rPr>
-              <a:t>разбор русского текста в команду, правила</a:t>
-            </a:r>
-          </a:p>
-        </p:txBody>
-      </p:sp>
-      <p:sp>
-        <p:nvSpPr>
-          <p:cNvPr id="19" name="TextBox 18"/>
-          <p:cNvSpPr txBox="1"/>
-          <p:nvPr/>
-        </p:nvSpPr>
-        <p:spPr>
-          <a:xfrm>
-            <a:off x="468000" y="3168000"/>
-            <a:ext cx="1728000" cy="288000"/>
-          </a:xfrm>
-          <a:prstGeom prst="rect">
-            <a:avLst/>
-          </a:prstGeom>
-          <a:noFill/>
-        </p:spPr>
-        <p:txBody>
-          <a:bodyPr wrap="square" lIns="0" rIns="0" tIns="0" bIns="0" anchor="ctr">
-            <a:spAutoFit/>
-          </a:bodyPr>
-          <a:lstStyle/>
-          <a:p>
-            <a:pPr algn="l">
-              <a:lnSpc>
-                <a:spcPct val="100000"/>
-              </a:lnSpc>
-            </a:pPr>
-            <a:r>
-              <a:rPr sz="1200" b="0">
-                <a:solidFill>
-                  <a:srgbClr val="3D5AFE"/>
-                </a:solidFill>
-                <a:latin typeface="Intro"/>
-              </a:rPr>
-              <a:t>llm.py</a:t>
-            </a:r>
-          </a:p>
-        </p:txBody>
-      </p:sp>
-      <p:sp>
-        <p:nvSpPr>
-          <p:cNvPr id="20" name="TextBox 19"/>
-          <p:cNvSpPr txBox="1"/>
-          <p:nvPr/>
-        </p:nvSpPr>
-        <p:spPr>
-          <a:xfrm>
-            <a:off x="2232000" y="3168000"/>
-            <a:ext cx="4248000" cy="288000"/>
-          </a:xfrm>
-          <a:prstGeom prst="rect">
-            <a:avLst/>
-          </a:prstGeom>
-          <a:noFill/>
-        </p:spPr>
-        <p:txBody>
-          <a:bodyPr wrap="square" lIns="0" rIns="0" tIns="0" bIns="0" anchor="ctr">
-            <a:spAutoFit/>
-          </a:bodyPr>
-          <a:lstStyle/>
-          <a:p>
-            <a:pPr algn="l">
-              <a:lnSpc>
-                <a:spcPct val="100000"/>
-              </a:lnSpc>
-            </a:pPr>
-            <a:r>
-              <a:rPr sz="1150" b="0">
-                <a:solidFill>
-                  <a:srgbClr val="141B34"/>
-                </a:solidFill>
-                <a:latin typeface="Evolventa"/>
-              </a:rPr>
-              <a:t>бесплатная LLM, ответ проверяется по каталогу</a:t>
-            </a:r>
-          </a:p>
-        </p:txBody>
-      </p:sp>
-      <p:sp>
-        <p:nvSpPr>
-          <p:cNvPr id="21" name="TextBox 20"/>
-          <p:cNvSpPr txBox="1"/>
-          <p:nvPr/>
-        </p:nvSpPr>
-        <p:spPr>
-          <a:xfrm>
-            <a:off x="468000" y="3672000"/>
-            <a:ext cx="1728000" cy="288000"/>
-          </a:xfrm>
-          <a:prstGeom prst="rect">
-            <a:avLst/>
-          </a:prstGeom>
-          <a:noFill/>
-        </p:spPr>
-        <p:txBody>
-          <a:bodyPr wrap="square" lIns="0" rIns="0" tIns="0" bIns="0" anchor="ctr">
-            <a:spAutoFit/>
-          </a:bodyPr>
-          <a:lstStyle/>
-          <a:p>
-            <a:pPr algn="l">
-              <a:lnSpc>
-                <a:spcPct val="100000"/>
-              </a:lnSpc>
-            </a:pPr>
-            <a:r>
-              <a:rPr sz="1200" b="0">
-                <a:solidFill>
-                  <a:srgbClr val="3D5AFE"/>
-                </a:solidFill>
-                <a:latin typeface="Intro"/>
-              </a:rPr>
-              <a:t>db.py</a:t>
-            </a:r>
-          </a:p>
-        </p:txBody>
-      </p:sp>
-      <p:sp>
-        <p:nvSpPr>
-          <p:cNvPr id="22" name="TextBox 21"/>
-          <p:cNvSpPr txBox="1"/>
-          <p:nvPr/>
-        </p:nvSpPr>
-        <p:spPr>
-          <a:xfrm>
-            <a:off x="2232000" y="3672000"/>
-            <a:ext cx="4248000" cy="288000"/>
-          </a:xfrm>
-          <a:prstGeom prst="rect">
-            <a:avLst/>
-          </a:prstGeom>
-          <a:noFill/>
-        </p:spPr>
-        <p:txBody>
-          <a:bodyPr wrap="square" lIns="0" rIns="0" tIns="0" bIns="0" anchor="ctr">
-            <a:spAutoFit/>
-          </a:bodyPr>
-          <a:lstStyle/>
-          <a:p>
-            <a:pPr algn="l">
-              <a:lnSpc>
-                <a:spcPct val="100000"/>
-              </a:lnSpc>
-            </a:pPr>
-            <a:r>
-              <a:rPr sz="1150" b="0">
-                <a:solidFill>
-                  <a:srgbClr val="141B34"/>
-                </a:solidFill>
-                <a:latin typeface="Evolventa"/>
-              </a:rPr>
-              <a:t>база только на чтение, сборка SQL</a:t>
-            </a:r>
-          </a:p>
-        </p:txBody>
-      </p:sp>
-      <p:sp>
-        <p:nvSpPr>
-          <p:cNvPr id="23" name="TextBox 22"/>
-          <p:cNvSpPr txBox="1"/>
-          <p:nvPr/>
-        </p:nvSpPr>
-        <p:spPr>
-          <a:xfrm>
-            <a:off x="468000" y="4176000"/>
-            <a:ext cx="1728000" cy="288000"/>
-          </a:xfrm>
-          <a:prstGeom prst="rect">
-            <a:avLst/>
-          </a:prstGeom>
-          <a:noFill/>
-        </p:spPr>
-        <p:txBody>
-          <a:bodyPr wrap="square" lIns="0" rIns="0" tIns="0" bIns="0" anchor="ctr">
-            <a:spAutoFit/>
-          </a:bodyPr>
-          <a:lstStyle/>
-          <a:p>
-            <a:pPr algn="l">
-              <a:lnSpc>
-                <a:spcPct val="100000"/>
-              </a:lnSpc>
-            </a:pPr>
-            <a:r>
-              <a:rPr sz="1200" b="0">
-                <a:solidFill>
-                  <a:srgbClr val="3D5AFE"/>
-                </a:solidFill>
-                <a:latin typeface="Intro"/>
-              </a:rPr>
-              <a:t>compute.py</a:t>
-            </a:r>
-          </a:p>
-        </p:txBody>
-      </p:sp>
-      <p:sp>
-        <p:nvSpPr>
-          <p:cNvPr id="24" name="TextBox 23"/>
-          <p:cNvSpPr txBox="1"/>
-          <p:nvPr/>
-        </p:nvSpPr>
-        <p:spPr>
-          <a:xfrm>
-            <a:off x="2232000" y="4176000"/>
-            <a:ext cx="4248000" cy="288000"/>
-          </a:xfrm>
-          <a:prstGeom prst="rect">
-            <a:avLst/>
-          </a:prstGeom>
-          <a:noFill/>
-        </p:spPr>
-        <p:txBody>
-          <a:bodyPr wrap="square" lIns="0" rIns="0" tIns="0" bIns="0" anchor="ctr">
-            <a:spAutoFit/>
-          </a:bodyPr>
-          <a:lstStyle/>
-          <a:p>
-            <a:pPr algn="l">
-              <a:lnSpc>
-                <a:spcPct val="100000"/>
-              </a:lnSpc>
-            </a:pPr>
-            <a:r>
-              <a:rPr sz="1150" b="0">
-                <a:solidFill>
-                  <a:srgbClr val="141B34"/>
-                </a:solidFill>
-                <a:latin typeface="Evolventa"/>
-              </a:rPr>
-              <a:t>колонки, доли, динамика, накопительный итог</a:t>
-            </a:r>
-          </a:p>
-        </p:txBody>
-      </p:sp>
-      <p:sp>
-        <p:nvSpPr>
-          <p:cNvPr id="25" name="TextBox 24"/>
-          <p:cNvSpPr txBox="1"/>
-          <p:nvPr/>
-        </p:nvSpPr>
-        <p:spPr>
-          <a:xfrm>
-            <a:off x="468000" y="4680000"/>
-            <a:ext cx="1728000" cy="288000"/>
-          </a:xfrm>
-          <a:prstGeom prst="rect">
-            <a:avLst/>
-          </a:prstGeom>
-          <a:noFill/>
-        </p:spPr>
-        <p:txBody>
-          <a:bodyPr wrap="square" lIns="0" rIns="0" tIns="0" bIns="0" anchor="ctr">
-            <a:spAutoFit/>
-          </a:bodyPr>
-          <a:lstStyle/>
-          <a:p>
-            <a:pPr algn="l">
-              <a:lnSpc>
-                <a:spcPct val="100000"/>
-              </a:lnSpc>
-            </a:pPr>
-            <a:r>
-              <a:rPr sz="1200" b="0">
-                <a:solidFill>
-                  <a:srgbClr val="3D5AFE"/>
-                </a:solidFill>
-                <a:latin typeface="Intro"/>
-              </a:rPr>
-              <a:t>bot.py</a:t>
-            </a:r>
-          </a:p>
-        </p:txBody>
-      </p:sp>
-      <p:sp>
-        <p:nvSpPr>
-          <p:cNvPr id="26" name="TextBox 25"/>
-          <p:cNvSpPr txBox="1"/>
-          <p:nvPr/>
-        </p:nvSpPr>
-        <p:spPr>
-          <a:xfrm>
-            <a:off x="2232000" y="4680000"/>
-            <a:ext cx="4248000" cy="288000"/>
-          </a:xfrm>
-          <a:prstGeom prst="rect">
-            <a:avLst/>
-          </a:prstGeom>
-          <a:noFill/>
-        </p:spPr>
-        <p:txBody>
-          <a:bodyPr wrap="square" lIns="0" rIns="0" tIns="0" bIns="0" anchor="ctr">
-            <a:spAutoFit/>
-          </a:bodyPr>
-          <a:lstStyle/>
-          <a:p>
-            <a:pPr algn="l">
-              <a:lnSpc>
-                <a:spcPct val="100000"/>
-              </a:lnSpc>
-            </a:pPr>
-            <a:r>
-              <a:rPr sz="1150" b="0">
-                <a:solidFill>
-                  <a:srgbClr val="141B34"/>
-                </a:solidFill>
-                <a:latin typeface="Evolventa"/>
-              </a:rPr>
-              <a:t>диалог, состояние дашборда, резюме</a:t>
-            </a:r>
-          </a:p>
-        </p:txBody>
-      </p:sp>
-      <p:sp>
-        <p:nvSpPr>
-          <p:cNvPr id="27" name="TextBox 26"/>
-          <p:cNvSpPr txBox="1"/>
-          <p:nvPr/>
-        </p:nvSpPr>
-        <p:spPr>
-          <a:xfrm>
-            <a:off x="468000" y="5184000"/>
-            <a:ext cx="1728000" cy="288000"/>
-          </a:xfrm>
-          <a:prstGeom prst="rect">
-            <a:avLst/>
-          </a:prstGeom>
-          <a:noFill/>
-        </p:spPr>
-        <p:txBody>
-          <a:bodyPr wrap="square" lIns="0" rIns="0" tIns="0" bIns="0" anchor="ctr">
-            <a:spAutoFit/>
-          </a:bodyPr>
-          <a:lstStyle/>
-          <a:p>
-            <a:pPr algn="l">
-              <a:lnSpc>
-                <a:spcPct val="100000"/>
-              </a:lnSpc>
-            </a:pPr>
-            <a:r>
-              <a:rPr sz="1200" b="0">
-                <a:solidFill>
-                  <a:srgbClr val="3D5AFE"/>
-                </a:solidFill>
-                <a:latin typeface="Intro"/>
-              </a:rPr>
-              <a:t>store.py</a:t>
-            </a:r>
-          </a:p>
-        </p:txBody>
-      </p:sp>
-      <p:sp>
-        <p:nvSpPr>
-          <p:cNvPr id="28" name="TextBox 27"/>
-          <p:cNvSpPr txBox="1"/>
-          <p:nvPr/>
-        </p:nvSpPr>
-        <p:spPr>
-          <a:xfrm>
-            <a:off x="2232000" y="5184000"/>
-            <a:ext cx="4248000" cy="288000"/>
-          </a:xfrm>
-          <a:prstGeom prst="rect">
-            <a:avLst/>
-          </a:prstGeom>
-          <a:noFill/>
-        </p:spPr>
-        <p:txBody>
-          <a:bodyPr wrap="square" lIns="0" rIns="0" tIns="0" bIns="0" anchor="ctr">
-            <a:spAutoFit/>
-          </a:bodyPr>
-          <a:lstStyle/>
-          <a:p>
-            <a:pPr algn="l">
-              <a:lnSpc>
-                <a:spcPct val="100000"/>
-              </a:lnSpc>
-            </a:pPr>
-            <a:r>
-              <a:rPr sz="1150" b="0">
-                <a:solidFill>
-                  <a:srgbClr val="141B34"/>
-                </a:solidFill>
-                <a:latin typeface="Evolventa"/>
-              </a:rPr>
-              <a:t>сохранение, версии, поиск, копии</a:t>
-            </a:r>
-          </a:p>
-        </p:txBody>
-      </p:sp>
-      <p:sp>
-        <p:nvSpPr>
-          <p:cNvPr id="29" name="TextBox 28"/>
-          <p:cNvSpPr txBox="1"/>
-          <p:nvPr/>
-        </p:nvSpPr>
-        <p:spPr>
-          <a:xfrm>
-            <a:off x="468000" y="5688000"/>
-            <a:ext cx="1728000" cy="288000"/>
-          </a:xfrm>
-          <a:prstGeom prst="rect">
-            <a:avLst/>
-          </a:prstGeom>
-          <a:noFill/>
-        </p:spPr>
-        <p:txBody>
-          <a:bodyPr wrap="square" lIns="0" rIns="0" tIns="0" bIns="0" anchor="ctr">
-            <a:spAutoFit/>
-          </a:bodyPr>
-          <a:lstStyle/>
-          <a:p>
-            <a:pPr algn="l">
-              <a:lnSpc>
-                <a:spcPct val="100000"/>
-              </a:lnSpc>
-            </a:pPr>
-            <a:r>
-              <a:rPr sz="1200" b="0">
-                <a:solidFill>
-                  <a:srgbClr val="3D5AFE"/>
-                </a:solidFill>
-                <a:latin typeface="Intro"/>
-              </a:rPr>
-              <a:t>dashboard.js</a:t>
-            </a:r>
-          </a:p>
-        </p:txBody>
-      </p:sp>
-      <p:sp>
-        <p:nvSpPr>
-          <p:cNvPr id="30" name="TextBox 29"/>
-          <p:cNvSpPr txBox="1"/>
-          <p:nvPr/>
-        </p:nvSpPr>
-        <p:spPr>
-          <a:xfrm>
-            <a:off x="2232000" y="5688000"/>
-            <a:ext cx="4248000" cy="288000"/>
-          </a:xfrm>
-          <a:prstGeom prst="rect">
-            <a:avLst/>
-          </a:prstGeom>
-          <a:noFill/>
-        </p:spPr>
-        <p:txBody>
-          <a:bodyPr wrap="square" lIns="0" rIns="0" tIns="0" bIns="0" anchor="ctr">
-            <a:spAutoFit/>
-          </a:bodyPr>
-          <a:lstStyle/>
-          <a:p>
-            <a:pPr algn="l">
-              <a:lnSpc>
-                <a:spcPct val="100000"/>
-              </a:lnSpc>
-            </a:pPr>
-            <a:r>
-              <a:rPr sz="1150" b="0">
-                <a:solidFill>
-                  <a:srgbClr val="141B34"/>
-                </a:solidFill>
-                <a:latin typeface="Evolventa"/>
-              </a:rPr>
-              <a:t>KPI, фильтры, каскад, 4 графика Plotly</a:t>
-            </a:r>
-          </a:p>
-        </p:txBody>
-      </p:sp>
-      <p:sp>
-        <p:nvSpPr>
-          <p:cNvPr id="31" name="Rounded Rectangle 30"/>
+          <p:cNvPr id="14" name="Rounded Rectangle 13"/>
           <p:cNvSpPr/>
           <p:nvPr/>
         </p:nvSpPr>
         <p:spPr>
           <a:xfrm>
-            <a:off x="6750000" y="1638000"/>
-            <a:ext cx="5166000" cy="4734000"/>
+            <a:off x="792000" y="1800000"/>
+            <a:ext cx="576000" cy="576000"/>
           </a:xfrm>
           <a:prstGeom prst="roundRect">
             <a:avLst>
-              <a:gd name="adj" fmla="val 3802"/>
+              <a:gd name="adj" fmla="val 50000"/>
+            </a:avLst>
+          </a:prstGeom>
+          <a:solidFill>
+            <a:srgbClr val="E8ECFF"/>
+          </a:solidFill>
+          <a:ln>
+            <a:noFill/>
+          </a:ln>
+          <a:effectLst/>
+        </p:spPr>
+        <p:style>
+          <a:lnRef idx="1">
+            <a:schemeClr val="accent1"/>
+          </a:lnRef>
+          <a:fillRef idx="3">
+            <a:schemeClr val="accent1"/>
+          </a:fillRef>
+          <a:effectRef idx="2">
+            <a:schemeClr val="accent1"/>
+          </a:effectRef>
+          <a:fontRef idx="minor">
+            <a:schemeClr val="lt1"/>
+          </a:fontRef>
+        </p:style>
+        <p:txBody>
+          <a:bodyPr rtlCol="0" anchor="ctr"/>
+          <a:lstStyle/>
+          <a:p>
+            <a:pPr algn="ctr"/>
+          </a:p>
+        </p:txBody>
+      </p:sp>
+      <p:pic>
+        <p:nvPicPr>
+          <p:cNvPr id="15" name="Picture 14" descr="i_message-square_b.png"/>
+          <p:cNvPicPr>
+            <a:picLocks noChangeAspect="1"/>
+          </p:cNvPicPr>
+          <p:nvPr/>
+        </p:nvPicPr>
+        <p:blipFill>
+          <a:blip r:embed="rId2"/>
+          <a:stretch>
+            <a:fillRect/>
+          </a:stretch>
+        </p:blipFill>
+        <p:spPr>
+          <a:xfrm>
+            <a:off x="917999" y="1925999"/>
+            <a:ext cx="324000" cy="324000"/>
+          </a:xfrm>
+          <a:prstGeom prst="rect">
+            <a:avLst/>
+          </a:prstGeom>
+        </p:spPr>
+      </p:pic>
+      <p:sp>
+        <p:nvSpPr>
+          <p:cNvPr id="16" name="TextBox 15"/>
+          <p:cNvSpPr txBox="1"/>
+          <p:nvPr/>
+        </p:nvSpPr>
+        <p:spPr>
+          <a:xfrm>
+            <a:off x="413999" y="2466000"/>
+            <a:ext cx="1332000" cy="251999"/>
+          </a:xfrm>
+          <a:prstGeom prst="rect">
+            <a:avLst/>
+          </a:prstGeom>
+          <a:noFill/>
+        </p:spPr>
+        <p:txBody>
+          <a:bodyPr wrap="square" lIns="0" rIns="0" tIns="0" bIns="0" anchor="t">
+            <a:spAutoFit/>
+          </a:bodyPr>
+          <a:lstStyle/>
+          <a:p>
+            <a:pPr algn="ctr">
+              <a:lnSpc>
+                <a:spcPct val="100000"/>
+              </a:lnSpc>
+            </a:pPr>
+            <a:r>
+              <a:rPr sz="1250" b="0">
+                <a:solidFill>
+                  <a:srgbClr val="141B34"/>
+                </a:solidFill>
+                <a:latin typeface="Intro"/>
+              </a:rPr>
+              <a:t>Чат</a:t>
+            </a:r>
+          </a:p>
+        </p:txBody>
+      </p:sp>
+      <p:sp>
+        <p:nvSpPr>
+          <p:cNvPr id="17" name="TextBox 16"/>
+          <p:cNvSpPr txBox="1"/>
+          <p:nvPr/>
+        </p:nvSpPr>
+        <p:spPr>
+          <a:xfrm>
+            <a:off x="413999" y="2700000"/>
+            <a:ext cx="1332000" cy="216000"/>
+          </a:xfrm>
+          <a:prstGeom prst="rect">
+            <a:avLst/>
+          </a:prstGeom>
+          <a:noFill/>
+        </p:spPr>
+        <p:txBody>
+          <a:bodyPr wrap="square" lIns="0" rIns="0" tIns="0" bIns="0" anchor="t">
+            <a:spAutoFit/>
+          </a:bodyPr>
+          <a:lstStyle/>
+          <a:p>
+            <a:pPr algn="ctr">
+              <a:lnSpc>
+                <a:spcPct val="100000"/>
+              </a:lnSpc>
+            </a:pPr>
+            <a:r>
+              <a:rPr sz="950" b="0">
+                <a:solidFill>
+                  <a:srgbClr val="3D5AFE"/>
+                </a:solidFill>
+                <a:latin typeface="Menlo"/>
+              </a:rPr>
+              <a:t>index.html</a:t>
+            </a:r>
+          </a:p>
+        </p:txBody>
+      </p:sp>
+      <p:sp>
+        <p:nvSpPr>
+          <p:cNvPr id="18" name="TextBox 17"/>
+          <p:cNvSpPr txBox="1"/>
+          <p:nvPr/>
+        </p:nvSpPr>
+        <p:spPr>
+          <a:xfrm>
+            <a:off x="413999" y="2934000"/>
+            <a:ext cx="1332000" cy="503999"/>
+          </a:xfrm>
+          <a:prstGeom prst="rect">
+            <a:avLst/>
+          </a:prstGeom>
+          <a:noFill/>
+        </p:spPr>
+        <p:txBody>
+          <a:bodyPr wrap="square" lIns="0" rIns="0" tIns="0" bIns="0" anchor="t">
+            <a:spAutoFit/>
+          </a:bodyPr>
+          <a:lstStyle/>
+          <a:p>
+            <a:pPr algn="ctr">
+              <a:lnSpc>
+                <a:spcPct val="105000"/>
+              </a:lnSpc>
+            </a:pPr>
+            <a:r>
+              <a:rPr sz="1000" b="0">
+                <a:solidFill>
+                  <a:srgbClr val="141B34"/>
+                </a:solidFill>
+                <a:latin typeface="Evolventa"/>
+              </a:rPr>
+              <a:t>вопрос и ответы в браузере</a:t>
+            </a:r>
+          </a:p>
+        </p:txBody>
+      </p:sp>
+      <p:sp>
+        <p:nvSpPr>
+          <p:cNvPr id="19" name="Rounded Rectangle 18"/>
+          <p:cNvSpPr/>
+          <p:nvPr/>
+        </p:nvSpPr>
+        <p:spPr>
+          <a:xfrm>
+            <a:off x="540000" y="3438000"/>
+            <a:ext cx="1080000" cy="216000"/>
+          </a:xfrm>
+          <a:prstGeom prst="roundRect">
+            <a:avLst>
+              <a:gd name="adj" fmla="val 50000"/>
+            </a:avLst>
+          </a:prstGeom>
+          <a:solidFill>
+            <a:srgbClr val="F0F0EE"/>
+          </a:solidFill>
+          <a:ln>
+            <a:noFill/>
+          </a:ln>
+          <a:effectLst/>
+        </p:spPr>
+        <p:style>
+          <a:lnRef idx="1">
+            <a:schemeClr val="accent1"/>
+          </a:lnRef>
+          <a:fillRef idx="3">
+            <a:schemeClr val="accent1"/>
+          </a:fillRef>
+          <a:effectRef idx="2">
+            <a:schemeClr val="accent1"/>
+          </a:effectRef>
+          <a:fontRef idx="minor">
+            <a:schemeClr val="lt1"/>
+          </a:fontRef>
+        </p:style>
+        <p:txBody>
+          <a:bodyPr rtlCol="0" anchor="ctr" lIns="36000" rIns="36000" tIns="0" bIns="0"/>
+          <a:lstStyle/>
+          <a:p>
+            <a:pPr algn="ctr"/>
+            <a:r>
+              <a:rPr sz="900">
+                <a:solidFill>
+                  <a:srgbClr val="141B34"/>
+                </a:solidFill>
+                <a:latin typeface="Intro"/>
+              </a:rPr>
+              <a:t>FastAPI</a:t>
+            </a:r>
+          </a:p>
+        </p:txBody>
+      </p:sp>
+      <p:pic>
+        <p:nvPicPr>
+          <p:cNvPr id="20" name="Picture 19" descr="i_arrow-right_o.png"/>
+          <p:cNvPicPr>
+            <a:picLocks noChangeAspect="1"/>
+          </p:cNvPicPr>
+          <p:nvPr/>
+        </p:nvPicPr>
+        <p:blipFill>
+          <a:blip r:embed="rId3"/>
+          <a:stretch>
+            <a:fillRect/>
+          </a:stretch>
+        </p:blipFill>
+        <p:spPr>
+          <a:xfrm>
+            <a:off x="1717199" y="1962000"/>
+            <a:ext cx="251999" cy="251999"/>
+          </a:xfrm>
+          <a:prstGeom prst="rect">
+            <a:avLst/>
+          </a:prstGeom>
+        </p:spPr>
+      </p:pic>
+      <p:sp>
+        <p:nvSpPr>
+          <p:cNvPr id="21" name="Rounded Rectangle 20"/>
+          <p:cNvSpPr/>
+          <p:nvPr/>
+        </p:nvSpPr>
+        <p:spPr>
+          <a:xfrm>
+            <a:off x="2412000" y="1800000"/>
+            <a:ext cx="576000" cy="576000"/>
+          </a:xfrm>
+          <a:prstGeom prst="roundRect">
+            <a:avLst>
+              <a:gd name="adj" fmla="val 50000"/>
+            </a:avLst>
+          </a:prstGeom>
+          <a:solidFill>
+            <a:srgbClr val="E8ECFF"/>
+          </a:solidFill>
+          <a:ln>
+            <a:noFill/>
+          </a:ln>
+          <a:effectLst/>
+        </p:spPr>
+        <p:style>
+          <a:lnRef idx="1">
+            <a:schemeClr val="accent1"/>
+          </a:lnRef>
+          <a:fillRef idx="3">
+            <a:schemeClr val="accent1"/>
+          </a:fillRef>
+          <a:effectRef idx="2">
+            <a:schemeClr val="accent1"/>
+          </a:effectRef>
+          <a:fontRef idx="minor">
+            <a:schemeClr val="lt1"/>
+          </a:fontRef>
+        </p:style>
+        <p:txBody>
+          <a:bodyPr rtlCol="0" anchor="ctr"/>
+          <a:lstStyle/>
+          <a:p>
+            <a:pPr algn="ctr"/>
+          </a:p>
+        </p:txBody>
+      </p:sp>
+      <p:pic>
+        <p:nvPicPr>
+          <p:cNvPr id="22" name="Picture 21" descr="i_bot_b.png"/>
+          <p:cNvPicPr>
+            <a:picLocks noChangeAspect="1"/>
+          </p:cNvPicPr>
+          <p:nvPr/>
+        </p:nvPicPr>
+        <p:blipFill>
+          <a:blip r:embed="rId4"/>
+          <a:stretch>
+            <a:fillRect/>
+          </a:stretch>
+        </p:blipFill>
+        <p:spPr>
+          <a:xfrm>
+            <a:off x="2538000" y="1925999"/>
+            <a:ext cx="324000" cy="324000"/>
+          </a:xfrm>
+          <a:prstGeom prst="rect">
+            <a:avLst/>
+          </a:prstGeom>
+        </p:spPr>
+      </p:pic>
+      <p:sp>
+        <p:nvSpPr>
+          <p:cNvPr id="23" name="TextBox 22"/>
+          <p:cNvSpPr txBox="1"/>
+          <p:nvPr/>
+        </p:nvSpPr>
+        <p:spPr>
+          <a:xfrm>
+            <a:off x="2034000" y="2466000"/>
+            <a:ext cx="1332000" cy="251999"/>
+          </a:xfrm>
+          <a:prstGeom prst="rect">
+            <a:avLst/>
+          </a:prstGeom>
+          <a:noFill/>
+        </p:spPr>
+        <p:txBody>
+          <a:bodyPr wrap="square" lIns="0" rIns="0" tIns="0" bIns="0" anchor="t">
+            <a:spAutoFit/>
+          </a:bodyPr>
+          <a:lstStyle/>
+          <a:p>
+            <a:pPr algn="ctr">
+              <a:lnSpc>
+                <a:spcPct val="100000"/>
+              </a:lnSpc>
+            </a:pPr>
+            <a:r>
+              <a:rPr sz="1250" b="0">
+                <a:solidFill>
+                  <a:srgbClr val="141B34"/>
+                </a:solidFill>
+                <a:latin typeface="Intro"/>
+              </a:rPr>
+              <a:t>Диалог</a:t>
+            </a:r>
+          </a:p>
+        </p:txBody>
+      </p:sp>
+      <p:sp>
+        <p:nvSpPr>
+          <p:cNvPr id="24" name="TextBox 23"/>
+          <p:cNvSpPr txBox="1"/>
+          <p:nvPr/>
+        </p:nvSpPr>
+        <p:spPr>
+          <a:xfrm>
+            <a:off x="2034000" y="2700000"/>
+            <a:ext cx="1332000" cy="216000"/>
+          </a:xfrm>
+          <a:prstGeom prst="rect">
+            <a:avLst/>
+          </a:prstGeom>
+          <a:noFill/>
+        </p:spPr>
+        <p:txBody>
+          <a:bodyPr wrap="square" lIns="0" rIns="0" tIns="0" bIns="0" anchor="t">
+            <a:spAutoFit/>
+          </a:bodyPr>
+          <a:lstStyle/>
+          <a:p>
+            <a:pPr algn="ctr">
+              <a:lnSpc>
+                <a:spcPct val="100000"/>
+              </a:lnSpc>
+            </a:pPr>
+            <a:r>
+              <a:rPr sz="950" b="0">
+                <a:solidFill>
+                  <a:srgbClr val="3D5AFE"/>
+                </a:solidFill>
+                <a:latin typeface="Menlo"/>
+              </a:rPr>
+              <a:t>bot.py</a:t>
+            </a:r>
+          </a:p>
+        </p:txBody>
+      </p:sp>
+      <p:sp>
+        <p:nvSpPr>
+          <p:cNvPr id="25" name="TextBox 24"/>
+          <p:cNvSpPr txBox="1"/>
+          <p:nvPr/>
+        </p:nvSpPr>
+        <p:spPr>
+          <a:xfrm>
+            <a:off x="2034000" y="2934000"/>
+            <a:ext cx="1332000" cy="503999"/>
+          </a:xfrm>
+          <a:prstGeom prst="rect">
+            <a:avLst/>
+          </a:prstGeom>
+          <a:noFill/>
+        </p:spPr>
+        <p:txBody>
+          <a:bodyPr wrap="square" lIns="0" rIns="0" tIns="0" bIns="0" anchor="t">
+            <a:spAutoFit/>
+          </a:bodyPr>
+          <a:lstStyle/>
+          <a:p>
+            <a:pPr algn="ctr">
+              <a:lnSpc>
+                <a:spcPct val="105000"/>
+              </a:lnSpc>
+            </a:pPr>
+            <a:r>
+              <a:rPr sz="1000" b="0">
+                <a:solidFill>
+                  <a:srgbClr val="141B34"/>
+                </a:solidFill>
+                <a:latin typeface="Evolventa"/>
+              </a:rPr>
+              <a:t>держит состояние, задает уточнения</a:t>
+            </a:r>
+          </a:p>
+        </p:txBody>
+      </p:sp>
+      <p:sp>
+        <p:nvSpPr>
+          <p:cNvPr id="26" name="Rounded Rectangle 25"/>
+          <p:cNvSpPr/>
+          <p:nvPr/>
+        </p:nvSpPr>
+        <p:spPr>
+          <a:xfrm>
+            <a:off x="2160000" y="3438000"/>
+            <a:ext cx="1080000" cy="216000"/>
+          </a:xfrm>
+          <a:prstGeom prst="roundRect">
+            <a:avLst>
+              <a:gd name="adj" fmla="val 50000"/>
+            </a:avLst>
+          </a:prstGeom>
+          <a:solidFill>
+            <a:srgbClr val="F0F0EE"/>
+          </a:solidFill>
+          <a:ln>
+            <a:noFill/>
+          </a:ln>
+          <a:effectLst/>
+        </p:spPr>
+        <p:style>
+          <a:lnRef idx="1">
+            <a:schemeClr val="accent1"/>
+          </a:lnRef>
+          <a:fillRef idx="3">
+            <a:schemeClr val="accent1"/>
+          </a:fillRef>
+          <a:effectRef idx="2">
+            <a:schemeClr val="accent1"/>
+          </a:effectRef>
+          <a:fontRef idx="minor">
+            <a:schemeClr val="lt1"/>
+          </a:fontRef>
+        </p:style>
+        <p:txBody>
+          <a:bodyPr rtlCol="0" anchor="ctr" lIns="36000" rIns="36000" tIns="0" bIns="0"/>
+          <a:lstStyle/>
+          <a:p>
+            <a:pPr algn="ctr"/>
+            <a:r>
+              <a:rPr sz="900">
+                <a:solidFill>
+                  <a:srgbClr val="141B34"/>
+                </a:solidFill>
+                <a:latin typeface="Intro"/>
+              </a:rPr>
+              <a:t>Python</a:t>
+            </a:r>
+          </a:p>
+        </p:txBody>
+      </p:sp>
+      <p:pic>
+        <p:nvPicPr>
+          <p:cNvPr id="27" name="Picture 26" descr="i_arrow-right_o.png"/>
+          <p:cNvPicPr>
+            <a:picLocks noChangeAspect="1"/>
+          </p:cNvPicPr>
+          <p:nvPr/>
+        </p:nvPicPr>
+        <p:blipFill>
+          <a:blip r:embed="rId3"/>
+          <a:stretch>
+            <a:fillRect/>
+          </a:stretch>
+        </p:blipFill>
+        <p:spPr>
+          <a:xfrm>
+            <a:off x="3337200" y="1962000"/>
+            <a:ext cx="251999" cy="251999"/>
+          </a:xfrm>
+          <a:prstGeom prst="rect">
+            <a:avLst/>
+          </a:prstGeom>
+        </p:spPr>
+      </p:pic>
+      <p:sp>
+        <p:nvSpPr>
+          <p:cNvPr id="28" name="Rounded Rectangle 27"/>
+          <p:cNvSpPr/>
+          <p:nvPr/>
+        </p:nvSpPr>
+        <p:spPr>
+          <a:xfrm>
+            <a:off x="4032000" y="1800000"/>
+            <a:ext cx="576000" cy="576000"/>
+          </a:xfrm>
+          <a:prstGeom prst="roundRect">
+            <a:avLst>
+              <a:gd name="adj" fmla="val 50000"/>
+            </a:avLst>
+          </a:prstGeom>
+          <a:solidFill>
+            <a:srgbClr val="E8ECFF"/>
+          </a:solidFill>
+          <a:ln>
+            <a:noFill/>
+          </a:ln>
+          <a:effectLst/>
+        </p:spPr>
+        <p:style>
+          <a:lnRef idx="1">
+            <a:schemeClr val="accent1"/>
+          </a:lnRef>
+          <a:fillRef idx="3">
+            <a:schemeClr val="accent1"/>
+          </a:fillRef>
+          <a:effectRef idx="2">
+            <a:schemeClr val="accent1"/>
+          </a:effectRef>
+          <a:fontRef idx="minor">
+            <a:schemeClr val="lt1"/>
+          </a:fontRef>
+        </p:style>
+        <p:txBody>
+          <a:bodyPr rtlCol="0" anchor="ctr"/>
+          <a:lstStyle/>
+          <a:p>
+            <a:pPr algn="ctr"/>
+          </a:p>
+        </p:txBody>
+      </p:sp>
+      <p:pic>
+        <p:nvPicPr>
+          <p:cNvPr id="29" name="Picture 28" descr="i_braces_b.png"/>
+          <p:cNvPicPr>
+            <a:picLocks noChangeAspect="1"/>
+          </p:cNvPicPr>
+          <p:nvPr/>
+        </p:nvPicPr>
+        <p:blipFill>
+          <a:blip r:embed="rId5"/>
+          <a:stretch>
+            <a:fillRect/>
+          </a:stretch>
+        </p:blipFill>
+        <p:spPr>
+          <a:xfrm>
+            <a:off x="4158000" y="1925999"/>
+            <a:ext cx="324000" cy="324000"/>
+          </a:xfrm>
+          <a:prstGeom prst="rect">
+            <a:avLst/>
+          </a:prstGeom>
+        </p:spPr>
+      </p:pic>
+      <p:sp>
+        <p:nvSpPr>
+          <p:cNvPr id="30" name="TextBox 29"/>
+          <p:cNvSpPr txBox="1"/>
+          <p:nvPr/>
+        </p:nvSpPr>
+        <p:spPr>
+          <a:xfrm>
+            <a:off x="3654000" y="2466000"/>
+            <a:ext cx="1332000" cy="251999"/>
+          </a:xfrm>
+          <a:prstGeom prst="rect">
+            <a:avLst/>
+          </a:prstGeom>
+          <a:noFill/>
+        </p:spPr>
+        <p:txBody>
+          <a:bodyPr wrap="square" lIns="0" rIns="0" tIns="0" bIns="0" anchor="t">
+            <a:spAutoFit/>
+          </a:bodyPr>
+          <a:lstStyle/>
+          <a:p>
+            <a:pPr algn="ctr">
+              <a:lnSpc>
+                <a:spcPct val="100000"/>
+              </a:lnSpc>
+            </a:pPr>
+            <a:r>
+              <a:rPr sz="1250" b="0">
+                <a:solidFill>
+                  <a:srgbClr val="141B34"/>
+                </a:solidFill>
+                <a:latin typeface="Intro"/>
+              </a:rPr>
+              <a:t>Разбор</a:t>
+            </a:r>
+          </a:p>
+        </p:txBody>
+      </p:sp>
+      <p:sp>
+        <p:nvSpPr>
+          <p:cNvPr id="31" name="TextBox 30"/>
+          <p:cNvSpPr txBox="1"/>
+          <p:nvPr/>
+        </p:nvSpPr>
+        <p:spPr>
+          <a:xfrm>
+            <a:off x="3654000" y="2700000"/>
+            <a:ext cx="1332000" cy="216000"/>
+          </a:xfrm>
+          <a:prstGeom prst="rect">
+            <a:avLst/>
+          </a:prstGeom>
+          <a:noFill/>
+        </p:spPr>
+        <p:txBody>
+          <a:bodyPr wrap="square" lIns="0" rIns="0" tIns="0" bIns="0" anchor="t">
+            <a:spAutoFit/>
+          </a:bodyPr>
+          <a:lstStyle/>
+          <a:p>
+            <a:pPr algn="ctr">
+              <a:lnSpc>
+                <a:spcPct val="100000"/>
+              </a:lnSpc>
+            </a:pPr>
+            <a:r>
+              <a:rPr sz="950" b="0">
+                <a:solidFill>
+                  <a:srgbClr val="3D5AFE"/>
+                </a:solidFill>
+                <a:latin typeface="Menlo"/>
+              </a:rPr>
+              <a:t>nlu.py, llm.py</a:t>
+            </a:r>
+          </a:p>
+        </p:txBody>
+      </p:sp>
+      <p:sp>
+        <p:nvSpPr>
+          <p:cNvPr id="32" name="TextBox 31"/>
+          <p:cNvSpPr txBox="1"/>
+          <p:nvPr/>
+        </p:nvSpPr>
+        <p:spPr>
+          <a:xfrm>
+            <a:off x="3654000" y="2934000"/>
+            <a:ext cx="1332000" cy="503999"/>
+          </a:xfrm>
+          <a:prstGeom prst="rect">
+            <a:avLst/>
+          </a:prstGeom>
+          <a:noFill/>
+        </p:spPr>
+        <p:txBody>
+          <a:bodyPr wrap="square" lIns="0" rIns="0" tIns="0" bIns="0" anchor="t">
+            <a:spAutoFit/>
+          </a:bodyPr>
+          <a:lstStyle/>
+          <a:p>
+            <a:pPr algn="ctr">
+              <a:lnSpc>
+                <a:spcPct val="105000"/>
+              </a:lnSpc>
+            </a:pPr>
+            <a:r>
+              <a:rPr sz="1000" b="0">
+                <a:solidFill>
+                  <a:srgbClr val="141B34"/>
+                </a:solidFill>
+                <a:latin typeface="Evolventa"/>
+              </a:rPr>
+              <a:t>фраза в команду, правила и LLM</a:t>
+            </a:r>
+          </a:p>
+        </p:txBody>
+      </p:sp>
+      <p:sp>
+        <p:nvSpPr>
+          <p:cNvPr id="33" name="Rounded Rectangle 32"/>
+          <p:cNvSpPr/>
+          <p:nvPr/>
+        </p:nvSpPr>
+        <p:spPr>
+          <a:xfrm>
+            <a:off x="3780000" y="3438000"/>
+            <a:ext cx="1080000" cy="216000"/>
+          </a:xfrm>
+          <a:prstGeom prst="roundRect">
+            <a:avLst>
+              <a:gd name="adj" fmla="val 50000"/>
+            </a:avLst>
+          </a:prstGeom>
+          <a:solidFill>
+            <a:srgbClr val="F0F0EE"/>
+          </a:solidFill>
+          <a:ln>
+            <a:noFill/>
+          </a:ln>
+          <a:effectLst/>
+        </p:spPr>
+        <p:style>
+          <a:lnRef idx="1">
+            <a:schemeClr val="accent1"/>
+          </a:lnRef>
+          <a:fillRef idx="3">
+            <a:schemeClr val="accent1"/>
+          </a:fillRef>
+          <a:effectRef idx="2">
+            <a:schemeClr val="accent1"/>
+          </a:effectRef>
+          <a:fontRef idx="minor">
+            <a:schemeClr val="lt1"/>
+          </a:fontRef>
+        </p:style>
+        <p:txBody>
+          <a:bodyPr rtlCol="0" anchor="ctr" lIns="36000" rIns="36000" tIns="0" bIns="0"/>
+          <a:lstStyle/>
+          <a:p>
+            <a:pPr algn="ctr"/>
+            <a:r>
+              <a:rPr sz="900">
+                <a:solidFill>
+                  <a:srgbClr val="141B34"/>
+                </a:solidFill>
+                <a:latin typeface="Intro"/>
+              </a:rPr>
+              <a:t>Ollama, Groq</a:t>
+            </a:r>
+          </a:p>
+        </p:txBody>
+      </p:sp>
+      <p:pic>
+        <p:nvPicPr>
+          <p:cNvPr id="34" name="Picture 33" descr="i_arrow-right_o.png"/>
+          <p:cNvPicPr>
+            <a:picLocks noChangeAspect="1"/>
+          </p:cNvPicPr>
+          <p:nvPr/>
+        </p:nvPicPr>
+        <p:blipFill>
+          <a:blip r:embed="rId3"/>
+          <a:stretch>
+            <a:fillRect/>
+          </a:stretch>
+        </p:blipFill>
+        <p:spPr>
+          <a:xfrm>
+            <a:off x="4957200" y="1962000"/>
+            <a:ext cx="251999" cy="251999"/>
+          </a:xfrm>
+          <a:prstGeom prst="rect">
+            <a:avLst/>
+          </a:prstGeom>
+        </p:spPr>
+      </p:pic>
+      <p:sp>
+        <p:nvSpPr>
+          <p:cNvPr id="35" name="Rounded Rectangle 34"/>
+          <p:cNvSpPr/>
+          <p:nvPr/>
+        </p:nvSpPr>
+        <p:spPr>
+          <a:xfrm>
+            <a:off x="5652000" y="1800000"/>
+            <a:ext cx="576000" cy="576000"/>
+          </a:xfrm>
+          <a:prstGeom prst="roundRect">
+            <a:avLst>
+              <a:gd name="adj" fmla="val 50000"/>
+            </a:avLst>
+          </a:prstGeom>
+          <a:solidFill>
+            <a:srgbClr val="E8ECFF"/>
+          </a:solidFill>
+          <a:ln>
+            <a:noFill/>
+          </a:ln>
+          <a:effectLst/>
+        </p:spPr>
+        <p:style>
+          <a:lnRef idx="1">
+            <a:schemeClr val="accent1"/>
+          </a:lnRef>
+          <a:fillRef idx="3">
+            <a:schemeClr val="accent1"/>
+          </a:fillRef>
+          <a:effectRef idx="2">
+            <a:schemeClr val="accent1"/>
+          </a:effectRef>
+          <a:fontRef idx="minor">
+            <a:schemeClr val="lt1"/>
+          </a:fontRef>
+        </p:style>
+        <p:txBody>
+          <a:bodyPr rtlCol="0" anchor="ctr"/>
+          <a:lstStyle/>
+          <a:p>
+            <a:pPr algn="ctr"/>
+          </a:p>
+        </p:txBody>
+      </p:sp>
+      <p:pic>
+        <p:nvPicPr>
+          <p:cNvPr id="36" name="Picture 35" descr="i_book-open_b.png"/>
+          <p:cNvPicPr>
+            <a:picLocks noChangeAspect="1"/>
+          </p:cNvPicPr>
+          <p:nvPr/>
+        </p:nvPicPr>
+        <p:blipFill>
+          <a:blip r:embed="rId6"/>
+          <a:stretch>
+            <a:fillRect/>
+          </a:stretch>
+        </p:blipFill>
+        <p:spPr>
+          <a:xfrm>
+            <a:off x="5778000" y="1925999"/>
+            <a:ext cx="324000" cy="324000"/>
+          </a:xfrm>
+          <a:prstGeom prst="rect">
+            <a:avLst/>
+          </a:prstGeom>
+        </p:spPr>
+      </p:pic>
+      <p:sp>
+        <p:nvSpPr>
+          <p:cNvPr id="37" name="TextBox 36"/>
+          <p:cNvSpPr txBox="1"/>
+          <p:nvPr/>
+        </p:nvSpPr>
+        <p:spPr>
+          <a:xfrm>
+            <a:off x="5274000" y="2466000"/>
+            <a:ext cx="1332000" cy="251999"/>
+          </a:xfrm>
+          <a:prstGeom prst="rect">
+            <a:avLst/>
+          </a:prstGeom>
+          <a:noFill/>
+        </p:spPr>
+        <p:txBody>
+          <a:bodyPr wrap="square" lIns="0" rIns="0" tIns="0" bIns="0" anchor="t">
+            <a:spAutoFit/>
+          </a:bodyPr>
+          <a:lstStyle/>
+          <a:p>
+            <a:pPr algn="ctr">
+              <a:lnSpc>
+                <a:spcPct val="100000"/>
+              </a:lnSpc>
+            </a:pPr>
+            <a:r>
+              <a:rPr sz="1250" b="0">
+                <a:solidFill>
+                  <a:srgbClr val="141B34"/>
+                </a:solidFill>
+                <a:latin typeface="Intro"/>
+              </a:rPr>
+              <a:t>Каталог</a:t>
+            </a:r>
+          </a:p>
+        </p:txBody>
+      </p:sp>
+      <p:sp>
+        <p:nvSpPr>
+          <p:cNvPr id="38" name="TextBox 37"/>
+          <p:cNvSpPr txBox="1"/>
+          <p:nvPr/>
+        </p:nvSpPr>
+        <p:spPr>
+          <a:xfrm>
+            <a:off x="5274000" y="2700000"/>
+            <a:ext cx="1332000" cy="216000"/>
+          </a:xfrm>
+          <a:prstGeom prst="rect">
+            <a:avLst/>
+          </a:prstGeom>
+          <a:noFill/>
+        </p:spPr>
+        <p:txBody>
+          <a:bodyPr wrap="square" lIns="0" rIns="0" tIns="0" bIns="0" anchor="t">
+            <a:spAutoFit/>
+          </a:bodyPr>
+          <a:lstStyle/>
+          <a:p>
+            <a:pPr algn="ctr">
+              <a:lnSpc>
+                <a:spcPct val="100000"/>
+              </a:lnSpc>
+            </a:pPr>
+            <a:r>
+              <a:rPr sz="950" b="0">
+                <a:solidFill>
+                  <a:srgbClr val="3D5AFE"/>
+                </a:solidFill>
+                <a:latin typeface="Menlo"/>
+              </a:rPr>
+              <a:t>catalog.py</a:t>
+            </a:r>
+          </a:p>
+        </p:txBody>
+      </p:sp>
+      <p:sp>
+        <p:nvSpPr>
+          <p:cNvPr id="39" name="TextBox 38"/>
+          <p:cNvSpPr txBox="1"/>
+          <p:nvPr/>
+        </p:nvSpPr>
+        <p:spPr>
+          <a:xfrm>
+            <a:off x="5274000" y="2934000"/>
+            <a:ext cx="1332000" cy="503999"/>
+          </a:xfrm>
+          <a:prstGeom prst="rect">
+            <a:avLst/>
+          </a:prstGeom>
+          <a:noFill/>
+        </p:spPr>
+        <p:txBody>
+          <a:bodyPr wrap="square" lIns="0" rIns="0" tIns="0" bIns="0" anchor="t">
+            <a:spAutoFit/>
+          </a:bodyPr>
+          <a:lstStyle/>
+          <a:p>
+            <a:pPr algn="ctr">
+              <a:lnSpc>
+                <a:spcPct val="105000"/>
+              </a:lnSpc>
+            </a:pPr>
+            <a:r>
+              <a:rPr sz="1000" b="0">
+                <a:solidFill>
+                  <a:srgbClr val="141B34"/>
+                </a:solidFill>
+                <a:latin typeface="Evolventa"/>
+              </a:rPr>
+              <a:t>разрезы и метрики, граница доверия</a:t>
+            </a:r>
+          </a:p>
+        </p:txBody>
+      </p:sp>
+      <p:sp>
+        <p:nvSpPr>
+          <p:cNvPr id="40" name="Rounded Rectangle 39"/>
+          <p:cNvSpPr/>
+          <p:nvPr/>
+        </p:nvSpPr>
+        <p:spPr>
+          <a:xfrm>
+            <a:off x="5400000" y="3438000"/>
+            <a:ext cx="1080000" cy="216000"/>
+          </a:xfrm>
+          <a:prstGeom prst="roundRect">
+            <a:avLst>
+              <a:gd name="adj" fmla="val 50000"/>
+            </a:avLst>
+          </a:prstGeom>
+          <a:solidFill>
+            <a:srgbClr val="F0F0EE"/>
+          </a:solidFill>
+          <a:ln>
+            <a:noFill/>
+          </a:ln>
+          <a:effectLst/>
+        </p:spPr>
+        <p:style>
+          <a:lnRef idx="1">
+            <a:schemeClr val="accent1"/>
+          </a:lnRef>
+          <a:fillRef idx="3">
+            <a:schemeClr val="accent1"/>
+          </a:fillRef>
+          <a:effectRef idx="2">
+            <a:schemeClr val="accent1"/>
+          </a:effectRef>
+          <a:fontRef idx="minor">
+            <a:schemeClr val="lt1"/>
+          </a:fontRef>
+        </p:style>
+        <p:txBody>
+          <a:bodyPr rtlCol="0" anchor="ctr" lIns="36000" rIns="36000" tIns="0" bIns="0"/>
+          <a:lstStyle/>
+          <a:p>
+            <a:pPr algn="ctr"/>
+            <a:r>
+              <a:rPr sz="900">
+                <a:solidFill>
+                  <a:srgbClr val="141B34"/>
+                </a:solidFill>
+                <a:latin typeface="Intro"/>
+              </a:rPr>
+              <a:t>словари</a:t>
+            </a:r>
+          </a:p>
+        </p:txBody>
+      </p:sp>
+      <p:pic>
+        <p:nvPicPr>
+          <p:cNvPr id="41" name="Picture 40" descr="i_arrow-right_o.png"/>
+          <p:cNvPicPr>
+            <a:picLocks noChangeAspect="1"/>
+          </p:cNvPicPr>
+          <p:nvPr/>
+        </p:nvPicPr>
+        <p:blipFill>
+          <a:blip r:embed="rId3"/>
+          <a:stretch>
+            <a:fillRect/>
+          </a:stretch>
+        </p:blipFill>
+        <p:spPr>
+          <a:xfrm>
+            <a:off x="6577200" y="1962000"/>
+            <a:ext cx="251999" cy="251999"/>
+          </a:xfrm>
+          <a:prstGeom prst="rect">
+            <a:avLst/>
+          </a:prstGeom>
+        </p:spPr>
+      </p:pic>
+      <p:sp>
+        <p:nvSpPr>
+          <p:cNvPr id="42" name="Rounded Rectangle 41"/>
+          <p:cNvSpPr/>
+          <p:nvPr/>
+        </p:nvSpPr>
+        <p:spPr>
+          <a:xfrm>
+            <a:off x="7272000" y="1800000"/>
+            <a:ext cx="576000" cy="576000"/>
+          </a:xfrm>
+          <a:prstGeom prst="roundRect">
+            <a:avLst>
+              <a:gd name="adj" fmla="val 50000"/>
+            </a:avLst>
+          </a:prstGeom>
+          <a:solidFill>
+            <a:srgbClr val="E8ECFF"/>
+          </a:solidFill>
+          <a:ln>
+            <a:noFill/>
+          </a:ln>
+          <a:effectLst/>
+        </p:spPr>
+        <p:style>
+          <a:lnRef idx="1">
+            <a:schemeClr val="accent1"/>
+          </a:lnRef>
+          <a:fillRef idx="3">
+            <a:schemeClr val="accent1"/>
+          </a:fillRef>
+          <a:effectRef idx="2">
+            <a:schemeClr val="accent1"/>
+          </a:effectRef>
+          <a:fontRef idx="minor">
+            <a:schemeClr val="lt1"/>
+          </a:fontRef>
+        </p:style>
+        <p:txBody>
+          <a:bodyPr rtlCol="0" anchor="ctr"/>
+          <a:lstStyle/>
+          <a:p>
+            <a:pPr algn="ctr"/>
+          </a:p>
+        </p:txBody>
+      </p:sp>
+      <p:pic>
+        <p:nvPicPr>
+          <p:cNvPr id="43" name="Picture 42" descr="i_database_b.png"/>
+          <p:cNvPicPr>
+            <a:picLocks noChangeAspect="1"/>
+          </p:cNvPicPr>
+          <p:nvPr/>
+        </p:nvPicPr>
+        <p:blipFill>
+          <a:blip r:embed="rId7"/>
+          <a:stretch>
+            <a:fillRect/>
+          </a:stretch>
+        </p:blipFill>
+        <p:spPr>
+          <a:xfrm>
+            <a:off x="7397999" y="1925999"/>
+            <a:ext cx="324000" cy="324000"/>
+          </a:xfrm>
+          <a:prstGeom prst="rect">
+            <a:avLst/>
+          </a:prstGeom>
+        </p:spPr>
+      </p:pic>
+      <p:sp>
+        <p:nvSpPr>
+          <p:cNvPr id="44" name="TextBox 43"/>
+          <p:cNvSpPr txBox="1"/>
+          <p:nvPr/>
+        </p:nvSpPr>
+        <p:spPr>
+          <a:xfrm>
+            <a:off x="6893999" y="2466000"/>
+            <a:ext cx="1332000" cy="251999"/>
+          </a:xfrm>
+          <a:prstGeom prst="rect">
+            <a:avLst/>
+          </a:prstGeom>
+          <a:noFill/>
+        </p:spPr>
+        <p:txBody>
+          <a:bodyPr wrap="square" lIns="0" rIns="0" tIns="0" bIns="0" anchor="t">
+            <a:spAutoFit/>
+          </a:bodyPr>
+          <a:lstStyle/>
+          <a:p>
+            <a:pPr algn="ctr">
+              <a:lnSpc>
+                <a:spcPct val="100000"/>
+              </a:lnSpc>
+            </a:pPr>
+            <a:r>
+              <a:rPr sz="1250" b="0">
+                <a:solidFill>
+                  <a:srgbClr val="141B34"/>
+                </a:solidFill>
+                <a:latin typeface="Intro"/>
+              </a:rPr>
+              <a:t>База</a:t>
+            </a:r>
+          </a:p>
+        </p:txBody>
+      </p:sp>
+      <p:sp>
+        <p:nvSpPr>
+          <p:cNvPr id="45" name="TextBox 44"/>
+          <p:cNvSpPr txBox="1"/>
+          <p:nvPr/>
+        </p:nvSpPr>
+        <p:spPr>
+          <a:xfrm>
+            <a:off x="6893999" y="2700000"/>
+            <a:ext cx="1332000" cy="216000"/>
+          </a:xfrm>
+          <a:prstGeom prst="rect">
+            <a:avLst/>
+          </a:prstGeom>
+          <a:noFill/>
+        </p:spPr>
+        <p:txBody>
+          <a:bodyPr wrap="square" lIns="0" rIns="0" tIns="0" bIns="0" anchor="t">
+            <a:spAutoFit/>
+          </a:bodyPr>
+          <a:lstStyle/>
+          <a:p>
+            <a:pPr algn="ctr">
+              <a:lnSpc>
+                <a:spcPct val="100000"/>
+              </a:lnSpc>
+            </a:pPr>
+            <a:r>
+              <a:rPr sz="950" b="0">
+                <a:solidFill>
+                  <a:srgbClr val="3D5AFE"/>
+                </a:solidFill>
+                <a:latin typeface="Menlo"/>
+              </a:rPr>
+              <a:t>db.py</a:t>
+            </a:r>
+          </a:p>
+        </p:txBody>
+      </p:sp>
+      <p:sp>
+        <p:nvSpPr>
+          <p:cNvPr id="46" name="TextBox 45"/>
+          <p:cNvSpPr txBox="1"/>
+          <p:nvPr/>
+        </p:nvSpPr>
+        <p:spPr>
+          <a:xfrm>
+            <a:off x="6893999" y="2934000"/>
+            <a:ext cx="1332000" cy="503999"/>
+          </a:xfrm>
+          <a:prstGeom prst="rect">
+            <a:avLst/>
+          </a:prstGeom>
+          <a:noFill/>
+        </p:spPr>
+        <p:txBody>
+          <a:bodyPr wrap="square" lIns="0" rIns="0" tIns="0" bIns="0" anchor="t">
+            <a:spAutoFit/>
+          </a:bodyPr>
+          <a:lstStyle/>
+          <a:p>
+            <a:pPr algn="ctr">
+              <a:lnSpc>
+                <a:spcPct val="105000"/>
+              </a:lnSpc>
+            </a:pPr>
+            <a:r>
+              <a:rPr sz="1000" b="0">
+                <a:solidFill>
+                  <a:srgbClr val="141B34"/>
+                </a:solidFill>
+                <a:latin typeface="Evolventa"/>
+              </a:rPr>
+              <a:t>SQL только на чтение по команде</a:t>
+            </a:r>
+          </a:p>
+        </p:txBody>
+      </p:sp>
+      <p:sp>
+        <p:nvSpPr>
+          <p:cNvPr id="47" name="Rounded Rectangle 46"/>
+          <p:cNvSpPr/>
+          <p:nvPr/>
+        </p:nvSpPr>
+        <p:spPr>
+          <a:xfrm>
+            <a:off x="7020000" y="3438000"/>
+            <a:ext cx="1080000" cy="216000"/>
+          </a:xfrm>
+          <a:prstGeom prst="roundRect">
+            <a:avLst>
+              <a:gd name="adj" fmla="val 50000"/>
+            </a:avLst>
+          </a:prstGeom>
+          <a:solidFill>
+            <a:srgbClr val="F0F0EE"/>
+          </a:solidFill>
+          <a:ln>
+            <a:noFill/>
+          </a:ln>
+          <a:effectLst/>
+        </p:spPr>
+        <p:style>
+          <a:lnRef idx="1">
+            <a:schemeClr val="accent1"/>
+          </a:lnRef>
+          <a:fillRef idx="3">
+            <a:schemeClr val="accent1"/>
+          </a:fillRef>
+          <a:effectRef idx="2">
+            <a:schemeClr val="accent1"/>
+          </a:effectRef>
+          <a:fontRef idx="minor">
+            <a:schemeClr val="lt1"/>
+          </a:fontRef>
+        </p:style>
+        <p:txBody>
+          <a:bodyPr rtlCol="0" anchor="ctr" lIns="36000" rIns="36000" tIns="0" bIns="0"/>
+          <a:lstStyle/>
+          <a:p>
+            <a:pPr algn="ctr"/>
+            <a:r>
+              <a:rPr sz="900">
+                <a:solidFill>
+                  <a:srgbClr val="141B34"/>
+                </a:solidFill>
+                <a:latin typeface="Intro"/>
+              </a:rPr>
+              <a:t>DuckDB, Postgres</a:t>
+            </a:r>
+          </a:p>
+        </p:txBody>
+      </p:sp>
+      <p:pic>
+        <p:nvPicPr>
+          <p:cNvPr id="48" name="Picture 47" descr="i_arrow-right_o.png"/>
+          <p:cNvPicPr>
+            <a:picLocks noChangeAspect="1"/>
+          </p:cNvPicPr>
+          <p:nvPr/>
+        </p:nvPicPr>
+        <p:blipFill>
+          <a:blip r:embed="rId3"/>
+          <a:stretch>
+            <a:fillRect/>
+          </a:stretch>
+        </p:blipFill>
+        <p:spPr>
+          <a:xfrm>
+            <a:off x="8197200" y="1962000"/>
+            <a:ext cx="251999" cy="251999"/>
+          </a:xfrm>
+          <a:prstGeom prst="rect">
+            <a:avLst/>
+          </a:prstGeom>
+        </p:spPr>
+      </p:pic>
+      <p:sp>
+        <p:nvSpPr>
+          <p:cNvPr id="49" name="Rounded Rectangle 48"/>
+          <p:cNvSpPr/>
+          <p:nvPr/>
+        </p:nvSpPr>
+        <p:spPr>
+          <a:xfrm>
+            <a:off x="8892000" y="1800000"/>
+            <a:ext cx="576000" cy="576000"/>
+          </a:xfrm>
+          <a:prstGeom prst="roundRect">
+            <a:avLst>
+              <a:gd name="adj" fmla="val 50000"/>
+            </a:avLst>
+          </a:prstGeom>
+          <a:solidFill>
+            <a:srgbClr val="E8ECFF"/>
+          </a:solidFill>
+          <a:ln>
+            <a:noFill/>
+          </a:ln>
+          <a:effectLst/>
+        </p:spPr>
+        <p:style>
+          <a:lnRef idx="1">
+            <a:schemeClr val="accent1"/>
+          </a:lnRef>
+          <a:fillRef idx="3">
+            <a:schemeClr val="accent1"/>
+          </a:fillRef>
+          <a:effectRef idx="2">
+            <a:schemeClr val="accent1"/>
+          </a:effectRef>
+          <a:fontRef idx="minor">
+            <a:schemeClr val="lt1"/>
+          </a:fontRef>
+        </p:style>
+        <p:txBody>
+          <a:bodyPr rtlCol="0" anchor="ctr"/>
+          <a:lstStyle/>
+          <a:p>
+            <a:pPr algn="ctr"/>
+          </a:p>
+        </p:txBody>
+      </p:sp>
+      <p:pic>
+        <p:nvPicPr>
+          <p:cNvPr id="50" name="Picture 49" descr="i_sigma_b.png"/>
+          <p:cNvPicPr>
+            <a:picLocks noChangeAspect="1"/>
+          </p:cNvPicPr>
+          <p:nvPr/>
+        </p:nvPicPr>
+        <p:blipFill>
+          <a:blip r:embed="rId8"/>
+          <a:stretch>
+            <a:fillRect/>
+          </a:stretch>
+        </p:blipFill>
+        <p:spPr>
+          <a:xfrm>
+            <a:off x="9017999" y="1925999"/>
+            <a:ext cx="324000" cy="324000"/>
+          </a:xfrm>
+          <a:prstGeom prst="rect">
+            <a:avLst/>
+          </a:prstGeom>
+        </p:spPr>
+      </p:pic>
+      <p:sp>
+        <p:nvSpPr>
+          <p:cNvPr id="51" name="TextBox 50"/>
+          <p:cNvSpPr txBox="1"/>
+          <p:nvPr/>
+        </p:nvSpPr>
+        <p:spPr>
+          <a:xfrm>
+            <a:off x="8514000" y="2466000"/>
+            <a:ext cx="1332000" cy="251999"/>
+          </a:xfrm>
+          <a:prstGeom prst="rect">
+            <a:avLst/>
+          </a:prstGeom>
+          <a:noFill/>
+        </p:spPr>
+        <p:txBody>
+          <a:bodyPr wrap="square" lIns="0" rIns="0" tIns="0" bIns="0" anchor="t">
+            <a:spAutoFit/>
+          </a:bodyPr>
+          <a:lstStyle/>
+          <a:p>
+            <a:pPr algn="ctr">
+              <a:lnSpc>
+                <a:spcPct val="100000"/>
+              </a:lnSpc>
+            </a:pPr>
+            <a:r>
+              <a:rPr sz="1250" b="0">
+                <a:solidFill>
+                  <a:srgbClr val="141B34"/>
+                </a:solidFill>
+                <a:latin typeface="Intro"/>
+              </a:rPr>
+              <a:t>Вычисления</a:t>
+            </a:r>
+          </a:p>
+        </p:txBody>
+      </p:sp>
+      <p:sp>
+        <p:nvSpPr>
+          <p:cNvPr id="52" name="TextBox 51"/>
+          <p:cNvSpPr txBox="1"/>
+          <p:nvPr/>
+        </p:nvSpPr>
+        <p:spPr>
+          <a:xfrm>
+            <a:off x="8514000" y="2700000"/>
+            <a:ext cx="1332000" cy="216000"/>
+          </a:xfrm>
+          <a:prstGeom prst="rect">
+            <a:avLst/>
+          </a:prstGeom>
+          <a:noFill/>
+        </p:spPr>
+        <p:txBody>
+          <a:bodyPr wrap="square" lIns="0" rIns="0" tIns="0" bIns="0" anchor="t">
+            <a:spAutoFit/>
+          </a:bodyPr>
+          <a:lstStyle/>
+          <a:p>
+            <a:pPr algn="ctr">
+              <a:lnSpc>
+                <a:spcPct val="100000"/>
+              </a:lnSpc>
+            </a:pPr>
+            <a:r>
+              <a:rPr sz="950" b="0">
+                <a:solidFill>
+                  <a:srgbClr val="3D5AFE"/>
+                </a:solidFill>
+                <a:latin typeface="Menlo"/>
+              </a:rPr>
+              <a:t>compute.py</a:t>
+            </a:r>
+          </a:p>
+        </p:txBody>
+      </p:sp>
+      <p:sp>
+        <p:nvSpPr>
+          <p:cNvPr id="53" name="TextBox 52"/>
+          <p:cNvSpPr txBox="1"/>
+          <p:nvPr/>
+        </p:nvSpPr>
+        <p:spPr>
+          <a:xfrm>
+            <a:off x="8514000" y="2934000"/>
+            <a:ext cx="1332000" cy="503999"/>
+          </a:xfrm>
+          <a:prstGeom prst="rect">
+            <a:avLst/>
+          </a:prstGeom>
+          <a:noFill/>
+        </p:spPr>
+        <p:txBody>
+          <a:bodyPr wrap="square" lIns="0" rIns="0" tIns="0" bIns="0" anchor="t">
+            <a:spAutoFit/>
+          </a:bodyPr>
+          <a:lstStyle/>
+          <a:p>
+            <a:pPr algn="ctr">
+              <a:lnSpc>
+                <a:spcPct val="105000"/>
+              </a:lnSpc>
+            </a:pPr>
+            <a:r>
+              <a:rPr sz="1000" b="0">
+                <a:solidFill>
+                  <a:srgbClr val="141B34"/>
+                </a:solidFill>
+                <a:latin typeface="Evolventa"/>
+              </a:rPr>
+              <a:t>колонки, доли, динамика без кода</a:t>
+            </a:r>
+          </a:p>
+        </p:txBody>
+      </p:sp>
+      <p:sp>
+        <p:nvSpPr>
+          <p:cNvPr id="54" name="Rounded Rectangle 53"/>
+          <p:cNvSpPr/>
+          <p:nvPr/>
+        </p:nvSpPr>
+        <p:spPr>
+          <a:xfrm>
+            <a:off x="8640000" y="3438000"/>
+            <a:ext cx="1080000" cy="216000"/>
+          </a:xfrm>
+          <a:prstGeom prst="roundRect">
+            <a:avLst>
+              <a:gd name="adj" fmla="val 50000"/>
+            </a:avLst>
+          </a:prstGeom>
+          <a:solidFill>
+            <a:srgbClr val="F0F0EE"/>
+          </a:solidFill>
+          <a:ln>
+            <a:noFill/>
+          </a:ln>
+          <a:effectLst/>
+        </p:spPr>
+        <p:style>
+          <a:lnRef idx="1">
+            <a:schemeClr val="accent1"/>
+          </a:lnRef>
+          <a:fillRef idx="3">
+            <a:schemeClr val="accent1"/>
+          </a:fillRef>
+          <a:effectRef idx="2">
+            <a:schemeClr val="accent1"/>
+          </a:effectRef>
+          <a:fontRef idx="minor">
+            <a:schemeClr val="lt1"/>
+          </a:fontRef>
+        </p:style>
+        <p:txBody>
+          <a:bodyPr rtlCol="0" anchor="ctr" lIns="36000" rIns="36000" tIns="0" bIns="0"/>
+          <a:lstStyle/>
+          <a:p>
+            <a:pPr algn="ctr"/>
+            <a:r>
+              <a:rPr sz="900">
+                <a:solidFill>
+                  <a:srgbClr val="141B34"/>
+                </a:solidFill>
+                <a:latin typeface="Intro"/>
+              </a:rPr>
+              <a:t>pandas</a:t>
+            </a:r>
+          </a:p>
+        </p:txBody>
+      </p:sp>
+      <p:pic>
+        <p:nvPicPr>
+          <p:cNvPr id="55" name="Picture 54" descr="i_arrow-right_o.png"/>
+          <p:cNvPicPr>
+            <a:picLocks noChangeAspect="1"/>
+          </p:cNvPicPr>
+          <p:nvPr/>
+        </p:nvPicPr>
+        <p:blipFill>
+          <a:blip r:embed="rId3"/>
+          <a:stretch>
+            <a:fillRect/>
+          </a:stretch>
+        </p:blipFill>
+        <p:spPr>
+          <a:xfrm>
+            <a:off x="9817200" y="1962000"/>
+            <a:ext cx="251999" cy="251999"/>
+          </a:xfrm>
+          <a:prstGeom prst="rect">
+            <a:avLst/>
+          </a:prstGeom>
+        </p:spPr>
+      </p:pic>
+      <p:sp>
+        <p:nvSpPr>
+          <p:cNvPr id="56" name="Rounded Rectangle 55"/>
+          <p:cNvSpPr/>
+          <p:nvPr/>
+        </p:nvSpPr>
+        <p:spPr>
+          <a:xfrm>
+            <a:off x="10512000" y="1800000"/>
+            <a:ext cx="576000" cy="576000"/>
+          </a:xfrm>
+          <a:prstGeom prst="roundRect">
+            <a:avLst>
+              <a:gd name="adj" fmla="val 50000"/>
+            </a:avLst>
+          </a:prstGeom>
+          <a:solidFill>
+            <a:srgbClr val="E8ECFF"/>
+          </a:solidFill>
+          <a:ln>
+            <a:noFill/>
+          </a:ln>
+          <a:effectLst/>
+        </p:spPr>
+        <p:style>
+          <a:lnRef idx="1">
+            <a:schemeClr val="accent1"/>
+          </a:lnRef>
+          <a:fillRef idx="3">
+            <a:schemeClr val="accent1"/>
+          </a:fillRef>
+          <a:effectRef idx="2">
+            <a:schemeClr val="accent1"/>
+          </a:effectRef>
+          <a:fontRef idx="minor">
+            <a:schemeClr val="lt1"/>
+          </a:fontRef>
+        </p:style>
+        <p:txBody>
+          <a:bodyPr rtlCol="0" anchor="ctr"/>
+          <a:lstStyle/>
+          <a:p>
+            <a:pPr algn="ctr"/>
+          </a:p>
+        </p:txBody>
+      </p:sp>
+      <p:pic>
+        <p:nvPicPr>
+          <p:cNvPr id="57" name="Picture 56" descr="i_layout-dashboard_b.png"/>
+          <p:cNvPicPr>
+            <a:picLocks noChangeAspect="1"/>
+          </p:cNvPicPr>
+          <p:nvPr/>
+        </p:nvPicPr>
+        <p:blipFill>
+          <a:blip r:embed="rId9"/>
+          <a:stretch>
+            <a:fillRect/>
+          </a:stretch>
+        </p:blipFill>
+        <p:spPr>
+          <a:xfrm>
+            <a:off x="10637999" y="1925999"/>
+            <a:ext cx="324000" cy="324000"/>
+          </a:xfrm>
+          <a:prstGeom prst="rect">
+            <a:avLst/>
+          </a:prstGeom>
+        </p:spPr>
+      </p:pic>
+      <p:sp>
+        <p:nvSpPr>
+          <p:cNvPr id="58" name="TextBox 57"/>
+          <p:cNvSpPr txBox="1"/>
+          <p:nvPr/>
+        </p:nvSpPr>
+        <p:spPr>
+          <a:xfrm>
+            <a:off x="10134000" y="2466000"/>
+            <a:ext cx="1332000" cy="251999"/>
+          </a:xfrm>
+          <a:prstGeom prst="rect">
+            <a:avLst/>
+          </a:prstGeom>
+          <a:noFill/>
+        </p:spPr>
+        <p:txBody>
+          <a:bodyPr wrap="square" lIns="0" rIns="0" tIns="0" bIns="0" anchor="t">
+            <a:spAutoFit/>
+          </a:bodyPr>
+          <a:lstStyle/>
+          <a:p>
+            <a:pPr algn="ctr">
+              <a:lnSpc>
+                <a:spcPct val="100000"/>
+              </a:lnSpc>
+            </a:pPr>
+            <a:r>
+              <a:rPr sz="1250" b="0">
+                <a:solidFill>
+                  <a:srgbClr val="141B34"/>
+                </a:solidFill>
+                <a:latin typeface="Intro"/>
+              </a:rPr>
+              <a:t>Дашборд</a:t>
+            </a:r>
+          </a:p>
+        </p:txBody>
+      </p:sp>
+      <p:sp>
+        <p:nvSpPr>
+          <p:cNvPr id="59" name="TextBox 58"/>
+          <p:cNvSpPr txBox="1"/>
+          <p:nvPr/>
+        </p:nvSpPr>
+        <p:spPr>
+          <a:xfrm>
+            <a:off x="10134000" y="2700000"/>
+            <a:ext cx="1332000" cy="216000"/>
+          </a:xfrm>
+          <a:prstGeom prst="rect">
+            <a:avLst/>
+          </a:prstGeom>
+          <a:noFill/>
+        </p:spPr>
+        <p:txBody>
+          <a:bodyPr wrap="square" lIns="0" rIns="0" tIns="0" bIns="0" anchor="t">
+            <a:spAutoFit/>
+          </a:bodyPr>
+          <a:lstStyle/>
+          <a:p>
+            <a:pPr algn="ctr">
+              <a:lnSpc>
+                <a:spcPct val="100000"/>
+              </a:lnSpc>
+            </a:pPr>
+            <a:r>
+              <a:rPr sz="950" b="0">
+                <a:solidFill>
+                  <a:srgbClr val="3D5AFE"/>
+                </a:solidFill>
+                <a:latin typeface="Menlo"/>
+              </a:rPr>
+              <a:t>dashboard.js</a:t>
+            </a:r>
+          </a:p>
+        </p:txBody>
+      </p:sp>
+      <p:sp>
+        <p:nvSpPr>
+          <p:cNvPr id="60" name="TextBox 59"/>
+          <p:cNvSpPr txBox="1"/>
+          <p:nvPr/>
+        </p:nvSpPr>
+        <p:spPr>
+          <a:xfrm>
+            <a:off x="10134000" y="2934000"/>
+            <a:ext cx="1332000" cy="503999"/>
+          </a:xfrm>
+          <a:prstGeom prst="rect">
+            <a:avLst/>
+          </a:prstGeom>
+          <a:noFill/>
+        </p:spPr>
+        <p:txBody>
+          <a:bodyPr wrap="square" lIns="0" rIns="0" tIns="0" bIns="0" anchor="t">
+            <a:spAutoFit/>
+          </a:bodyPr>
+          <a:lstStyle/>
+          <a:p>
+            <a:pPr algn="ctr">
+              <a:lnSpc>
+                <a:spcPct val="105000"/>
+              </a:lnSpc>
+            </a:pPr>
+            <a:r>
+              <a:rPr sz="1000" b="0">
+                <a:solidFill>
+                  <a:srgbClr val="141B34"/>
+                </a:solidFill>
+                <a:latin typeface="Evolventa"/>
+              </a:rPr>
+              <a:t>KPI, фильтры, 4 графика</a:t>
+            </a:r>
+          </a:p>
+        </p:txBody>
+      </p:sp>
+      <p:sp>
+        <p:nvSpPr>
+          <p:cNvPr id="61" name="Rounded Rectangle 60"/>
+          <p:cNvSpPr/>
+          <p:nvPr/>
+        </p:nvSpPr>
+        <p:spPr>
+          <a:xfrm>
+            <a:off x="10260000" y="3438000"/>
+            <a:ext cx="1080000" cy="216000"/>
+          </a:xfrm>
+          <a:prstGeom prst="roundRect">
+            <a:avLst>
+              <a:gd name="adj" fmla="val 50000"/>
+            </a:avLst>
+          </a:prstGeom>
+          <a:solidFill>
+            <a:srgbClr val="F0F0EE"/>
+          </a:solidFill>
+          <a:ln>
+            <a:noFill/>
+          </a:ln>
+          <a:effectLst/>
+        </p:spPr>
+        <p:style>
+          <a:lnRef idx="1">
+            <a:schemeClr val="accent1"/>
+          </a:lnRef>
+          <a:fillRef idx="3">
+            <a:schemeClr val="accent1"/>
+          </a:fillRef>
+          <a:effectRef idx="2">
+            <a:schemeClr val="accent1"/>
+          </a:effectRef>
+          <a:fontRef idx="minor">
+            <a:schemeClr val="lt1"/>
+          </a:fontRef>
+        </p:style>
+        <p:txBody>
+          <a:bodyPr rtlCol="0" anchor="ctr" lIns="36000" rIns="36000" tIns="0" bIns="0"/>
+          <a:lstStyle/>
+          <a:p>
+            <a:pPr algn="ctr"/>
+            <a:r>
+              <a:rPr sz="900">
+                <a:solidFill>
+                  <a:srgbClr val="141B34"/>
+                </a:solidFill>
+                <a:latin typeface="Intro"/>
+              </a:rPr>
+              <a:t>Plotly</a:t>
+            </a:r>
+          </a:p>
+        </p:txBody>
+      </p:sp>
+      <p:sp>
+        <p:nvSpPr>
+          <p:cNvPr id="62" name="Rounded Rectangle 61"/>
+          <p:cNvSpPr/>
+          <p:nvPr/>
+        </p:nvSpPr>
+        <p:spPr>
+          <a:xfrm>
+            <a:off x="270000" y="3924000"/>
+            <a:ext cx="3960000" cy="2448000"/>
+          </a:xfrm>
+          <a:prstGeom prst="roundRect">
+            <a:avLst>
+              <a:gd name="adj" fmla="val 7352"/>
             </a:avLst>
           </a:prstGeom>
           <a:solidFill>
@@ -9846,14 +11021,14 @@
       </p:sp>
       <p:sp>
         <p:nvSpPr>
-          <p:cNvPr id="32" name="TextBox 31"/>
-          <p:cNvSpPr txBox="1"/>
-          <p:nvPr/>
-        </p:nvSpPr>
-        <p:spPr>
-          <a:xfrm>
-            <a:off x="6948000" y="1782000"/>
-            <a:ext cx="4680000" cy="288000"/>
+          <p:cNvPr id="63" name="TextBox 62"/>
+          <p:cNvSpPr txBox="1"/>
+          <p:nvPr/>
+        </p:nvSpPr>
+        <p:spPr>
+          <a:xfrm>
+            <a:off x="468000" y="4050000"/>
+            <a:ext cx="3600000" cy="288000"/>
           </a:xfrm>
           <a:prstGeom prst="rect">
             <a:avLst/>
@@ -9872,35 +11047,570 @@
               </a:lnSpc>
             </a:pPr>
             <a:r>
-              <a:rPr sz="1400" b="0">
+              <a:rPr sz="1300" b="0">
                 <a:solidFill>
                   <a:srgbClr val="3D5AFE"/>
                 </a:solidFill>
                 <a:latin typeface="Intro"/>
               </a:rPr>
-              <a:t>Стек и почему</a:t>
+              <a:t>Скорость ответа</a:t>
+            </a:r>
+          </a:p>
+        </p:txBody>
+      </p:sp>
+      <p:sp>
+        <p:nvSpPr>
+          <p:cNvPr id="64" name="TextBox 63"/>
+          <p:cNvSpPr txBox="1"/>
+          <p:nvPr/>
+        </p:nvSpPr>
+        <p:spPr>
+          <a:xfrm>
+            <a:off x="468000" y="4320000"/>
+            <a:ext cx="3600000" cy="503999"/>
+          </a:xfrm>
+          <a:prstGeom prst="rect">
+            <a:avLst/>
+          </a:prstGeom>
+          <a:noFill/>
+        </p:spPr>
+        <p:txBody>
+          <a:bodyPr wrap="square" lIns="0" rIns="0" tIns="0" bIns="0" anchor="t">
+            <a:spAutoFit/>
+          </a:bodyPr>
+          <a:lstStyle/>
+          <a:p>
+            <a:pPr algn="l">
+              <a:lnSpc>
+                <a:spcPct val="100000"/>
+              </a:lnSpc>
+            </a:pPr>
+            <a:r>
+              <a:rPr sz="3400" b="0">
+                <a:solidFill>
+                  <a:srgbClr val="141B34"/>
+                </a:solidFill>
+                <a:latin typeface="Peace Sans"/>
+              </a:rPr>
+              <a:t>0,46 с</a:t>
+            </a:r>
+          </a:p>
+        </p:txBody>
+      </p:sp>
+      <p:sp>
+        <p:nvSpPr>
+          <p:cNvPr id="65" name="TextBox 64"/>
+          <p:cNvSpPr txBox="1"/>
+          <p:nvPr/>
+        </p:nvSpPr>
+        <p:spPr>
+          <a:xfrm>
+            <a:off x="468000" y="4842000"/>
+            <a:ext cx="3600000" cy="251999"/>
+          </a:xfrm>
+          <a:prstGeom prst="rect">
+            <a:avLst/>
+          </a:prstGeom>
+          <a:noFill/>
+        </p:spPr>
+        <p:txBody>
+          <a:bodyPr wrap="square" lIns="0" rIns="0" tIns="0" bIns="0" anchor="t">
+            <a:spAutoFit/>
+          </a:bodyPr>
+          <a:lstStyle/>
+          <a:p>
+            <a:pPr algn="l">
+              <a:lnSpc>
+                <a:spcPct val="100000"/>
+              </a:lnSpc>
+            </a:pPr>
+            <a:r>
+              <a:rPr sz="1050" b="0">
+                <a:solidFill>
+                  <a:srgbClr val="141B34"/>
+                </a:solidFill>
+                <a:latin typeface="Evolventa"/>
+              </a:rPr>
+              <a:t>от вопроса до готового дашборда, мой замер</a:t>
+            </a:r>
+          </a:p>
+        </p:txBody>
+      </p:sp>
+      <p:sp>
+        <p:nvSpPr>
+          <p:cNvPr id="66" name="Rounded Rectangle 65"/>
+          <p:cNvSpPr/>
+          <p:nvPr/>
+        </p:nvSpPr>
+        <p:spPr>
+          <a:xfrm>
+            <a:off x="468000" y="5209200"/>
+            <a:ext cx="54000" cy="151200"/>
+          </a:xfrm>
+          <a:prstGeom prst="roundRect">
+            <a:avLst>
+              <a:gd name="adj" fmla="val 50000"/>
+            </a:avLst>
+          </a:prstGeom>
+          <a:solidFill>
+            <a:srgbClr val="3D5AFE"/>
+          </a:solidFill>
+          <a:ln>
+            <a:noFill/>
+          </a:ln>
+          <a:effectLst/>
+        </p:spPr>
+        <p:style>
+          <a:lnRef idx="1">
+            <a:schemeClr val="accent1"/>
+          </a:lnRef>
+          <a:fillRef idx="3">
+            <a:schemeClr val="accent1"/>
+          </a:fillRef>
+          <a:effectRef idx="2">
+            <a:schemeClr val="accent1"/>
+          </a:effectRef>
+          <a:fontRef idx="minor">
+            <a:schemeClr val="lt1"/>
+          </a:fontRef>
+        </p:style>
+        <p:txBody>
+          <a:bodyPr rtlCol="0" anchor="ctr"/>
+          <a:lstStyle/>
+          <a:p>
+            <a:pPr algn="ctr"/>
+          </a:p>
+        </p:txBody>
+      </p:sp>
+      <p:sp>
+        <p:nvSpPr>
+          <p:cNvPr id="67" name="TextBox 66"/>
+          <p:cNvSpPr txBox="1"/>
+          <p:nvPr/>
+        </p:nvSpPr>
+        <p:spPr>
+          <a:xfrm>
+            <a:off x="612000" y="5166000"/>
+            <a:ext cx="827999" cy="251999"/>
+          </a:xfrm>
+          <a:prstGeom prst="rect">
+            <a:avLst/>
+          </a:prstGeom>
+          <a:noFill/>
+        </p:spPr>
+        <p:txBody>
+          <a:bodyPr wrap="square" lIns="0" rIns="0" tIns="0" bIns="0" anchor="ctr">
+            <a:spAutoFit/>
+          </a:bodyPr>
+          <a:lstStyle/>
+          <a:p>
+            <a:pPr algn="l">
+              <a:lnSpc>
+                <a:spcPct val="100000"/>
+              </a:lnSpc>
+            </a:pPr>
+            <a:r>
+              <a:rPr sz="1050" b="0">
+                <a:solidFill>
+                  <a:srgbClr val="141B34"/>
+                </a:solidFill>
+                <a:latin typeface="Intro"/>
+              </a:rPr>
+              <a:t>2 мс</a:t>
+            </a:r>
+          </a:p>
+        </p:txBody>
+      </p:sp>
+      <p:sp>
+        <p:nvSpPr>
+          <p:cNvPr id="68" name="TextBox 67"/>
+          <p:cNvSpPr txBox="1"/>
+          <p:nvPr/>
+        </p:nvSpPr>
+        <p:spPr>
+          <a:xfrm>
+            <a:off x="2376000" y="5166000"/>
+            <a:ext cx="1764000" cy="251999"/>
+          </a:xfrm>
+          <a:prstGeom prst="rect">
+            <a:avLst/>
+          </a:prstGeom>
+          <a:noFill/>
+        </p:spPr>
+        <p:txBody>
+          <a:bodyPr wrap="square" lIns="0" rIns="0" tIns="0" bIns="0" anchor="ctr">
+            <a:spAutoFit/>
+          </a:bodyPr>
+          <a:lstStyle/>
+          <a:p>
+            <a:pPr algn="l">
+              <a:lnSpc>
+                <a:spcPct val="100000"/>
+              </a:lnSpc>
+            </a:pPr>
+            <a:r>
+              <a:rPr sz="1050" b="0">
+                <a:solidFill>
+                  <a:srgbClr val="141B34"/>
+                </a:solidFill>
+                <a:latin typeface="Evolventa"/>
+              </a:rPr>
+              <a:t>разбор фразы</a:t>
+            </a:r>
+          </a:p>
+        </p:txBody>
+      </p:sp>
+      <p:sp>
+        <p:nvSpPr>
+          <p:cNvPr id="69" name="Rounded Rectangle 68"/>
+          <p:cNvSpPr/>
+          <p:nvPr/>
+        </p:nvSpPr>
+        <p:spPr>
+          <a:xfrm>
+            <a:off x="468000" y="5569200"/>
+            <a:ext cx="830769" cy="151200"/>
+          </a:xfrm>
+          <a:prstGeom prst="roundRect">
+            <a:avLst>
+              <a:gd name="adj" fmla="val 47619"/>
+            </a:avLst>
+          </a:prstGeom>
+          <a:solidFill>
+            <a:srgbClr val="FF8A3D"/>
+          </a:solidFill>
+          <a:ln>
+            <a:noFill/>
+          </a:ln>
+          <a:effectLst/>
+        </p:spPr>
+        <p:style>
+          <a:lnRef idx="1">
+            <a:schemeClr val="accent1"/>
+          </a:lnRef>
+          <a:fillRef idx="3">
+            <a:schemeClr val="accent1"/>
+          </a:fillRef>
+          <a:effectRef idx="2">
+            <a:schemeClr val="accent1"/>
+          </a:effectRef>
+          <a:fontRef idx="minor">
+            <a:schemeClr val="lt1"/>
+          </a:fontRef>
+        </p:style>
+        <p:txBody>
+          <a:bodyPr rtlCol="0" anchor="ctr"/>
+          <a:lstStyle/>
+          <a:p>
+            <a:pPr algn="ctr"/>
+          </a:p>
+        </p:txBody>
+      </p:sp>
+      <p:sp>
+        <p:nvSpPr>
+          <p:cNvPr id="70" name="TextBox 69"/>
+          <p:cNvSpPr txBox="1"/>
+          <p:nvPr/>
+        </p:nvSpPr>
+        <p:spPr>
+          <a:xfrm>
+            <a:off x="1388769" y="5526000"/>
+            <a:ext cx="827999" cy="251999"/>
+          </a:xfrm>
+          <a:prstGeom prst="rect">
+            <a:avLst/>
+          </a:prstGeom>
+          <a:noFill/>
+        </p:spPr>
+        <p:txBody>
+          <a:bodyPr wrap="square" lIns="0" rIns="0" tIns="0" bIns="0" anchor="ctr">
+            <a:spAutoFit/>
+          </a:bodyPr>
+          <a:lstStyle/>
+          <a:p>
+            <a:pPr algn="l">
+              <a:lnSpc>
+                <a:spcPct val="100000"/>
+              </a:lnSpc>
+            </a:pPr>
+            <a:r>
+              <a:rPr sz="1050" b="0">
+                <a:solidFill>
+                  <a:srgbClr val="141B34"/>
+                </a:solidFill>
+                <a:latin typeface="Intro"/>
+              </a:rPr>
+              <a:t>200 мс</a:t>
+            </a:r>
+          </a:p>
+        </p:txBody>
+      </p:sp>
+      <p:sp>
+        <p:nvSpPr>
+          <p:cNvPr id="71" name="TextBox 70"/>
+          <p:cNvSpPr txBox="1"/>
+          <p:nvPr/>
+        </p:nvSpPr>
+        <p:spPr>
+          <a:xfrm>
+            <a:off x="2376000" y="5526000"/>
+            <a:ext cx="1764000" cy="251999"/>
+          </a:xfrm>
+          <a:prstGeom prst="rect">
+            <a:avLst/>
+          </a:prstGeom>
+          <a:noFill/>
+        </p:spPr>
+        <p:txBody>
+          <a:bodyPr wrap="square" lIns="0" rIns="0" tIns="0" bIns="0" anchor="ctr">
+            <a:spAutoFit/>
+          </a:bodyPr>
+          <a:lstStyle/>
+          <a:p>
+            <a:pPr algn="l">
+              <a:lnSpc>
+                <a:spcPct val="100000"/>
+              </a:lnSpc>
+            </a:pPr>
+            <a:r>
+              <a:rPr sz="1050" b="0">
+                <a:solidFill>
+                  <a:srgbClr val="141B34"/>
+                </a:solidFill>
+                <a:latin typeface="Evolventa"/>
+              </a:rPr>
+              <a:t>SQL и выгрузка</a:t>
+            </a:r>
+          </a:p>
+        </p:txBody>
+      </p:sp>
+      <p:sp>
+        <p:nvSpPr>
+          <p:cNvPr id="72" name="Rounded Rectangle 71"/>
+          <p:cNvSpPr/>
+          <p:nvPr/>
+        </p:nvSpPr>
+        <p:spPr>
+          <a:xfrm>
+            <a:off x="468000" y="5929200"/>
+            <a:ext cx="1080000" cy="151200"/>
+          </a:xfrm>
+          <a:prstGeom prst="roundRect">
+            <a:avLst>
+              <a:gd name="adj" fmla="val 47619"/>
+            </a:avLst>
+          </a:prstGeom>
+          <a:solidFill>
+            <a:srgbClr val="FF8A3D"/>
+          </a:solidFill>
+          <a:ln>
+            <a:noFill/>
+          </a:ln>
+          <a:effectLst/>
+        </p:spPr>
+        <p:style>
+          <a:lnRef idx="1">
+            <a:schemeClr val="accent1"/>
+          </a:lnRef>
+          <a:fillRef idx="3">
+            <a:schemeClr val="accent1"/>
+          </a:fillRef>
+          <a:effectRef idx="2">
+            <a:schemeClr val="accent1"/>
+          </a:effectRef>
+          <a:fontRef idx="minor">
+            <a:schemeClr val="lt1"/>
+          </a:fontRef>
+        </p:style>
+        <p:txBody>
+          <a:bodyPr rtlCol="0" anchor="ctr"/>
+          <a:lstStyle/>
+          <a:p>
+            <a:pPr algn="ctr"/>
+          </a:p>
+        </p:txBody>
+      </p:sp>
+      <p:sp>
+        <p:nvSpPr>
+          <p:cNvPr id="73" name="TextBox 72"/>
+          <p:cNvSpPr txBox="1"/>
+          <p:nvPr/>
+        </p:nvSpPr>
+        <p:spPr>
+          <a:xfrm>
+            <a:off x="1638000" y="5886000"/>
+            <a:ext cx="827999" cy="251999"/>
+          </a:xfrm>
+          <a:prstGeom prst="rect">
+            <a:avLst/>
+          </a:prstGeom>
+          <a:noFill/>
+        </p:spPr>
+        <p:txBody>
+          <a:bodyPr wrap="square" lIns="0" rIns="0" tIns="0" bIns="0" anchor="ctr">
+            <a:spAutoFit/>
+          </a:bodyPr>
+          <a:lstStyle/>
+          <a:p>
+            <a:pPr algn="l">
+              <a:lnSpc>
+                <a:spcPct val="100000"/>
+              </a:lnSpc>
+            </a:pPr>
+            <a:r>
+              <a:rPr sz="1050" b="0">
+                <a:solidFill>
+                  <a:srgbClr val="141B34"/>
+                </a:solidFill>
+                <a:latin typeface="Intro"/>
+              </a:rPr>
+              <a:t>260 мс</a:t>
+            </a:r>
+          </a:p>
+        </p:txBody>
+      </p:sp>
+      <p:sp>
+        <p:nvSpPr>
+          <p:cNvPr id="74" name="TextBox 73"/>
+          <p:cNvSpPr txBox="1"/>
+          <p:nvPr/>
+        </p:nvSpPr>
+        <p:spPr>
+          <a:xfrm>
+            <a:off x="2376000" y="5886000"/>
+            <a:ext cx="1764000" cy="251999"/>
+          </a:xfrm>
+          <a:prstGeom prst="rect">
+            <a:avLst/>
+          </a:prstGeom>
+          <a:noFill/>
+        </p:spPr>
+        <p:txBody>
+          <a:bodyPr wrap="square" lIns="0" rIns="0" tIns="0" bIns="0" anchor="ctr">
+            <a:spAutoFit/>
+          </a:bodyPr>
+          <a:lstStyle/>
+          <a:p>
+            <a:pPr algn="l">
+              <a:lnSpc>
+                <a:spcPct val="100000"/>
+              </a:lnSpc>
+            </a:pPr>
+            <a:r>
+              <a:rPr sz="1050" b="0">
+                <a:solidFill>
+                  <a:srgbClr val="141B34"/>
+                </a:solidFill>
+                <a:latin typeface="Evolventa"/>
+              </a:rPr>
+              <a:t>упаковка для браузера</a:t>
+            </a:r>
+          </a:p>
+        </p:txBody>
+      </p:sp>
+      <p:sp>
+        <p:nvSpPr>
+          <p:cNvPr id="75" name="Rounded Rectangle 74"/>
+          <p:cNvSpPr/>
+          <p:nvPr/>
+        </p:nvSpPr>
+        <p:spPr>
+          <a:xfrm>
+            <a:off x="4356000" y="3924000"/>
+            <a:ext cx="3780000" cy="2448000"/>
+          </a:xfrm>
+          <a:prstGeom prst="roundRect">
+            <a:avLst>
+              <a:gd name="adj" fmla="val 7352"/>
+            </a:avLst>
+          </a:prstGeom>
+          <a:solidFill>
+            <a:srgbClr val="FFFFFF"/>
+          </a:solidFill>
+          <a:ln>
+            <a:noFill/>
+          </a:ln>
+          <a:effectLst/>
+        </p:spPr>
+        <p:style>
+          <a:lnRef idx="1">
+            <a:schemeClr val="accent1"/>
+          </a:lnRef>
+          <a:fillRef idx="3">
+            <a:schemeClr val="accent1"/>
+          </a:fillRef>
+          <a:effectRef idx="2">
+            <a:schemeClr val="accent1"/>
+          </a:effectRef>
+          <a:fontRef idx="minor">
+            <a:schemeClr val="lt1"/>
+          </a:fontRef>
+        </p:style>
+        <p:txBody>
+          <a:bodyPr rtlCol="0" anchor="ctr"/>
+          <a:lstStyle/>
+          <a:p>
+            <a:pPr algn="ctr"/>
+          </a:p>
+        </p:txBody>
+      </p:sp>
+      <p:sp>
+        <p:nvSpPr>
+          <p:cNvPr id="76" name="TextBox 75"/>
+          <p:cNvSpPr txBox="1"/>
+          <p:nvPr/>
+        </p:nvSpPr>
+        <p:spPr>
+          <a:xfrm>
+            <a:off x="4554000" y="4050000"/>
+            <a:ext cx="3420000" cy="288000"/>
+          </a:xfrm>
+          <a:prstGeom prst="rect">
+            <a:avLst/>
+          </a:prstGeom>
+          <a:noFill/>
+        </p:spPr>
+        <p:txBody>
+          <a:bodyPr wrap="square" lIns="0" rIns="0" tIns="0" bIns="0" anchor="t">
+            <a:spAutoFit/>
+          </a:bodyPr>
+          <a:lstStyle/>
+          <a:p>
+            <a:pPr algn="l">
+              <a:lnSpc>
+                <a:spcPct val="100000"/>
+              </a:lnSpc>
+            </a:pPr>
+            <a:r>
+              <a:rPr sz="1300" b="0">
+                <a:solidFill>
+                  <a:srgbClr val="3D5AFE"/>
+                </a:solidFill>
+                <a:latin typeface="Intro"/>
+              </a:rPr>
+              <a:t>Дашборд хранится как состояние</a:t>
             </a:r>
           </a:p>
         </p:txBody>
       </p:sp>
       <p:pic>
         <p:nvPicPr>
-          <p:cNvPr id="33" name="Picture 32" descr="i_server_b.png"/>
+          <p:cNvPr id="77" name="Picture 76" descr="i_check_b.png"/>
           <p:cNvPicPr>
             <a:picLocks noChangeAspect="1"/>
           </p:cNvPicPr>
           <p:nvPr/>
         </p:nvPicPr>
         <p:blipFill>
-          <a:blip r:embed="rId2"/>
+          <a:blip r:embed="rId10"/>
           <a:stretch>
             <a:fillRect/>
           </a:stretch>
         </p:blipFill>
         <p:spPr>
           <a:xfrm>
-            <a:off x="6948000" y="2160000"/>
-            <a:ext cx="306000" cy="306000"/>
+            <a:off x="4554000" y="4410000"/>
+            <a:ext cx="216000" cy="216000"/>
           </a:xfrm>
           <a:prstGeom prst="rect">
             <a:avLst/>
@@ -9909,22 +11619,22 @@
       </p:pic>
       <p:sp>
         <p:nvSpPr>
-          <p:cNvPr id="34" name="TextBox 33"/>
-          <p:cNvSpPr txBox="1"/>
-          <p:nvPr/>
-        </p:nvSpPr>
-        <p:spPr>
-          <a:xfrm>
-            <a:off x="7380000" y="2142000"/>
-            <a:ext cx="4320000" cy="251999"/>
-          </a:xfrm>
-          <a:prstGeom prst="rect">
-            <a:avLst/>
-          </a:prstGeom>
-          <a:noFill/>
-        </p:spPr>
-        <p:txBody>
-          <a:bodyPr wrap="square" lIns="0" rIns="0" tIns="0" bIns="0" anchor="t">
+          <p:cNvPr id="78" name="TextBox 77"/>
+          <p:cNvSpPr txBox="1"/>
+          <p:nvPr/>
+        </p:nvSpPr>
+        <p:spPr>
+          <a:xfrm>
+            <a:off x="4860000" y="4392000"/>
+            <a:ext cx="3168000" cy="251999"/>
+          </a:xfrm>
+          <a:prstGeom prst="rect">
+            <a:avLst/>
+          </a:prstGeom>
+          <a:noFill/>
+        </p:spPr>
+        <p:txBody>
+          <a:bodyPr wrap="square" lIns="0" rIns="0" tIns="0" bIns="0" anchor="ctr">
             <a:spAutoFit/>
           </a:bodyPr>
           <a:lstStyle/>
@@ -9935,74 +11645,35 @@
               </a:lnSpc>
             </a:pPr>
             <a:r>
-              <a:rPr sz="1200" b="0">
+              <a:rPr sz="1150" b="0">
                 <a:solidFill>
                   <a:srgbClr val="141B34"/>
                 </a:solidFill>
-                <a:latin typeface="Intro"/>
-              </a:rPr>
-              <a:t>FastAPI</a:t>
-            </a:r>
-          </a:p>
-        </p:txBody>
-      </p:sp>
-      <p:sp>
-        <p:nvSpPr>
-          <p:cNvPr id="35" name="TextBox 34"/>
-          <p:cNvSpPr txBox="1"/>
-          <p:nvPr/>
-        </p:nvSpPr>
-        <p:spPr>
-          <a:xfrm>
-            <a:off x="7380000" y="2383200"/>
-            <a:ext cx="4320000" cy="324000"/>
-          </a:xfrm>
-          <a:prstGeom prst="rect">
-            <a:avLst/>
-          </a:prstGeom>
-          <a:noFill/>
-        </p:spPr>
-        <p:txBody>
-          <a:bodyPr wrap="square" lIns="0" rIns="0" tIns="0" bIns="0" anchor="t">
-            <a:spAutoFit/>
-          </a:bodyPr>
-          <a:lstStyle/>
-          <a:p>
-            <a:pPr algn="l">
-              <a:lnSpc>
-                <a:spcPct val="100000"/>
-              </a:lnSpc>
-            </a:pPr>
-            <a:r>
-              <a:rPr sz="1050" b="0">
-                <a:solidFill>
-                  <a:srgbClr val="141B34"/>
-                </a:solidFill>
                 <a:latin typeface="Evolventa"/>
               </a:rPr>
-              <a:t>чат и API в одном сервисе</a:t>
+              <a:t>запрос и команда</a:t>
             </a:r>
           </a:p>
         </p:txBody>
       </p:sp>
       <p:pic>
         <p:nvPicPr>
-          <p:cNvPr id="36" name="Picture 35" descr="i_database_b.png"/>
+          <p:cNvPr id="79" name="Picture 78" descr="i_check_b.png"/>
           <p:cNvPicPr>
             <a:picLocks noChangeAspect="1"/>
           </p:cNvPicPr>
           <p:nvPr/>
         </p:nvPicPr>
         <p:blipFill>
-          <a:blip r:embed="rId3"/>
+          <a:blip r:embed="rId10"/>
           <a:stretch>
             <a:fillRect/>
           </a:stretch>
         </p:blipFill>
         <p:spPr>
           <a:xfrm>
-            <a:off x="6948000" y="2844000"/>
-            <a:ext cx="306000" cy="306000"/>
+            <a:off x="4554000" y="4690800"/>
+            <a:ext cx="216000" cy="216000"/>
           </a:xfrm>
           <a:prstGeom prst="rect">
             <a:avLst/>
@@ -10011,22 +11682,22 @@
       </p:pic>
       <p:sp>
         <p:nvSpPr>
-          <p:cNvPr id="37" name="TextBox 36"/>
-          <p:cNvSpPr txBox="1"/>
-          <p:nvPr/>
-        </p:nvSpPr>
-        <p:spPr>
-          <a:xfrm>
-            <a:off x="7380000" y="2826000"/>
-            <a:ext cx="4320000" cy="251999"/>
-          </a:xfrm>
-          <a:prstGeom prst="rect">
-            <a:avLst/>
-          </a:prstGeom>
-          <a:noFill/>
-        </p:spPr>
-        <p:txBody>
-          <a:bodyPr wrap="square" lIns="0" rIns="0" tIns="0" bIns="0" anchor="t">
+          <p:cNvPr id="80" name="TextBox 79"/>
+          <p:cNvSpPr txBox="1"/>
+          <p:nvPr/>
+        </p:nvSpPr>
+        <p:spPr>
+          <a:xfrm>
+            <a:off x="4860000" y="4672799"/>
+            <a:ext cx="3168000" cy="251999"/>
+          </a:xfrm>
+          <a:prstGeom prst="rect">
+            <a:avLst/>
+          </a:prstGeom>
+          <a:noFill/>
+        </p:spPr>
+        <p:txBody>
+          <a:bodyPr wrap="square" lIns="0" rIns="0" tIns="0" bIns="0" anchor="ctr">
             <a:spAutoFit/>
           </a:bodyPr>
           <a:lstStyle/>
@@ -10037,74 +11708,35 @@
               </a:lnSpc>
             </a:pPr>
             <a:r>
-              <a:rPr sz="1200" b="0">
+              <a:rPr sz="1150" b="0">
                 <a:solidFill>
                   <a:srgbClr val="141B34"/>
                 </a:solidFill>
-                <a:latin typeface="Intro"/>
-              </a:rPr>
-              <a:t>DuckDB или PostgreSQL</a:t>
-            </a:r>
-          </a:p>
-        </p:txBody>
-      </p:sp>
-      <p:sp>
-        <p:nvSpPr>
-          <p:cNvPr id="38" name="TextBox 37"/>
-          <p:cNvSpPr txBox="1"/>
-          <p:nvPr/>
-        </p:nvSpPr>
-        <p:spPr>
-          <a:xfrm>
-            <a:off x="7380000" y="3067200"/>
-            <a:ext cx="4320000" cy="324000"/>
-          </a:xfrm>
-          <a:prstGeom prst="rect">
-            <a:avLst/>
-          </a:prstGeom>
-          <a:noFill/>
-        </p:spPr>
-        <p:txBody>
-          <a:bodyPr wrap="square" lIns="0" rIns="0" tIns="0" bIns="0" anchor="t">
-            <a:spAutoFit/>
-          </a:bodyPr>
-          <a:lstStyle/>
-          <a:p>
-            <a:pPr algn="l">
-              <a:lnSpc>
-                <a:spcPct val="100000"/>
-              </a:lnSpc>
-            </a:pPr>
-            <a:r>
-              <a:rPr sz="1050" b="0">
-                <a:solidFill>
-                  <a:srgbClr val="141B34"/>
-                </a:solidFill>
                 <a:latin typeface="Evolventa"/>
               </a:rPr>
-              <a:t>встроенная база без установки, Postgres по переменной</a:t>
+              <a:t>единая таблица с вычислениями</a:t>
             </a:r>
           </a:p>
         </p:txBody>
       </p:sp>
       <p:pic>
         <p:nvPicPr>
-          <p:cNvPr id="39" name="Picture 38" descr="i_table_b.png"/>
+          <p:cNvPr id="81" name="Picture 80" descr="i_check_b.png"/>
           <p:cNvPicPr>
             <a:picLocks noChangeAspect="1"/>
           </p:cNvPicPr>
           <p:nvPr/>
         </p:nvPicPr>
         <p:blipFill>
-          <a:blip r:embed="rId4"/>
+          <a:blip r:embed="rId10"/>
           <a:stretch>
             <a:fillRect/>
           </a:stretch>
         </p:blipFill>
         <p:spPr>
           <a:xfrm>
-            <a:off x="6948000" y="3528000"/>
-            <a:ext cx="306000" cy="306000"/>
+            <a:off x="4554000" y="4971600"/>
+            <a:ext cx="216000" cy="216000"/>
           </a:xfrm>
           <a:prstGeom prst="rect">
             <a:avLst/>
@@ -10113,22 +11745,22 @@
       </p:pic>
       <p:sp>
         <p:nvSpPr>
-          <p:cNvPr id="40" name="TextBox 39"/>
-          <p:cNvSpPr txBox="1"/>
-          <p:nvPr/>
-        </p:nvSpPr>
-        <p:spPr>
-          <a:xfrm>
-            <a:off x="7380000" y="3510000"/>
-            <a:ext cx="4320000" cy="251999"/>
-          </a:xfrm>
-          <a:prstGeom prst="rect">
-            <a:avLst/>
-          </a:prstGeom>
-          <a:noFill/>
-        </p:spPr>
-        <p:txBody>
-          <a:bodyPr wrap="square" lIns="0" rIns="0" tIns="0" bIns="0" anchor="t">
+          <p:cNvPr id="82" name="TextBox 81"/>
+          <p:cNvSpPr txBox="1"/>
+          <p:nvPr/>
+        </p:nvSpPr>
+        <p:spPr>
+          <a:xfrm>
+            <a:off x="4860000" y="4953599"/>
+            <a:ext cx="3168000" cy="251999"/>
+          </a:xfrm>
+          <a:prstGeom prst="rect">
+            <a:avLst/>
+          </a:prstGeom>
+          <a:noFill/>
+        </p:spPr>
+        <p:txBody>
+          <a:bodyPr wrap="square" lIns="0" rIns="0" tIns="0" bIns="0" anchor="ctr">
             <a:spAutoFit/>
           </a:bodyPr>
           <a:lstStyle/>
@@ -10139,74 +11771,35 @@
               </a:lnSpc>
             </a:pPr>
             <a:r>
-              <a:rPr sz="1200" b="0">
+              <a:rPr sz="1150" b="0">
                 <a:solidFill>
                   <a:srgbClr val="141B34"/>
                 </a:solidFill>
-                <a:latin typeface="Intro"/>
-              </a:rPr>
-              <a:t>pandas</a:t>
-            </a:r>
-          </a:p>
-        </p:txBody>
-      </p:sp>
-      <p:sp>
-        <p:nvSpPr>
-          <p:cNvPr id="41" name="TextBox 40"/>
-          <p:cNvSpPr txBox="1"/>
-          <p:nvPr/>
-        </p:nvSpPr>
-        <p:spPr>
-          <a:xfrm>
-            <a:off x="7380000" y="3751200"/>
-            <a:ext cx="4320000" cy="324000"/>
-          </a:xfrm>
-          <a:prstGeom prst="rect">
-            <a:avLst/>
-          </a:prstGeom>
-          <a:noFill/>
-        </p:spPr>
-        <p:txBody>
-          <a:bodyPr wrap="square" lIns="0" rIns="0" tIns="0" bIns="0" anchor="t">
-            <a:spAutoFit/>
-          </a:bodyPr>
-          <a:lstStyle/>
-          <a:p>
-            <a:pPr algn="l">
-              <a:lnSpc>
-                <a:spcPct val="100000"/>
-              </a:lnSpc>
-            </a:pPr>
-            <a:r>
-              <a:rPr sz="1050" b="0">
-                <a:solidFill>
-                  <a:srgbClr val="141B34"/>
-                </a:solidFill>
                 <a:latin typeface="Evolventa"/>
               </a:rPr>
-              <a:t>вычисления после выгрузки, как требует кейс</a:t>
+              <a:t>настройки 4 графиков</a:t>
             </a:r>
           </a:p>
         </p:txBody>
       </p:sp>
       <p:pic>
         <p:nvPicPr>
-          <p:cNvPr id="42" name="Picture 41" descr="i_layout-dashboard_b.png"/>
+          <p:cNvPr id="83" name="Picture 82" descr="i_check_b.png"/>
           <p:cNvPicPr>
             <a:picLocks noChangeAspect="1"/>
           </p:cNvPicPr>
           <p:nvPr/>
         </p:nvPicPr>
         <p:blipFill>
-          <a:blip r:embed="rId5"/>
+          <a:blip r:embed="rId10"/>
           <a:stretch>
             <a:fillRect/>
           </a:stretch>
         </p:blipFill>
         <p:spPr>
           <a:xfrm>
-            <a:off x="6948000" y="4212000"/>
-            <a:ext cx="306000" cy="306000"/>
+            <a:off x="4554000" y="5252399"/>
+            <a:ext cx="216000" cy="216000"/>
           </a:xfrm>
           <a:prstGeom prst="rect">
             <a:avLst/>
@@ -10215,22 +11808,22 @@
       </p:pic>
       <p:sp>
         <p:nvSpPr>
-          <p:cNvPr id="43" name="TextBox 42"/>
-          <p:cNvSpPr txBox="1"/>
-          <p:nvPr/>
-        </p:nvSpPr>
-        <p:spPr>
-          <a:xfrm>
-            <a:off x="7380000" y="4194000"/>
-            <a:ext cx="4320000" cy="251999"/>
-          </a:xfrm>
-          <a:prstGeom prst="rect">
-            <a:avLst/>
-          </a:prstGeom>
-          <a:noFill/>
-        </p:spPr>
-        <p:txBody>
-          <a:bodyPr wrap="square" lIns="0" rIns="0" tIns="0" bIns="0" anchor="t">
+          <p:cNvPr id="84" name="TextBox 83"/>
+          <p:cNvSpPr txBox="1"/>
+          <p:nvPr/>
+        </p:nvSpPr>
+        <p:spPr>
+          <a:xfrm>
+            <a:off x="4860000" y="5234399"/>
+            <a:ext cx="3168000" cy="251999"/>
+          </a:xfrm>
+          <a:prstGeom prst="rect">
+            <a:avLst/>
+          </a:prstGeom>
+          <a:noFill/>
+        </p:spPr>
+        <p:txBody>
+          <a:bodyPr wrap="square" lIns="0" rIns="0" tIns="0" bIns="0" anchor="ctr">
             <a:spAutoFit/>
           </a:bodyPr>
           <a:lstStyle/>
@@ -10241,74 +11834,35 @@
               </a:lnSpc>
             </a:pPr>
             <a:r>
-              <a:rPr sz="1200" b="0">
+              <a:rPr sz="1150" b="0">
                 <a:solidFill>
                   <a:srgbClr val="141B34"/>
                 </a:solidFill>
-                <a:latin typeface="Intro"/>
-              </a:rPr>
-              <a:t>Plotly</a:t>
-            </a:r>
-          </a:p>
-        </p:txBody>
-      </p:sp>
-      <p:sp>
-        <p:nvSpPr>
-          <p:cNvPr id="44" name="TextBox 43"/>
-          <p:cNvSpPr txBox="1"/>
-          <p:nvPr/>
-        </p:nvSpPr>
-        <p:spPr>
-          <a:xfrm>
-            <a:off x="7380000" y="4435200"/>
-            <a:ext cx="4320000" cy="324000"/>
-          </a:xfrm>
-          <a:prstGeom prst="rect">
-            <a:avLst/>
-          </a:prstGeom>
-          <a:noFill/>
-        </p:spPr>
-        <p:txBody>
-          <a:bodyPr wrap="square" lIns="0" rIns="0" tIns="0" bIns="0" anchor="t">
-            <a:spAutoFit/>
-          </a:bodyPr>
-          <a:lstStyle/>
-          <a:p>
-            <a:pPr algn="l">
-              <a:lnSpc>
-                <a:spcPct val="100000"/>
-              </a:lnSpc>
-            </a:pPr>
-            <a:r>
-              <a:rPr sz="1050" b="0">
-                <a:solidFill>
-                  <a:srgbClr val="141B34"/>
-                </a:solidFill>
                 <a:latin typeface="Evolventa"/>
               </a:rPr>
-              <a:t>зум, подсказки, легенда, работает без интернета</a:t>
+              <a:t>фильтры и переключатели</a:t>
             </a:r>
           </a:p>
         </p:txBody>
       </p:sp>
       <p:pic>
         <p:nvPicPr>
-          <p:cNvPr id="45" name="Picture 44" descr="i_bot_b.png"/>
+          <p:cNvPr id="85" name="Picture 84" descr="i_check_b.png"/>
           <p:cNvPicPr>
             <a:picLocks noChangeAspect="1"/>
           </p:cNvPicPr>
           <p:nvPr/>
         </p:nvPicPr>
         <p:blipFill>
-          <a:blip r:embed="rId6"/>
+          <a:blip r:embed="rId10"/>
           <a:stretch>
             <a:fillRect/>
           </a:stretch>
         </p:blipFill>
         <p:spPr>
           <a:xfrm>
-            <a:off x="6948000" y="4896000"/>
-            <a:ext cx="306000" cy="306000"/>
+            <a:off x="4554000" y="5533199"/>
+            <a:ext cx="216000" cy="216000"/>
           </a:xfrm>
           <a:prstGeom prst="rect">
             <a:avLst/>
@@ -10317,14 +11871,53 @@
       </p:pic>
       <p:sp>
         <p:nvSpPr>
-          <p:cNvPr id="46" name="TextBox 45"/>
-          <p:cNvSpPr txBox="1"/>
-          <p:nvPr/>
-        </p:nvSpPr>
-        <p:spPr>
-          <a:xfrm>
-            <a:off x="7380000" y="4878000"/>
-            <a:ext cx="4320000" cy="251999"/>
+          <p:cNvPr id="86" name="TextBox 85"/>
+          <p:cNvSpPr txBox="1"/>
+          <p:nvPr/>
+        </p:nvSpPr>
+        <p:spPr>
+          <a:xfrm>
+            <a:off x="4860000" y="5515199"/>
+            <a:ext cx="3168000" cy="251999"/>
+          </a:xfrm>
+          <a:prstGeom prst="rect">
+            <a:avLst/>
+          </a:prstGeom>
+          <a:noFill/>
+        </p:spPr>
+        <p:txBody>
+          <a:bodyPr wrap="square" lIns="0" rIns="0" tIns="0" bIns="0" anchor="ctr">
+            <a:spAutoFit/>
+          </a:bodyPr>
+          <a:lstStyle/>
+          <a:p>
+            <a:pPr algn="l">
+              <a:lnSpc>
+                <a:spcPct val="100000"/>
+              </a:lnSpc>
+            </a:pPr>
+            <a:r>
+              <a:rPr sz="1150" b="0">
+                <a:solidFill>
+                  <a:srgbClr val="141B34"/>
+                </a:solidFill>
+                <a:latin typeface="Evolventa"/>
+              </a:rPr>
+              <a:t>20 последних версий</a:t>
+            </a:r>
+          </a:p>
+        </p:txBody>
+      </p:sp>
+      <p:sp>
+        <p:nvSpPr>
+          <p:cNvPr id="87" name="TextBox 86"/>
+          <p:cNvSpPr txBox="1"/>
+          <p:nvPr/>
+        </p:nvSpPr>
+        <p:spPr>
+          <a:xfrm>
+            <a:off x="4554000" y="5832000"/>
+            <a:ext cx="3456000" cy="468000"/>
           </a:xfrm>
           <a:prstGeom prst="rect">
             <a:avLst/>
@@ -10343,27 +11936,73 @@
               </a:lnSpc>
             </a:pPr>
             <a:r>
-              <a:rPr sz="1200" b="0">
+              <a:rPr sz="1050" b="0">
                 <a:solidFill>
                   <a:srgbClr val="141B34"/>
                 </a:solidFill>
                 <a:latin typeface="Intro"/>
               </a:rPr>
-              <a:t>Ollama или Groq</a:t>
-            </a:r>
-          </a:p>
-        </p:txBody>
-      </p:sp>
-      <p:sp>
-        <p:nvSpPr>
-          <p:cNvPr id="47" name="TextBox 46"/>
-          <p:cNvSpPr txBox="1"/>
-          <p:nvPr/>
-        </p:nvSpPr>
-        <p:spPr>
-          <a:xfrm>
-            <a:off x="7380000" y="5119200"/>
-            <a:ext cx="4320000" cy="324000"/>
+              <a:t>Отсюда бесплатно сохранение, отмена шага, копия и возврат в том же виде</a:t>
+            </a:r>
+          </a:p>
+        </p:txBody>
+      </p:sp>
+      <p:sp>
+        <p:nvSpPr>
+          <p:cNvPr id="88" name="Rounded Rectangle 87"/>
+          <p:cNvSpPr/>
+          <p:nvPr/>
+        </p:nvSpPr>
+        <p:spPr>
+          <a:xfrm>
+            <a:off x="8262000" y="3924000"/>
+            <a:ext cx="3654000" cy="2448000"/>
+          </a:xfrm>
+          <a:prstGeom prst="roundRect">
+            <a:avLst>
+              <a:gd name="adj" fmla="val 7352"/>
+            </a:avLst>
+          </a:prstGeom>
+          <a:solidFill>
+            <a:srgbClr val="FFFFFF"/>
+          </a:solidFill>
+          <a:ln>
+            <a:noFill/>
+          </a:ln>
+          <a:effectLst/>
+        </p:spPr>
+        <p:style>
+          <a:lnRef idx="1">
+            <a:schemeClr val="accent1"/>
+          </a:lnRef>
+          <a:fillRef idx="3">
+            <a:schemeClr val="accent1"/>
+          </a:fillRef>
+          <a:effectRef idx="2">
+            <a:schemeClr val="accent1"/>
+          </a:effectRef>
+          <a:fontRef idx="minor">
+            <a:schemeClr val="lt1"/>
+          </a:fontRef>
+        </p:style>
+        <p:txBody>
+          <a:bodyPr rtlCol="0" anchor="ctr"/>
+          <a:lstStyle/>
+          <a:p>
+            <a:pPr algn="ctr"/>
+          </a:p>
+        </p:txBody>
+      </p:sp>
+      <p:sp>
+        <p:nvSpPr>
+          <p:cNvPr id="89" name="TextBox 88"/>
+          <p:cNvSpPr txBox="1"/>
+          <p:nvPr/>
+        </p:nvSpPr>
+        <p:spPr>
+          <a:xfrm>
+            <a:off x="8460000" y="4050000"/>
+            <a:ext cx="3311999" cy="288000"/>
           </a:xfrm>
           <a:prstGeom prst="rect">
             <a:avLst/>
@@ -10382,59 +12021,113 @@
               </a:lnSpc>
             </a:pPr>
             <a:r>
-              <a:rPr sz="1050" b="0">
+              <a:rPr sz="1300" b="0">
+                <a:solidFill>
+                  <a:srgbClr val="3D5AFE"/>
+                </a:solidFill>
+                <a:latin typeface="Intro"/>
+              </a:rPr>
+              <a:t>Решение в цифрах</a:t>
+            </a:r>
+          </a:p>
+        </p:txBody>
+      </p:sp>
+      <p:sp>
+        <p:nvSpPr>
+          <p:cNvPr id="90" name="TextBox 89"/>
+          <p:cNvSpPr txBox="1"/>
+          <p:nvPr/>
+        </p:nvSpPr>
+        <p:spPr>
+          <a:xfrm>
+            <a:off x="8460000" y="4356000"/>
+            <a:ext cx="1296000" cy="360000"/>
+          </a:xfrm>
+          <a:prstGeom prst="rect">
+            <a:avLst/>
+          </a:prstGeom>
+          <a:noFill/>
+        </p:spPr>
+        <p:txBody>
+          <a:bodyPr wrap="square" lIns="0" rIns="0" tIns="0" bIns="0" anchor="ctr">
+            <a:spAutoFit/>
+          </a:bodyPr>
+          <a:lstStyle/>
+          <a:p>
+            <a:pPr algn="l">
+              <a:lnSpc>
+                <a:spcPct val="100000"/>
+              </a:lnSpc>
+            </a:pPr>
+            <a:r>
+              <a:rPr sz="2200" b="0">
+                <a:solidFill>
+                  <a:srgbClr val="3D5AFE"/>
+                </a:solidFill>
+                <a:latin typeface="Peace Sans"/>
+              </a:rPr>
+              <a:t>2 500</a:t>
+            </a:r>
+          </a:p>
+        </p:txBody>
+      </p:sp>
+      <p:sp>
+        <p:nvSpPr>
+          <p:cNvPr id="91" name="TextBox 90"/>
+          <p:cNvSpPr txBox="1"/>
+          <p:nvPr/>
+        </p:nvSpPr>
+        <p:spPr>
+          <a:xfrm>
+            <a:off x="9792000" y="4356000"/>
+            <a:ext cx="2015999" cy="360000"/>
+          </a:xfrm>
+          <a:prstGeom prst="rect">
+            <a:avLst/>
+          </a:prstGeom>
+          <a:noFill/>
+        </p:spPr>
+        <p:txBody>
+          <a:bodyPr wrap="square" lIns="0" rIns="0" tIns="0" bIns="0" anchor="ctr">
+            <a:spAutoFit/>
+          </a:bodyPr>
+          <a:lstStyle/>
+          <a:p>
+            <a:pPr algn="l">
+              <a:lnSpc>
+                <a:spcPct val="100000"/>
+              </a:lnSpc>
+            </a:pPr>
+            <a:r>
+              <a:rPr sz="1100" b="0">
                 <a:solidFill>
                   <a:srgbClr val="141B34"/>
                 </a:solidFill>
                 <a:latin typeface="Evolventa"/>
               </a:rPr>
-              <a:t>бесплатные LLM, Ollama держит данные внутри компании</a:t>
-            </a:r>
-          </a:p>
-        </p:txBody>
-      </p:sp>
-      <p:pic>
-        <p:nvPicPr>
-          <p:cNvPr id="48" name="Picture 47" descr="i_file-spreadsheet_b.png"/>
-          <p:cNvPicPr>
-            <a:picLocks noChangeAspect="1"/>
-          </p:cNvPicPr>
-          <p:nvPr/>
-        </p:nvPicPr>
-        <p:blipFill>
-          <a:blip r:embed="rId7"/>
-          <a:stretch>
-            <a:fillRect/>
-          </a:stretch>
-        </p:blipFill>
-        <p:spPr>
-          <a:xfrm>
-            <a:off x="6948000" y="5580000"/>
-            <a:ext cx="306000" cy="306000"/>
-          </a:xfrm>
-          <a:prstGeom prst="rect">
-            <a:avLst/>
-          </a:prstGeom>
-        </p:spPr>
-      </p:pic>
-      <p:sp>
-        <p:nvSpPr>
-          <p:cNvPr id="49" name="TextBox 48"/>
-          <p:cNvSpPr txBox="1"/>
-          <p:nvPr/>
-        </p:nvSpPr>
-        <p:spPr>
-          <a:xfrm>
-            <a:off x="7380000" y="5562000"/>
-            <a:ext cx="4320000" cy="251999"/>
-          </a:xfrm>
-          <a:prstGeom prst="rect">
-            <a:avLst/>
-          </a:prstGeom>
-          <a:noFill/>
-        </p:spPr>
-        <p:txBody>
-          <a:bodyPr wrap="square" lIns="0" rIns="0" tIns="0" bIns="0" anchor="t">
+              <a:t>строк кода в 9 файлах</a:t>
+            </a:r>
+          </a:p>
+        </p:txBody>
+      </p:sp>
+      <p:sp>
+        <p:nvSpPr>
+          <p:cNvPr id="92" name="TextBox 91"/>
+          <p:cNvSpPr txBox="1"/>
+          <p:nvPr/>
+        </p:nvSpPr>
+        <p:spPr>
+          <a:xfrm>
+            <a:off x="8460000" y="4842000"/>
+            <a:ext cx="1296000" cy="360000"/>
+          </a:xfrm>
+          <a:prstGeom prst="rect">
+            <a:avLst/>
+          </a:prstGeom>
+          <a:noFill/>
+        </p:spPr>
+        <p:txBody>
+          <a:bodyPr wrap="square" lIns="0" rIns="0" tIns="0" bIns="0" anchor="ctr">
             <a:spAutoFit/>
           </a:bodyPr>
           <a:lstStyle/>
@@ -10445,35 +12138,74 @@
               </a:lnSpc>
             </a:pPr>
             <a:r>
-              <a:rPr sz="1200" b="0">
+              <a:rPr sz="2200" b="0">
+                <a:solidFill>
+                  <a:srgbClr val="3D5AFE"/>
+                </a:solidFill>
+                <a:latin typeface="Peace Sans"/>
+              </a:rPr>
+              <a:t>73</a:t>
+            </a:r>
+          </a:p>
+        </p:txBody>
+      </p:sp>
+      <p:sp>
+        <p:nvSpPr>
+          <p:cNvPr id="93" name="TextBox 92"/>
+          <p:cNvSpPr txBox="1"/>
+          <p:nvPr/>
+        </p:nvSpPr>
+        <p:spPr>
+          <a:xfrm>
+            <a:off x="9792000" y="4842000"/>
+            <a:ext cx="2015999" cy="360000"/>
+          </a:xfrm>
+          <a:prstGeom prst="rect">
+            <a:avLst/>
+          </a:prstGeom>
+          <a:noFill/>
+        </p:spPr>
+        <p:txBody>
+          <a:bodyPr wrap="square" lIns="0" rIns="0" tIns="0" bIns="0" anchor="ctr">
+            <a:spAutoFit/>
+          </a:bodyPr>
+          <a:lstStyle/>
+          <a:p>
+            <a:pPr algn="l">
+              <a:lnSpc>
+                <a:spcPct val="100000"/>
+              </a:lnSpc>
+            </a:pPr>
+            <a:r>
+              <a:rPr sz="1100" b="0">
                 <a:solidFill>
                   <a:srgbClr val="141B34"/>
                 </a:solidFill>
-                <a:latin typeface="Intro"/>
-              </a:rPr>
-              <a:t>HTML и Excel</a:t>
-            </a:r>
-          </a:p>
-        </p:txBody>
-      </p:sp>
-      <p:sp>
-        <p:nvSpPr>
-          <p:cNvPr id="50" name="TextBox 49"/>
-          <p:cNvSpPr txBox="1"/>
-          <p:nvPr/>
-        </p:nvSpPr>
-        <p:spPr>
-          <a:xfrm>
-            <a:off x="7380000" y="5803200"/>
-            <a:ext cx="4320000" cy="324000"/>
-          </a:xfrm>
-          <a:prstGeom prst="rect">
-            <a:avLst/>
-          </a:prstGeom>
-          <a:noFill/>
-        </p:spPr>
-        <p:txBody>
-          <a:bodyPr wrap="square" lIns="0" rIns="0" tIns="0" bIns="0" anchor="t">
+                <a:latin typeface="Evolventa"/>
+              </a:rPr>
+              <a:t>тестовых запроса на разбор</a:t>
+            </a:r>
+          </a:p>
+        </p:txBody>
+      </p:sp>
+      <p:sp>
+        <p:nvSpPr>
+          <p:cNvPr id="94" name="TextBox 93"/>
+          <p:cNvSpPr txBox="1"/>
+          <p:nvPr/>
+        </p:nvSpPr>
+        <p:spPr>
+          <a:xfrm>
+            <a:off x="8460000" y="5328000"/>
+            <a:ext cx="1296000" cy="360000"/>
+          </a:xfrm>
+          <a:prstGeom prst="rect">
+            <a:avLst/>
+          </a:prstGeom>
+          <a:noFill/>
+        </p:spPr>
+        <p:txBody>
+          <a:bodyPr wrap="square" lIns="0" rIns="0" tIns="0" bIns="0" anchor="ctr">
             <a:spAutoFit/>
           </a:bodyPr>
           <a:lstStyle/>
@@ -10484,20 +12216,137 @@
               </a:lnSpc>
             </a:pPr>
             <a:r>
-              <a:rPr sz="1050" b="0">
+              <a:rPr sz="2200" b="0">
+                <a:solidFill>
+                  <a:srgbClr val="3D5AFE"/>
+                </a:solidFill>
+                <a:latin typeface="Peace Sans"/>
+              </a:rPr>
+              <a:t>11</a:t>
+            </a:r>
+          </a:p>
+        </p:txBody>
+      </p:sp>
+      <p:sp>
+        <p:nvSpPr>
+          <p:cNvPr id="95" name="TextBox 94"/>
+          <p:cNvSpPr txBox="1"/>
+          <p:nvPr/>
+        </p:nvSpPr>
+        <p:spPr>
+          <a:xfrm>
+            <a:off x="9792000" y="5328000"/>
+            <a:ext cx="2015999" cy="360000"/>
+          </a:xfrm>
+          <a:prstGeom prst="rect">
+            <a:avLst/>
+          </a:prstGeom>
+          <a:noFill/>
+        </p:spPr>
+        <p:txBody>
+          <a:bodyPr wrap="square" lIns="0" rIns="0" tIns="0" bIns="0" anchor="ctr">
+            <a:spAutoFit/>
+          </a:bodyPr>
+          <a:lstStyle/>
+          <a:p>
+            <a:pPr algn="l">
+              <a:lnSpc>
+                <a:spcPct val="100000"/>
+              </a:lnSpc>
+            </a:pPr>
+            <a:r>
+              <a:rPr sz="1100" b="0">
                 <a:solidFill>
                   <a:srgbClr val="141B34"/>
                 </a:solidFill>
                 <a:latin typeface="Evolventa"/>
               </a:rPr>
-              <a:t>экспорт дашборда и таблицы с вычислениями</a:t>
-            </a:r>
-          </a:p>
-        </p:txBody>
-      </p:sp>
-      <p:sp>
-        <p:nvSpPr>
-          <p:cNvPr id="51" name="TextBox 50"/>
+              <a:t>проверок безопасности</a:t>
+            </a:r>
+          </a:p>
+        </p:txBody>
+      </p:sp>
+      <p:sp>
+        <p:nvSpPr>
+          <p:cNvPr id="96" name="TextBox 95"/>
+          <p:cNvSpPr txBox="1"/>
+          <p:nvPr/>
+        </p:nvSpPr>
+        <p:spPr>
+          <a:xfrm>
+            <a:off x="8460000" y="5813999"/>
+            <a:ext cx="1296000" cy="360000"/>
+          </a:xfrm>
+          <a:prstGeom prst="rect">
+            <a:avLst/>
+          </a:prstGeom>
+          <a:noFill/>
+        </p:spPr>
+        <p:txBody>
+          <a:bodyPr wrap="square" lIns="0" rIns="0" tIns="0" bIns="0" anchor="ctr">
+            <a:spAutoFit/>
+          </a:bodyPr>
+          <a:lstStyle/>
+          <a:p>
+            <a:pPr algn="l">
+              <a:lnSpc>
+                <a:spcPct val="100000"/>
+              </a:lnSpc>
+            </a:pPr>
+            <a:r>
+              <a:rPr sz="2200" b="0">
+                <a:solidFill>
+                  <a:srgbClr val="3D5AFE"/>
+                </a:solidFill>
+                <a:latin typeface="Peace Sans"/>
+              </a:rPr>
+              <a:t>2</a:t>
+            </a:r>
+          </a:p>
+        </p:txBody>
+      </p:sp>
+      <p:sp>
+        <p:nvSpPr>
+          <p:cNvPr id="97" name="TextBox 96"/>
+          <p:cNvSpPr txBox="1"/>
+          <p:nvPr/>
+        </p:nvSpPr>
+        <p:spPr>
+          <a:xfrm>
+            <a:off x="9792000" y="5813999"/>
+            <a:ext cx="2015999" cy="360000"/>
+          </a:xfrm>
+          <a:prstGeom prst="rect">
+            <a:avLst/>
+          </a:prstGeom>
+          <a:noFill/>
+        </p:spPr>
+        <p:txBody>
+          <a:bodyPr wrap="square" lIns="0" rIns="0" tIns="0" bIns="0" anchor="ctr">
+            <a:spAutoFit/>
+          </a:bodyPr>
+          <a:lstStyle/>
+          <a:p>
+            <a:pPr algn="l">
+              <a:lnSpc>
+                <a:spcPct val="100000"/>
+              </a:lnSpc>
+            </a:pPr>
+            <a:r>
+              <a:rPr sz="1100" b="0">
+                <a:solidFill>
+                  <a:srgbClr val="141B34"/>
+                </a:solidFill>
+                <a:latin typeface="Evolventa"/>
+              </a:rPr>
+              <a:t>команды для запуска</a:t>
+            </a:r>
+          </a:p>
+        </p:txBody>
+      </p:sp>
+      <p:sp>
+        <p:nvSpPr>
+          <p:cNvPr id="98" name="TextBox 97"/>
           <p:cNvSpPr txBox="1"/>
           <p:nvPr/>
         </p:nvSpPr>
@@ -10529,14 +12378,14 @@
                 </a:solidFill>
                 <a:latin typeface="Evolventa"/>
               </a:rPr>
-              <a:t>Источники  [2] код решения на GitHub, README</a:t>
-            </a:r>
-          </a:p>
-        </p:txBody>
-      </p:sp>
-      <p:sp>
-        <p:nvSpPr>
-          <p:cNvPr id="52" name="TextBox 51"/>
+              <a:t>Источники  [2] код решения на GitHub; замер времени на данных кейса, медиана из 5 запусков</a:t>
+            </a:r>
+          </a:p>
+        </p:txBody>
+      </p:sp>
+      <p:sp>
+        <p:nvSpPr>
+          <p:cNvPr id="99" name="TextBox 98"/>
           <p:cNvSpPr txBox="1"/>
           <p:nvPr/>
         </p:nvSpPr>
@@ -17785,7 +19634,7 @@
                 </a:solidFill>
                 <a:latin typeface="Evolventa"/>
               </a:rPr>
-              <a:t>github.com/alkornilovich/cases/tree/main/sk-challenge-puzzle-bi-bot</a:t>
+              <a:t>github.com/alkornilovich/Cases</a:t>
             </a:r>
           </a:p>
           <a:p>

--- a/sk-challenge-puzzle-bi-bot/presentation/Puzzle_BI_чат-бот.pptx
+++ b/sk-challenge-puzzle-bi-bot/presentation/Puzzle_BI_чат-бот.pptx
@@ -1264,7 +1264,7 @@
           <a:lstStyle/>
           <a:p>
             <a:r>
-              <a:t>Тайминг 50 секунд. Так выглядит ответ. Сверху KPI, план 1,25 млрд, факт 1,13, выполнение 90,4%. Ниже фильтры с поиском и переключатели. Четыре графика из одной таблицы, внизу резюме. Резюме считает код, поэтому цифры в тексте всегда совпадают с графиками.</a:t>
+              <a:t>Тайминг 50 секунд. Так выглядит ответ. Сверху KPI, план 1,25 млрд, факт 1,13, выполнение 90,4%. Ниже фильтры с поиском и переключатели. Четыре графика и таблица из одной выгрузки, сверху строка с главным выводом. Цифры в ней считает код, поэтому они всегда совпадают с графиками.</a:t>
             </a:r>
           </a:p>
         </p:txBody>
@@ -14766,7 +14766,7 @@
       </p:sp>
       <p:pic>
         <p:nvPicPr>
-          <p:cNvPr id="14" name="Picture 13" descr="s_dash.png"/>
+          <p:cNvPr id="14" name="Picture 13" descr="s_dash_top.png"/>
           <p:cNvPicPr>
             <a:picLocks noChangeAspect="1"/>
           </p:cNvPicPr>
@@ -14780,8 +14780,8 @@
         </p:blipFill>
         <p:spPr>
           <a:xfrm>
-            <a:off x="1528142" y="1710000"/>
-            <a:ext cx="5259715" cy="4590000"/>
+            <a:off x="527361" y="1710000"/>
+            <a:ext cx="7261276" cy="4589999"/>
           </a:xfrm>
           <a:prstGeom prst="rect">
             <a:avLst/>
@@ -14962,7 +14962,7 @@
                 </a:solidFill>
                 <a:latin typeface="Evolventa"/>
               </a:rPr>
-              <a:t>факт к плану и к прошлому году, мини-графики по месяцам</a:t>
+              <a:t>факт, выполнение и отклонение от плана, сравнение с прошлым годом</a:t>
             </a:r>
           </a:p>
         </p:txBody>
@@ -15189,7 +15189,7 @@
                 </a:solidFill>
                 <a:latin typeface="Intro"/>
               </a:rPr>
-              <a:t>Графики по стандарту IBCS</a:t>
+              <a:t>Графики и таблица</a:t>
             </a:r>
           </a:p>
         </p:txBody>
@@ -15228,7 +15228,7 @@
                 </a:solidFill>
                 <a:latin typeface="Evolventa"/>
               </a:rPr>
-              <a:t>факт сплошной, план контуром, прошлый год риской, отклонения зеленым и красным</a:t>
+              <a:t>факт столбцами, план линией, отставание красным</a:t>
             </a:r>
           </a:p>
         </p:txBody>
@@ -15322,7 +15322,7 @@
                 </a:solidFill>
                 <a:latin typeface="Intro"/>
               </a:rPr>
-              <a:t>Резюме</a:t>
+              <a:t>Главное</a:t>
             </a:r>
           </a:p>
         </p:txBody>
@@ -15361,7 +15361,7 @@
                 </a:solidFill>
                 <a:latin typeface="Evolventa"/>
               </a:rPr>
-              <a:t>считает код, текст по шаблону, модель не выдумывает цифры</a:t>
+              <a:t>вывод одной строкой, цифры считает код, модель их не выдумывает</a:t>
             </a:r>
           </a:p>
         </p:txBody>
@@ -16290,8 +16290,8 @@
         </p:blipFill>
         <p:spPr>
           <a:xfrm>
-            <a:off x="1063220" y="3996000"/>
-            <a:ext cx="4173559" cy="2268000"/>
+            <a:off x="1200135" y="3996000"/>
+            <a:ext cx="3899728" cy="2268000"/>
           </a:xfrm>
           <a:prstGeom prst="rect">
             <a:avLst/>

--- a/sk-challenge-puzzle-bi-bot/presentation/Puzzle_BI_чат-бот.pptx
+++ b/sk-challenge-puzzle-bi-bot/presentation/Puzzle_BI_чат-бот.pptx
@@ -11131,7 +11131,7 @@
                 </a:solidFill>
                 <a:latin typeface="Evolventa"/>
               </a:rPr>
-              <a:t>от вопроса до готового дашборда, мой замер</a:t>
+              <a:t>от вопроса до готового дашборда</a:t>
             </a:r>
           </a:p>
         </p:txBody>
